--- a/Hydrogen_Vehicle_Study.pptx
+++ b/Hydrogen_Vehicle_Study.pptx
@@ -9,9 +9,10 @@
     <p:sldId id="257" r:id="rId3"/>
     <p:sldId id="258" r:id="rId4"/>
     <p:sldId id="259" r:id="rId5"/>
+    <p:sldId id="260" r:id="rId6"/>
   </p:sldIdLst>
   <p:notesMasterIdLst>
-    <p:notesMasterId r:id="rId6"/>
+    <p:notesMasterId r:id="rId7"/>
   </p:notesMasterIdLst>
   <p:sldSz cx="12192000" cy="6858000"/>
   <p:notesSz cx="6858000" cy="12192000"/>
@@ -314,6 +315,505 @@
         <c:firstSliceAng val="0"/>
         <c:holeSize val="55"/>
       </c:doughnutChart>
+      <c:spPr>
+        <a:noFill/>
+        <a:ln>
+          <a:noFill/>
+        </a:ln>
+        <a:effectLst/>
+      </c:spPr>
+    </c:plotArea>
+    <c:plotVisOnly val="1"/>
+    <c:dispBlanksAs val="span"/>
+  </c:chart>
+  <c:spPr>
+    <a:noFill/>
+    <a:ln>
+      <a:noFill/>
+    </a:ln>
+    <a:effectLst/>
+  </c:spPr>
+  <c:externalData r:id="rId1">
+    <c:autoUpdate val="0"/>
+  </c:externalData>
+</c:chartSpace>
+</file>
+
+<file path=ppt/charts/chart10.xml><?xml version="1.0" encoding="utf-8"?>
+<c:chartSpace xmlns:c="http://schemas.openxmlformats.org/drawingml/2006/chart" xmlns:a="http://schemas.openxmlformats.org/drawingml/2006/main" xmlns:r="http://schemas.openxmlformats.org/officeDocument/2006/relationships">
+  <c:date1904 val="0"/>
+  <c:roundedCorners val="1"/>
+  <c:chart>
+    <c:autoTitleDeleted val="1"/>
+    <c:plotArea>
+      <c:layout/>
+      <c:barChart>
+        <c:barDir val="col"/>
+        <c:grouping val="clustered"/>
+        <c:varyColors val="0"/>
+        <c:ser>
+          <c:idx val="0"/>
+          <c:order val="0"/>
+          <c:tx>
+            <c:strRef>
+              <c:f>Sheet1!$B$1</c:f>
+              <c:strCache>
+                <c:ptCount val="1"/>
+                <c:pt idx="0">
+                  <c:v>s</c:v>
+                </c:pt>
+              </c:strCache>
+            </c:strRef>
+          </c:tx>
+          <c:spPr>
+            <a:solidFill>
+              <a:srgbClr val="1F3864"/>
+            </a:solidFill>
+            <a:effectLst/>
+          </c:spPr>
+          <c:invertIfNegative val="0"/>
+          <c:dLbls>
+            <c:numFmt formatCode="#,##0" sourceLinked="0"/>
+            <c:txPr>
+              <a:bodyPr/>
+              <a:lstStyle/>
+              <a:p>
+                <a:pPr>
+                  <a:defRPr b="0" i="0" strike="noStrike" sz="1200" u="none">
+                    <a:solidFill>
+                      <a:srgbClr val="262626"/>
+                    </a:solidFill>
+                    <a:latin typeface="Aptos"/>
+                  </a:defRPr>
+                </a:pPr>
+              </a:p>
+            </c:txPr>
+            <c:showLegendKey val="0"/>
+            <c:showVal val="1"/>
+            <c:showCatName val="0"/>
+            <c:showSerName val="0"/>
+            <c:showPercent val="0"/>
+            <c:showBubbleSize val="0"/>
+            <c:showLeaderLines val="0"/>
+          </c:dLbls>
+          <c:dPt>
+            <c:idx val="0"/>
+            <c:invertIfNegative val="0"/>
+            <c:bubble3D val="0"/>
+            <c:spPr>
+              <a:solidFill>
+                <a:srgbClr val="1F3864"/>
+              </a:solidFill>
+              <a:effectLst/>
+            </c:spPr>
+          </c:dPt>
+          <c:dPt>
+            <c:idx val="1"/>
+            <c:invertIfNegative val="0"/>
+            <c:bubble3D val="0"/>
+            <c:spPr>
+              <a:solidFill>
+                <a:srgbClr val="2E75B6"/>
+              </a:solidFill>
+              <a:effectLst/>
+            </c:spPr>
+          </c:dPt>
+          <c:dPt>
+            <c:idx val="2"/>
+            <c:invertIfNegative val="0"/>
+            <c:bubble3D val="0"/>
+            <c:spPr>
+              <a:solidFill>
+                <a:srgbClr val="C55A11"/>
+              </a:solidFill>
+              <a:effectLst/>
+            </c:spPr>
+          </c:dPt>
+          <c:cat>
+            <c:multiLvlStrRef>
+              <c:f>Sheet1!$A$2:$A$4</c:f>
+              <c:multiLvlStrCache>
+                <c:ptCount val="3"/>
+                <c:lvl>
+                  <c:pt idx="0">
+                    <c:v>FC Bus</c:v>
+                  </c:pt>
+                  <c:pt idx="1">
+                    <c:v>FC Truck</c:v>
+                  </c:pt>
+                  <c:pt idx="2">
+                    <c:v>H₂-ICE Truck</c:v>
+                  </c:pt>
+                </c:lvl>
+              </c:multiLvlStrCache>
+            </c:multiLvlStrRef>
+          </c:cat>
+          <c:val>
+            <c:numRef>
+              <c:f>Sheet1!$B$2:$B$4</c:f>
+              <c:numCache>
+                <c:formatCode>General</c:formatCode>
+                <c:ptCount val="3"/>
+                <c:pt idx="0">
+                  <c:v>17</c:v>
+                </c:pt>
+                <c:pt idx="1">
+                  <c:v>3</c:v>
+                </c:pt>
+                <c:pt idx="2">
+                  <c:v>13</c:v>
+                </c:pt>
+              </c:numCache>
+            </c:numRef>
+          </c:val>
+        </c:ser>
+        <c:dLbls>
+          <c:numFmt formatCode="#,##0" sourceLinked="0"/>
+          <c:txPr>
+            <a:bodyPr/>
+            <a:lstStyle/>
+            <a:p>
+              <a:pPr>
+                <a:defRPr b="0" i="0" strike="noStrike" sz="1200" u="none">
+                  <a:solidFill>
+                    <a:srgbClr val="262626"/>
+                  </a:solidFill>
+                  <a:latin typeface="Aptos"/>
+                </a:defRPr>
+              </a:pPr>
+            </a:p>
+          </c:txPr>
+          <c:showLegendKey val="0"/>
+          <c:showVal val="1"/>
+          <c:showCatName val="0"/>
+          <c:showSerName val="0"/>
+          <c:showPercent val="0"/>
+          <c:showBubbleSize val="0"/>
+          <c:showLeaderLines val="0"/>
+        </c:dLbls>
+        <c:gapWidth val="60"/>
+        <c:overlap val="0"/>
+        <c:axId val="2094734554"/>
+        <c:axId val="2094734552"/>
+        <c:axId val="2094734556"/>
+      </c:barChart>
+      <c:catAx>
+        <c:axId val="2094734554"/>
+        <c:scaling>
+          <c:orientation val="minMax"/>
+        </c:scaling>
+        <c:delete val="0"/>
+        <c:axPos val="b"/>
+        <c:numFmt formatCode="General" sourceLinked="1"/>
+        <c:majorTickMark val="out"/>
+        <c:minorTickMark val="none"/>
+        <c:tickLblPos val="low"/>
+        <c:spPr>
+          <a:ln w="12700" cap="flat">
+            <a:solidFill>
+              <a:srgbClr val="888888"/>
+            </a:solidFill>
+            <a:prstDash val="solid"/>
+            <a:round/>
+          </a:ln>
+        </c:spPr>
+        <c:txPr>
+          <a:bodyPr/>
+          <a:lstStyle/>
+          <a:p>
+            <a:pPr>
+              <a:defRPr sz="1000" b="0" i="0" u="none" strike="noStrike">
+                <a:solidFill>
+                  <a:srgbClr val="262626"/>
+                </a:solidFill>
+                <a:latin typeface="Aptos"/>
+              </a:defRPr>
+            </a:pPr>
+            <a:endParaRPr lang="en-US"/>
+          </a:p>
+        </c:txPr>
+        <c:crossAx val="2094734552"/>
+        <c:crosses val="autoZero"/>
+        <c:auto val="1"/>
+        <c:lblAlgn val="ctr"/>
+        <c:noMultiLvlLbl val="1"/>
+      </c:catAx>
+      <c:valAx>
+        <c:axId val="2094734552"/>
+        <c:scaling>
+          <c:orientation val="minMax"/>
+          <c:max val="20"/>
+        </c:scaling>
+        <c:delete val="0"/>
+        <c:axPos val="l"/>
+        <c:numFmt formatCode="General" sourceLinked="0"/>
+        <c:majorTickMark val="out"/>
+        <c:minorTickMark val="none"/>
+        <c:tickLblPos val="nextTo"/>
+        <c:spPr>
+          <a:ln w="12700" cap="flat">
+            <a:solidFill>
+              <a:srgbClr val="888888"/>
+            </a:solidFill>
+            <a:prstDash val="solid"/>
+            <a:round/>
+          </a:ln>
+        </c:spPr>
+        <c:txPr>
+          <a:bodyPr/>
+          <a:lstStyle/>
+          <a:p>
+            <a:pPr>
+              <a:defRPr sz="900" b="0" i="0" u="none" strike="noStrike">
+                <a:solidFill>
+                  <a:srgbClr val="595959"/>
+                </a:solidFill>
+                <a:latin typeface="Aptos"/>
+              </a:defRPr>
+            </a:pPr>
+            <a:endParaRPr lang="en-US"/>
+          </a:p>
+        </c:txPr>
+        <c:crossAx val="2094734554"/>
+        <c:crosses val="autoZero"/>
+        <c:crossBetween val="between"/>
+      </c:valAx>
+      <c:spPr>
+        <a:noFill/>
+        <a:ln>
+          <a:noFill/>
+        </a:ln>
+        <a:effectLst/>
+      </c:spPr>
+    </c:plotArea>
+    <c:plotVisOnly val="1"/>
+    <c:dispBlanksAs val="span"/>
+  </c:chart>
+  <c:spPr>
+    <a:noFill/>
+    <a:ln>
+      <a:noFill/>
+    </a:ln>
+    <a:effectLst/>
+  </c:spPr>
+  <c:externalData r:id="rId1">
+    <c:autoUpdate val="0"/>
+  </c:externalData>
+</c:chartSpace>
+</file>
+
+<file path=ppt/charts/chart11.xml><?xml version="1.0" encoding="utf-8"?>
+<c:chartSpace xmlns:c="http://schemas.openxmlformats.org/drawingml/2006/chart" xmlns:a="http://schemas.openxmlformats.org/drawingml/2006/main" xmlns:r="http://schemas.openxmlformats.org/officeDocument/2006/relationships">
+  <c:date1904 val="0"/>
+  <c:roundedCorners val="1"/>
+  <c:chart>
+    <c:autoTitleDeleted val="1"/>
+    <c:plotArea>
+      <c:layout/>
+      <c:barChart>
+        <c:barDir val="col"/>
+        <c:grouping val="clustered"/>
+        <c:varyColors val="0"/>
+        <c:ser>
+          <c:idx val="0"/>
+          <c:order val="0"/>
+          <c:tx>
+            <c:strRef>
+              <c:f>Sheet1!$B$1</c:f>
+              <c:strCache>
+                <c:ptCount val="1"/>
+                <c:pt idx="0">
+                  <c:v>s</c:v>
+                </c:pt>
+              </c:strCache>
+            </c:strRef>
+          </c:tx>
+          <c:spPr>
+            <a:solidFill>
+              <a:srgbClr val="3A7D22"/>
+            </a:solidFill>
+            <a:effectLst/>
+          </c:spPr>
+          <c:invertIfNegative val="0"/>
+          <c:dLbls>
+            <c:numFmt formatCode="#,##0" sourceLinked="0"/>
+            <c:txPr>
+              <a:bodyPr/>
+              <a:lstStyle/>
+              <a:p>
+                <a:pPr>
+                  <a:defRPr b="0" i="0" strike="noStrike" sz="1200" u="none">
+                    <a:solidFill>
+                      <a:srgbClr val="262626"/>
+                    </a:solidFill>
+                    <a:latin typeface="Aptos"/>
+                  </a:defRPr>
+                </a:pPr>
+              </a:p>
+            </c:txPr>
+            <c:showLegendKey val="0"/>
+            <c:showVal val="1"/>
+            <c:showCatName val="0"/>
+            <c:showSerName val="0"/>
+            <c:showPercent val="0"/>
+            <c:showBubbleSize val="0"/>
+            <c:showLeaderLines val="0"/>
+          </c:dLbls>
+          <c:cat>
+            <c:multiLvlStrRef>
+              <c:f>Sheet1!$A$2:$A$5</c:f>
+              <c:multiLvlStrCache>
+                <c:ptCount val="4"/>
+                <c:lvl>
+                  <c:pt idx="0">
+                    <c:v>Madhya Pradesh</c:v>
+                  </c:pt>
+                  <c:pt idx="1">
+                    <c:v>Gujarat*</c:v>
+                  </c:pt>
+                  <c:pt idx="2">
+                    <c:v>Kerala</c:v>
+                  </c:pt>
+                  <c:pt idx="3">
+                    <c:v>Himachal</c:v>
+                  </c:pt>
+                </c:lvl>
+              </c:multiLvlStrCache>
+            </c:multiLvlStrRef>
+          </c:cat>
+          <c:val>
+            <c:numRef>
+              <c:f>Sheet1!$B$2:$B$5</c:f>
+              <c:numCache>
+                <c:formatCode>General</c:formatCode>
+                <c:ptCount val="4"/>
+                <c:pt idx="0">
+                  <c:v>16</c:v>
+                </c:pt>
+                <c:pt idx="1">
+                  <c:v>12</c:v>
+                </c:pt>
+                <c:pt idx="2">
+                  <c:v>4</c:v>
+                </c:pt>
+                <c:pt idx="3">
+                  <c:v>1</c:v>
+                </c:pt>
+              </c:numCache>
+            </c:numRef>
+          </c:val>
+        </c:ser>
+        <c:dLbls>
+          <c:numFmt formatCode="#,##0" sourceLinked="0"/>
+          <c:txPr>
+            <a:bodyPr/>
+            <a:lstStyle/>
+            <a:p>
+              <a:pPr>
+                <a:defRPr b="0" i="0" strike="noStrike" sz="1200" u="none">
+                  <a:solidFill>
+                    <a:srgbClr val="262626"/>
+                  </a:solidFill>
+                  <a:latin typeface="Aptos"/>
+                </a:defRPr>
+              </a:pPr>
+            </a:p>
+          </c:txPr>
+          <c:showLegendKey val="0"/>
+          <c:showVal val="1"/>
+          <c:showCatName val="0"/>
+          <c:showSerName val="0"/>
+          <c:showPercent val="0"/>
+          <c:showBubbleSize val="0"/>
+          <c:showLeaderLines val="0"/>
+        </c:dLbls>
+        <c:gapWidth val="60"/>
+        <c:overlap val="0"/>
+        <c:axId val="2094734554"/>
+        <c:axId val="2094734552"/>
+        <c:axId val="2094734556"/>
+      </c:barChart>
+      <c:catAx>
+        <c:axId val="2094734554"/>
+        <c:scaling>
+          <c:orientation val="minMax"/>
+        </c:scaling>
+        <c:delete val="0"/>
+        <c:axPos val="b"/>
+        <c:numFmt formatCode="General" sourceLinked="1"/>
+        <c:majorTickMark val="out"/>
+        <c:minorTickMark val="none"/>
+        <c:tickLblPos val="low"/>
+        <c:spPr>
+          <a:ln w="12700" cap="flat">
+            <a:solidFill>
+              <a:srgbClr val="888888"/>
+            </a:solidFill>
+            <a:prstDash val="solid"/>
+            <a:round/>
+          </a:ln>
+        </c:spPr>
+        <c:txPr>
+          <a:bodyPr/>
+          <a:lstStyle/>
+          <a:p>
+            <a:pPr>
+              <a:defRPr sz="900" b="0" i="0" u="none" strike="noStrike">
+                <a:solidFill>
+                  <a:srgbClr val="262626"/>
+                </a:solidFill>
+                <a:latin typeface="Aptos"/>
+              </a:defRPr>
+            </a:pPr>
+            <a:endParaRPr lang="en-US"/>
+          </a:p>
+        </c:txPr>
+        <c:crossAx val="2094734552"/>
+        <c:crosses val="autoZero"/>
+        <c:auto val="1"/>
+        <c:lblAlgn val="ctr"/>
+        <c:noMultiLvlLbl val="1"/>
+      </c:catAx>
+      <c:valAx>
+        <c:axId val="2094734552"/>
+        <c:scaling>
+          <c:orientation val="minMax"/>
+          <c:max val="20"/>
+        </c:scaling>
+        <c:delete val="0"/>
+        <c:axPos val="l"/>
+        <c:numFmt formatCode="General" sourceLinked="0"/>
+        <c:majorTickMark val="out"/>
+        <c:minorTickMark val="none"/>
+        <c:tickLblPos val="nextTo"/>
+        <c:spPr>
+          <a:ln w="12700" cap="flat">
+            <a:solidFill>
+              <a:srgbClr val="888888"/>
+            </a:solidFill>
+            <a:prstDash val="solid"/>
+            <a:round/>
+          </a:ln>
+        </c:spPr>
+        <c:txPr>
+          <a:bodyPr/>
+          <a:lstStyle/>
+          <a:p>
+            <a:pPr>
+              <a:defRPr sz="900" b="0" i="0" u="none" strike="noStrike">
+                <a:solidFill>
+                  <a:srgbClr val="595959"/>
+                </a:solidFill>
+                <a:latin typeface="Aptos"/>
+              </a:defRPr>
+            </a:pPr>
+            <a:endParaRPr lang="en-US"/>
+          </a:p>
+        </c:txPr>
+        <c:crossAx val="2094734554"/>
+        <c:crosses val="autoZero"/>
+        <c:crossBetween val="between"/>
+      </c:valAx>
       <c:spPr>
         <a:noFill/>
         <a:ln>
@@ -1862,6 +2362,473 @@
           </c:spPr>
           <c:invertIfNegative val="0"/>
           <c:dLbls>
+            <c:numFmt formatCode="#,##0" sourceLinked="0"/>
+            <c:txPr>
+              <a:bodyPr/>
+              <a:lstStyle/>
+              <a:p>
+                <a:pPr>
+                  <a:defRPr b="0" i="0" strike="noStrike" sz="1100" u="none">
+                    <a:solidFill>
+                      <a:srgbClr val="262626"/>
+                    </a:solidFill>
+                    <a:latin typeface="Aptos"/>
+                  </a:defRPr>
+                </a:pPr>
+              </a:p>
+            </c:txPr>
+            <c:showLegendKey val="0"/>
+            <c:showVal val="1"/>
+            <c:showCatName val="0"/>
+            <c:showSerName val="0"/>
+            <c:showPercent val="0"/>
+            <c:showBubbleSize val="0"/>
+            <c:showLeaderLines val="0"/>
+          </c:dLbls>
+          <c:dPt>
+            <c:idx val="0"/>
+            <c:invertIfNegative val="0"/>
+            <c:bubble3D val="0"/>
+            <c:spPr>
+              <a:solidFill>
+                <a:srgbClr val="1F3864"/>
+              </a:solidFill>
+              <a:effectLst/>
+            </c:spPr>
+          </c:dPt>
+          <c:dPt>
+            <c:idx val="1"/>
+            <c:invertIfNegative val="0"/>
+            <c:bubble3D val="0"/>
+            <c:spPr>
+              <a:solidFill>
+                <a:srgbClr val="1F3864"/>
+              </a:solidFill>
+              <a:effectLst/>
+            </c:spPr>
+          </c:dPt>
+          <c:dPt>
+            <c:idx val="2"/>
+            <c:invertIfNegative val="0"/>
+            <c:bubble3D val="0"/>
+            <c:spPr>
+              <a:solidFill>
+                <a:srgbClr val="1F3864"/>
+              </a:solidFill>
+              <a:effectLst/>
+            </c:spPr>
+          </c:dPt>
+          <c:dPt>
+            <c:idx val="3"/>
+            <c:invertIfNegative val="0"/>
+            <c:bubble3D val="0"/>
+            <c:spPr>
+              <a:solidFill>
+                <a:srgbClr val="9DC3E6"/>
+              </a:solidFill>
+              <a:effectLst/>
+            </c:spPr>
+          </c:dPt>
+          <c:cat>
+            <c:multiLvlStrRef>
+              <c:f>Sheet1!$A$2:$A$5</c:f>
+              <c:multiLvlStrCache>
+                <c:ptCount val="4"/>
+                <c:lvl>
+                  <c:pt idx="0">
+                    <c:v>Tata Motors</c:v>
+                  </c:pt>
+                  <c:pt idx="1">
+                    <c:v>ANERT- Kerala</c:v>
+                  </c:pt>
+                  <c:pt idx="2">
+                    <c:v>NTPC- Odisha</c:v>
+                  </c:pt>
+                  <c:pt idx="3">
+                    <c:v>Others*</c:v>
+                  </c:pt>
+                </c:lvl>
+              </c:multiLvlStrCache>
+            </c:multiLvlStrRef>
+          </c:cat>
+          <c:val>
+            <c:numRef>
+              <c:f>Sheet1!$B$2:$B$5</c:f>
+              <c:numCache>
+                <c:formatCode>General</c:formatCode>
+                <c:ptCount val="4"/>
+                <c:pt idx="0">
+                  <c:v>16</c:v>
+                </c:pt>
+                <c:pt idx="1">
+                  <c:v>4</c:v>
+                </c:pt>
+                <c:pt idx="2">
+                  <c:v>3</c:v>
+                </c:pt>
+                <c:pt idx="3">
+                  <c:v>14</c:v>
+                </c:pt>
+              </c:numCache>
+            </c:numRef>
+          </c:val>
+        </c:ser>
+        <c:dLbls>
+          <c:numFmt formatCode="#,##0" sourceLinked="0"/>
+          <c:txPr>
+            <a:bodyPr/>
+            <a:lstStyle/>
+            <a:p>
+              <a:pPr>
+                <a:defRPr b="0" i="0" strike="noStrike" sz="1100" u="none">
+                  <a:solidFill>
+                    <a:srgbClr val="262626"/>
+                  </a:solidFill>
+                  <a:latin typeface="Aptos"/>
+                </a:defRPr>
+              </a:pPr>
+            </a:p>
+          </c:txPr>
+          <c:showLegendKey val="0"/>
+          <c:showVal val="1"/>
+          <c:showCatName val="0"/>
+          <c:showSerName val="0"/>
+          <c:showPercent val="0"/>
+          <c:showBubbleSize val="0"/>
+          <c:showLeaderLines val="0"/>
+        </c:dLbls>
+        <c:gapWidth val="60"/>
+        <c:overlap val="0"/>
+        <c:axId val="2094734554"/>
+        <c:axId val="2094734552"/>
+        <c:axId val="2094734556"/>
+      </c:barChart>
+      <c:catAx>
+        <c:axId val="2094734554"/>
+        <c:scaling>
+          <c:orientation val="minMax"/>
+        </c:scaling>
+        <c:delete val="0"/>
+        <c:axPos val="b"/>
+        <c:numFmt formatCode="General" sourceLinked="1"/>
+        <c:majorTickMark val="out"/>
+        <c:minorTickMark val="none"/>
+        <c:tickLblPos val="low"/>
+        <c:spPr>
+          <a:ln w="12700" cap="flat">
+            <a:solidFill>
+              <a:srgbClr val="888888"/>
+            </a:solidFill>
+            <a:prstDash val="solid"/>
+            <a:round/>
+          </a:ln>
+        </c:spPr>
+        <c:txPr>
+          <a:bodyPr/>
+          <a:lstStyle/>
+          <a:p>
+            <a:pPr>
+              <a:defRPr sz="900" b="0" i="0" u="none" strike="noStrike">
+                <a:solidFill>
+                  <a:srgbClr val="262626"/>
+                </a:solidFill>
+                <a:latin typeface="Aptos"/>
+              </a:defRPr>
+            </a:pPr>
+            <a:endParaRPr lang="en-US"/>
+          </a:p>
+        </c:txPr>
+        <c:crossAx val="2094734552"/>
+        <c:crosses val="autoZero"/>
+        <c:auto val="1"/>
+        <c:lblAlgn val="ctr"/>
+        <c:noMultiLvlLbl val="1"/>
+      </c:catAx>
+      <c:valAx>
+        <c:axId val="2094734552"/>
+        <c:scaling>
+          <c:orientation val="minMax"/>
+          <c:max val="20"/>
+        </c:scaling>
+        <c:delete val="0"/>
+        <c:axPos val="l"/>
+        <c:numFmt formatCode="General" sourceLinked="0"/>
+        <c:majorTickMark val="out"/>
+        <c:minorTickMark val="none"/>
+        <c:tickLblPos val="nextTo"/>
+        <c:spPr>
+          <a:ln w="12700" cap="flat">
+            <a:solidFill>
+              <a:srgbClr val="888888"/>
+            </a:solidFill>
+            <a:prstDash val="solid"/>
+            <a:round/>
+          </a:ln>
+        </c:spPr>
+        <c:txPr>
+          <a:bodyPr/>
+          <a:lstStyle/>
+          <a:p>
+            <a:pPr>
+              <a:defRPr sz="900" b="0" i="0" u="none" strike="noStrike">
+                <a:solidFill>
+                  <a:srgbClr val="595959"/>
+                </a:solidFill>
+                <a:latin typeface="Aptos"/>
+              </a:defRPr>
+            </a:pPr>
+            <a:endParaRPr lang="en-US"/>
+          </a:p>
+        </c:txPr>
+        <c:crossAx val="2094734554"/>
+        <c:crosses val="autoZero"/>
+        <c:crossBetween val="between"/>
+      </c:valAx>
+      <c:spPr>
+        <a:noFill/>
+        <a:ln>
+          <a:noFill/>
+        </a:ln>
+        <a:effectLst/>
+      </c:spPr>
+    </c:plotArea>
+    <c:plotVisOnly val="1"/>
+    <c:dispBlanksAs val="span"/>
+  </c:chart>
+  <c:spPr>
+    <a:noFill/>
+    <a:ln>
+      <a:noFill/>
+    </a:ln>
+    <a:effectLst/>
+  </c:spPr>
+  <c:externalData r:id="rId1">
+    <c:autoUpdate val="0"/>
+  </c:externalData>
+</c:chartSpace>
+</file>
+
+<file path=ppt/charts/chart8.xml><?xml version="1.0" encoding="utf-8"?>
+<c:chartSpace xmlns:c="http://schemas.openxmlformats.org/drawingml/2006/chart" xmlns:a="http://schemas.openxmlformats.org/drawingml/2006/main" xmlns:r="http://schemas.openxmlformats.org/officeDocument/2006/relationships">
+  <c:date1904 val="0"/>
+  <c:roundedCorners val="1"/>
+  <c:chart>
+    <c:autoTitleDeleted val="1"/>
+    <c:plotArea>
+      <c:layout/>
+      <c:doughnutChart>
+        <c:varyColors val="1"/>
+        <c:ser>
+          <c:idx val="0"/>
+          <c:order val="0"/>
+          <c:tx>
+            <c:strRef>
+              <c:f>Sheet1!$B$1</c:f>
+              <c:strCache>
+                <c:ptCount val="1"/>
+                <c:pt idx="0">
+                  <c:v>Mix</c:v>
+                </c:pt>
+              </c:strCache>
+            </c:strRef>
+          </c:tx>
+          <c:spPr>
+            <a:solidFill>
+              <a:schemeClr val="accent1"/>
+            </a:solidFill>
+            <a:ln w="9525" cap="flat">
+              <a:solidFill>
+                <a:srgbClr val="F9F9F9"/>
+              </a:solidFill>
+              <a:prstDash val="solid"/>
+              <a:round/>
+            </a:ln>
+            <a:effectLst/>
+          </c:spPr>
+          <c:dPt>
+            <c:idx val="0"/>
+            <c:bubble3D val="0"/>
+            <c:spPr>
+              <a:solidFill>
+                <a:srgbClr val="1F3864"/>
+              </a:solidFill>
+              <a:effectLst/>
+            </c:spPr>
+          </c:dPt>
+          <c:dPt>
+            <c:idx val="1"/>
+            <c:bubble3D val="0"/>
+            <c:spPr>
+              <a:solidFill>
+                <a:srgbClr val="C55A11"/>
+              </a:solidFill>
+              <a:effectLst/>
+            </c:spPr>
+          </c:dPt>
+          <c:dLbls>
+            <c:dLbl>
+              <c:idx val="0"/>
+              <c:numFmt formatCode="0%" sourceLinked="0"/>
+              <c:spPr/>
+              <c:txPr>
+                <a:bodyPr/>
+                <a:lstStyle/>
+                <a:p>
+                  <a:pPr>
+                    <a:defRPr sz="1000" b="1" i="0" u="none" strike="noStrike">
+                      <a:solidFill>
+                        <a:srgbClr val="FFFFFF"/>
+                      </a:solidFill>
+                      <a:latin typeface="Aptos"/>
+                    </a:defRPr>
+                  </a:pPr>
+                </a:p>
+              </c:txPr>
+              <c:showLegendKey val="0"/>
+              <c:showVal val="0"/>
+              <c:showCatName val="0"/>
+              <c:showSerName val="0"/>
+              <c:showPercent val="1"/>
+              <c:showBubbleSize val="0"/>
+            </c:dLbl>
+            <c:dLbl>
+              <c:idx val="1"/>
+              <c:numFmt formatCode="0%" sourceLinked="0"/>
+              <c:spPr/>
+              <c:txPr>
+                <a:bodyPr/>
+                <a:lstStyle/>
+                <a:p>
+                  <a:pPr>
+                    <a:defRPr sz="1000" b="1" i="0" u="none" strike="noStrike">
+                      <a:solidFill>
+                        <a:srgbClr val="FFFFFF"/>
+                      </a:solidFill>
+                      <a:latin typeface="Aptos"/>
+                    </a:defRPr>
+                  </a:pPr>
+                </a:p>
+              </c:txPr>
+              <c:showLegendKey val="0"/>
+              <c:showVal val="0"/>
+              <c:showCatName val="0"/>
+              <c:showSerName val="0"/>
+              <c:showPercent val="1"/>
+              <c:showBubbleSize val="0"/>
+            </c:dLbl>
+            <c:numFmt formatCode="0%" sourceLinked="0"/>
+            <c:txPr>
+              <a:bodyPr/>
+              <a:lstStyle/>
+              <a:p>
+                <a:pPr>
+                  <a:defRPr sz="1800" b="1" i="0" u="none" strike="noStrike">
+                    <a:solidFill>
+                      <a:srgbClr val="000000"/>
+                    </a:solidFill>
+                    <a:latin typeface="Arial"/>
+                  </a:defRPr>
+                </a:pPr>
+              </a:p>
+            </c:txPr>
+            <c:showLegendKey val="0"/>
+            <c:showVal val="0"/>
+            <c:showCatName val="1"/>
+            <c:showSerName val="0"/>
+            <c:showPercent val="1"/>
+            <c:showBubbleSize val="0"/>
+            <c:showLeaderLines val="0"/>
+          </c:dLbls>
+          <c:cat>
+            <c:strRef>
+              <c:f>Sheet1!$A$2:$A$3</c:f>
+              <c:strCache>
+                <c:ptCount val="2"/>
+                <c:pt idx="0">
+                  <c:v>Fuel Cell (15)</c:v>
+                </c:pt>
+                <c:pt idx="1">
+                  <c:v>H₂-ICE (22)</c:v>
+                </c:pt>
+              </c:strCache>
+            </c:strRef>
+          </c:cat>
+          <c:val>
+            <c:numRef>
+              <c:f>Sheet1!$B$2:$B$3</c:f>
+              <c:numCache>
+                <c:ptCount val="2"/>
+                <c:pt idx="0">
+                  <c:v>15</c:v>
+                </c:pt>
+                <c:pt idx="1">
+                  <c:v>22</c:v>
+                </c:pt>
+              </c:numCache>
+            </c:numRef>
+          </c:val>
+        </c:ser>
+        <c:firstSliceAng val="0"/>
+        <c:holeSize val="55"/>
+      </c:doughnutChart>
+      <c:spPr>
+        <a:noFill/>
+        <a:ln>
+          <a:noFill/>
+        </a:ln>
+        <a:effectLst/>
+      </c:spPr>
+    </c:plotArea>
+    <c:plotVisOnly val="1"/>
+    <c:dispBlanksAs val="span"/>
+  </c:chart>
+  <c:spPr>
+    <a:noFill/>
+    <a:ln>
+      <a:noFill/>
+    </a:ln>
+    <a:effectLst/>
+  </c:spPr>
+  <c:externalData r:id="rId1">
+    <c:autoUpdate val="0"/>
+  </c:externalData>
+</c:chartSpace>
+</file>
+
+<file path=ppt/charts/chart9.xml><?xml version="1.0" encoding="utf-8"?>
+<c:chartSpace xmlns:c="http://schemas.openxmlformats.org/drawingml/2006/chart" xmlns:a="http://schemas.openxmlformats.org/drawingml/2006/main" xmlns:r="http://schemas.openxmlformats.org/officeDocument/2006/relationships">
+  <c:date1904 val="0"/>
+  <c:roundedCorners val="1"/>
+  <c:chart>
+    <c:autoTitleDeleted val="1"/>
+    <c:plotArea>
+      <c:layout/>
+      <c:barChart>
+        <c:barDir val="col"/>
+        <c:grouping val="clustered"/>
+        <c:varyColors val="0"/>
+        <c:ser>
+          <c:idx val="0"/>
+          <c:order val="0"/>
+          <c:tx>
+            <c:strRef>
+              <c:f>Sheet1!$B$1</c:f>
+              <c:strCache>
+                <c:ptCount val="1"/>
+                <c:pt idx="0">
+                  <c:v>s</c:v>
+                </c:pt>
+              </c:strCache>
+            </c:strRef>
+          </c:tx>
+          <c:spPr>
+            <a:solidFill>
+              <a:srgbClr val="1F3864"/>
+            </a:solidFill>
+            <a:effectLst/>
+          </c:spPr>
+          <c:invertIfNegative val="0"/>
+          <c:dLbls>
             <c:numFmt formatCode="0.0" sourceLinked="0"/>
             <c:txPr>
               <a:bodyPr/>
@@ -2023,505 +2990,6 @@
         <c:scaling>
           <c:orientation val="minMax"/>
           <c:max val="60"/>
-        </c:scaling>
-        <c:delete val="0"/>
-        <c:axPos val="l"/>
-        <c:numFmt formatCode="General" sourceLinked="0"/>
-        <c:majorTickMark val="out"/>
-        <c:minorTickMark val="none"/>
-        <c:tickLblPos val="nextTo"/>
-        <c:spPr>
-          <a:ln w="12700" cap="flat">
-            <a:solidFill>
-              <a:srgbClr val="888888"/>
-            </a:solidFill>
-            <a:prstDash val="solid"/>
-            <a:round/>
-          </a:ln>
-        </c:spPr>
-        <c:txPr>
-          <a:bodyPr/>
-          <a:lstStyle/>
-          <a:p>
-            <a:pPr>
-              <a:defRPr sz="900" b="0" i="0" u="none" strike="noStrike">
-                <a:solidFill>
-                  <a:srgbClr val="595959"/>
-                </a:solidFill>
-                <a:latin typeface="Aptos"/>
-              </a:defRPr>
-            </a:pPr>
-            <a:endParaRPr lang="en-US"/>
-          </a:p>
-        </c:txPr>
-        <c:crossAx val="2094734554"/>
-        <c:crosses val="autoZero"/>
-        <c:crossBetween val="between"/>
-      </c:valAx>
-      <c:spPr>
-        <a:noFill/>
-        <a:ln>
-          <a:noFill/>
-        </a:ln>
-        <a:effectLst/>
-      </c:spPr>
-    </c:plotArea>
-    <c:plotVisOnly val="1"/>
-    <c:dispBlanksAs val="span"/>
-  </c:chart>
-  <c:spPr>
-    <a:noFill/>
-    <a:ln>
-      <a:noFill/>
-    </a:ln>
-    <a:effectLst/>
-  </c:spPr>
-  <c:externalData r:id="rId1">
-    <c:autoUpdate val="0"/>
-  </c:externalData>
-</c:chartSpace>
-</file>
-
-<file path=ppt/charts/chart8.xml><?xml version="1.0" encoding="utf-8"?>
-<c:chartSpace xmlns:c="http://schemas.openxmlformats.org/drawingml/2006/chart" xmlns:a="http://schemas.openxmlformats.org/drawingml/2006/main" xmlns:r="http://schemas.openxmlformats.org/officeDocument/2006/relationships">
-  <c:date1904 val="0"/>
-  <c:roundedCorners val="1"/>
-  <c:chart>
-    <c:autoTitleDeleted val="1"/>
-    <c:plotArea>
-      <c:layout/>
-      <c:barChart>
-        <c:barDir val="col"/>
-        <c:grouping val="clustered"/>
-        <c:varyColors val="0"/>
-        <c:ser>
-          <c:idx val="0"/>
-          <c:order val="0"/>
-          <c:tx>
-            <c:strRef>
-              <c:f>Sheet1!$B$1</c:f>
-              <c:strCache>
-                <c:ptCount val="1"/>
-                <c:pt idx="0">
-                  <c:v>s</c:v>
-                </c:pt>
-              </c:strCache>
-            </c:strRef>
-          </c:tx>
-          <c:spPr>
-            <a:solidFill>
-              <a:srgbClr val="1F3864"/>
-            </a:solidFill>
-            <a:effectLst/>
-          </c:spPr>
-          <c:invertIfNegative val="0"/>
-          <c:dLbls>
-            <c:numFmt formatCode="#,##0" sourceLinked="0"/>
-            <c:txPr>
-              <a:bodyPr/>
-              <a:lstStyle/>
-              <a:p>
-                <a:pPr>
-                  <a:defRPr b="0" i="0" strike="noStrike" sz="1200" u="none">
-                    <a:solidFill>
-                      <a:srgbClr val="262626"/>
-                    </a:solidFill>
-                    <a:latin typeface="Aptos"/>
-                  </a:defRPr>
-                </a:pPr>
-              </a:p>
-            </c:txPr>
-            <c:showLegendKey val="0"/>
-            <c:showVal val="1"/>
-            <c:showCatName val="0"/>
-            <c:showSerName val="0"/>
-            <c:showPercent val="0"/>
-            <c:showBubbleSize val="0"/>
-            <c:showLeaderLines val="0"/>
-          </c:dLbls>
-          <c:dPt>
-            <c:idx val="0"/>
-            <c:invertIfNegative val="0"/>
-            <c:bubble3D val="0"/>
-            <c:spPr>
-              <a:solidFill>
-                <a:srgbClr val="1F3864"/>
-              </a:solidFill>
-              <a:effectLst/>
-            </c:spPr>
-          </c:dPt>
-          <c:dPt>
-            <c:idx val="1"/>
-            <c:invertIfNegative val="0"/>
-            <c:bubble3D val="0"/>
-            <c:spPr>
-              <a:solidFill>
-                <a:srgbClr val="2E75B6"/>
-              </a:solidFill>
-              <a:effectLst/>
-            </c:spPr>
-          </c:dPt>
-          <c:dPt>
-            <c:idx val="2"/>
-            <c:invertIfNegative val="0"/>
-            <c:bubble3D val="0"/>
-            <c:spPr>
-              <a:solidFill>
-                <a:srgbClr val="C55A11"/>
-              </a:solidFill>
-              <a:effectLst/>
-            </c:spPr>
-          </c:dPt>
-          <c:cat>
-            <c:multiLvlStrRef>
-              <c:f>Sheet1!$A$2:$A$4</c:f>
-              <c:multiLvlStrCache>
-                <c:ptCount val="3"/>
-                <c:lvl>
-                  <c:pt idx="0">
-                    <c:v>FC Bus</c:v>
-                  </c:pt>
-                  <c:pt idx="1">
-                    <c:v>FC Truck</c:v>
-                  </c:pt>
-                  <c:pt idx="2">
-                    <c:v>H₂-ICE Truck</c:v>
-                  </c:pt>
-                </c:lvl>
-              </c:multiLvlStrCache>
-            </c:multiLvlStrRef>
-          </c:cat>
-          <c:val>
-            <c:numRef>
-              <c:f>Sheet1!$B$2:$B$4</c:f>
-              <c:numCache>
-                <c:formatCode>General</c:formatCode>
-                <c:ptCount val="3"/>
-                <c:pt idx="0">
-                  <c:v>17</c:v>
-                </c:pt>
-                <c:pt idx="1">
-                  <c:v>3</c:v>
-                </c:pt>
-                <c:pt idx="2">
-                  <c:v>13</c:v>
-                </c:pt>
-              </c:numCache>
-            </c:numRef>
-          </c:val>
-        </c:ser>
-        <c:dLbls>
-          <c:numFmt formatCode="#,##0" sourceLinked="0"/>
-          <c:txPr>
-            <a:bodyPr/>
-            <a:lstStyle/>
-            <a:p>
-              <a:pPr>
-                <a:defRPr b="0" i="0" strike="noStrike" sz="1200" u="none">
-                  <a:solidFill>
-                    <a:srgbClr val="262626"/>
-                  </a:solidFill>
-                  <a:latin typeface="Aptos"/>
-                </a:defRPr>
-              </a:pPr>
-            </a:p>
-          </c:txPr>
-          <c:showLegendKey val="0"/>
-          <c:showVal val="1"/>
-          <c:showCatName val="0"/>
-          <c:showSerName val="0"/>
-          <c:showPercent val="0"/>
-          <c:showBubbleSize val="0"/>
-          <c:showLeaderLines val="0"/>
-        </c:dLbls>
-        <c:gapWidth val="60"/>
-        <c:overlap val="0"/>
-        <c:axId val="2094734554"/>
-        <c:axId val="2094734552"/>
-        <c:axId val="2094734556"/>
-      </c:barChart>
-      <c:catAx>
-        <c:axId val="2094734554"/>
-        <c:scaling>
-          <c:orientation val="minMax"/>
-        </c:scaling>
-        <c:delete val="0"/>
-        <c:axPos val="b"/>
-        <c:numFmt formatCode="General" sourceLinked="1"/>
-        <c:majorTickMark val="out"/>
-        <c:minorTickMark val="none"/>
-        <c:tickLblPos val="low"/>
-        <c:spPr>
-          <a:ln w="12700" cap="flat">
-            <a:solidFill>
-              <a:srgbClr val="888888"/>
-            </a:solidFill>
-            <a:prstDash val="solid"/>
-            <a:round/>
-          </a:ln>
-        </c:spPr>
-        <c:txPr>
-          <a:bodyPr/>
-          <a:lstStyle/>
-          <a:p>
-            <a:pPr>
-              <a:defRPr sz="1000" b="0" i="0" u="none" strike="noStrike">
-                <a:solidFill>
-                  <a:srgbClr val="262626"/>
-                </a:solidFill>
-                <a:latin typeface="Aptos"/>
-              </a:defRPr>
-            </a:pPr>
-            <a:endParaRPr lang="en-US"/>
-          </a:p>
-        </c:txPr>
-        <c:crossAx val="2094734552"/>
-        <c:crosses val="autoZero"/>
-        <c:auto val="1"/>
-        <c:lblAlgn val="ctr"/>
-        <c:noMultiLvlLbl val="1"/>
-      </c:catAx>
-      <c:valAx>
-        <c:axId val="2094734552"/>
-        <c:scaling>
-          <c:orientation val="minMax"/>
-          <c:max val="20"/>
-        </c:scaling>
-        <c:delete val="0"/>
-        <c:axPos val="l"/>
-        <c:numFmt formatCode="General" sourceLinked="0"/>
-        <c:majorTickMark val="out"/>
-        <c:minorTickMark val="none"/>
-        <c:tickLblPos val="nextTo"/>
-        <c:spPr>
-          <a:ln w="12700" cap="flat">
-            <a:solidFill>
-              <a:srgbClr val="888888"/>
-            </a:solidFill>
-            <a:prstDash val="solid"/>
-            <a:round/>
-          </a:ln>
-        </c:spPr>
-        <c:txPr>
-          <a:bodyPr/>
-          <a:lstStyle/>
-          <a:p>
-            <a:pPr>
-              <a:defRPr sz="900" b="0" i="0" u="none" strike="noStrike">
-                <a:solidFill>
-                  <a:srgbClr val="595959"/>
-                </a:solidFill>
-                <a:latin typeface="Aptos"/>
-              </a:defRPr>
-            </a:pPr>
-            <a:endParaRPr lang="en-US"/>
-          </a:p>
-        </c:txPr>
-        <c:crossAx val="2094734554"/>
-        <c:crosses val="autoZero"/>
-        <c:crossBetween val="between"/>
-      </c:valAx>
-      <c:spPr>
-        <a:noFill/>
-        <a:ln>
-          <a:noFill/>
-        </a:ln>
-        <a:effectLst/>
-      </c:spPr>
-    </c:plotArea>
-    <c:plotVisOnly val="1"/>
-    <c:dispBlanksAs val="span"/>
-  </c:chart>
-  <c:spPr>
-    <a:noFill/>
-    <a:ln>
-      <a:noFill/>
-    </a:ln>
-    <a:effectLst/>
-  </c:spPr>
-  <c:externalData r:id="rId1">
-    <c:autoUpdate val="0"/>
-  </c:externalData>
-</c:chartSpace>
-</file>
-
-<file path=ppt/charts/chart9.xml><?xml version="1.0" encoding="utf-8"?>
-<c:chartSpace xmlns:c="http://schemas.openxmlformats.org/drawingml/2006/chart" xmlns:a="http://schemas.openxmlformats.org/drawingml/2006/main" xmlns:r="http://schemas.openxmlformats.org/officeDocument/2006/relationships">
-  <c:date1904 val="0"/>
-  <c:roundedCorners val="1"/>
-  <c:chart>
-    <c:autoTitleDeleted val="1"/>
-    <c:plotArea>
-      <c:layout/>
-      <c:barChart>
-        <c:barDir val="col"/>
-        <c:grouping val="clustered"/>
-        <c:varyColors val="0"/>
-        <c:ser>
-          <c:idx val="0"/>
-          <c:order val="0"/>
-          <c:tx>
-            <c:strRef>
-              <c:f>Sheet1!$B$1</c:f>
-              <c:strCache>
-                <c:ptCount val="1"/>
-                <c:pt idx="0">
-                  <c:v>s</c:v>
-                </c:pt>
-              </c:strCache>
-            </c:strRef>
-          </c:tx>
-          <c:spPr>
-            <a:solidFill>
-              <a:srgbClr val="3A7D22"/>
-            </a:solidFill>
-            <a:effectLst/>
-          </c:spPr>
-          <c:invertIfNegative val="0"/>
-          <c:dLbls>
-            <c:numFmt formatCode="#,##0" sourceLinked="0"/>
-            <c:txPr>
-              <a:bodyPr/>
-              <a:lstStyle/>
-              <a:p>
-                <a:pPr>
-                  <a:defRPr b="0" i="0" strike="noStrike" sz="1200" u="none">
-                    <a:solidFill>
-                      <a:srgbClr val="262626"/>
-                    </a:solidFill>
-                    <a:latin typeface="Aptos"/>
-                  </a:defRPr>
-                </a:pPr>
-              </a:p>
-            </c:txPr>
-            <c:showLegendKey val="0"/>
-            <c:showVal val="1"/>
-            <c:showCatName val="0"/>
-            <c:showSerName val="0"/>
-            <c:showPercent val="0"/>
-            <c:showBubbleSize val="0"/>
-            <c:showLeaderLines val="0"/>
-          </c:dLbls>
-          <c:cat>
-            <c:multiLvlStrRef>
-              <c:f>Sheet1!$A$2:$A$5</c:f>
-              <c:multiLvlStrCache>
-                <c:ptCount val="4"/>
-                <c:lvl>
-                  <c:pt idx="0">
-                    <c:v>Madhya Pradesh</c:v>
-                  </c:pt>
-                  <c:pt idx="1">
-                    <c:v>Gujarat*</c:v>
-                  </c:pt>
-                  <c:pt idx="2">
-                    <c:v>Kerala</c:v>
-                  </c:pt>
-                  <c:pt idx="3">
-                    <c:v>Himachal</c:v>
-                  </c:pt>
-                </c:lvl>
-              </c:multiLvlStrCache>
-            </c:multiLvlStrRef>
-          </c:cat>
-          <c:val>
-            <c:numRef>
-              <c:f>Sheet1!$B$2:$B$5</c:f>
-              <c:numCache>
-                <c:formatCode>General</c:formatCode>
-                <c:ptCount val="4"/>
-                <c:pt idx="0">
-                  <c:v>16</c:v>
-                </c:pt>
-                <c:pt idx="1">
-                  <c:v>12</c:v>
-                </c:pt>
-                <c:pt idx="2">
-                  <c:v>4</c:v>
-                </c:pt>
-                <c:pt idx="3">
-                  <c:v>1</c:v>
-                </c:pt>
-              </c:numCache>
-            </c:numRef>
-          </c:val>
-        </c:ser>
-        <c:dLbls>
-          <c:numFmt formatCode="#,##0" sourceLinked="0"/>
-          <c:txPr>
-            <a:bodyPr/>
-            <a:lstStyle/>
-            <a:p>
-              <a:pPr>
-                <a:defRPr b="0" i="0" strike="noStrike" sz="1200" u="none">
-                  <a:solidFill>
-                    <a:srgbClr val="262626"/>
-                  </a:solidFill>
-                  <a:latin typeface="Aptos"/>
-                </a:defRPr>
-              </a:pPr>
-            </a:p>
-          </c:txPr>
-          <c:showLegendKey val="0"/>
-          <c:showVal val="1"/>
-          <c:showCatName val="0"/>
-          <c:showSerName val="0"/>
-          <c:showPercent val="0"/>
-          <c:showBubbleSize val="0"/>
-          <c:showLeaderLines val="0"/>
-        </c:dLbls>
-        <c:gapWidth val="60"/>
-        <c:overlap val="0"/>
-        <c:axId val="2094734554"/>
-        <c:axId val="2094734552"/>
-        <c:axId val="2094734556"/>
-      </c:barChart>
-      <c:catAx>
-        <c:axId val="2094734554"/>
-        <c:scaling>
-          <c:orientation val="minMax"/>
-        </c:scaling>
-        <c:delete val="0"/>
-        <c:axPos val="b"/>
-        <c:numFmt formatCode="General" sourceLinked="1"/>
-        <c:majorTickMark val="out"/>
-        <c:minorTickMark val="none"/>
-        <c:tickLblPos val="low"/>
-        <c:spPr>
-          <a:ln w="12700" cap="flat">
-            <a:solidFill>
-              <a:srgbClr val="888888"/>
-            </a:solidFill>
-            <a:prstDash val="solid"/>
-            <a:round/>
-          </a:ln>
-        </c:spPr>
-        <c:txPr>
-          <a:bodyPr/>
-          <a:lstStyle/>
-          <a:p>
-            <a:pPr>
-              <a:defRPr sz="900" b="0" i="0" u="none" strike="noStrike">
-                <a:solidFill>
-                  <a:srgbClr val="262626"/>
-                </a:solidFill>
-                <a:latin typeface="Aptos"/>
-              </a:defRPr>
-            </a:pPr>
-            <a:endParaRPr lang="en-US"/>
-          </a:p>
-        </c:txPr>
-        <c:crossAx val="2094734552"/>
-        <c:crosses val="autoZero"/>
-        <c:auto val="1"/>
-        <c:lblAlgn val="ctr"/>
-        <c:noMultiLvlLbl val="1"/>
-      </c:catAx>
-      <c:valAx>
-        <c:axId val="2094734552"/>
-        <c:scaling>
-          <c:orientation val="minMax"/>
-          <c:max val="20"/>
         </c:scaling>
         <c:delete val="0"/>
         <c:axPos val="l"/>
@@ -3264,6 +3732,94 @@
             <a:fld id="{F7021451-1387-4CA6-816F-3879F97B5CBC}" type="slidenum">
               <a:rPr lang="en-US"/>
               <a:t>4</a:t>
+            </a:fld>
+            <a:endParaRPr lang="en-US"/>
+          </a:p>
+        </p:txBody>
+      </p:sp>
+    </p:spTree>
+    <p:extLst>
+      <p:ext uri="{BB962C8B-B14F-4D97-AF65-F5344CB8AC3E}">
+        <p14:creationId xmlns:p14="http://schemas.microsoft.com/office/powerpoint/2010/main" val="1024086991"/>
+      </p:ext>
+    </p:extLst>
+  </p:cSld>
+  <p:clrMapOvr>
+    <a:masterClrMapping/>
+  </p:clrMapOvr>
+</p:notes>
+</file>
+
+<file path=ppt/notesSlides/notesSlide5.xml><?xml version="1.0" encoding="utf-8"?>
+<p:notes xmlns:a="http://schemas.openxmlformats.org/drawingml/2006/main" xmlns:r="http://schemas.openxmlformats.org/officeDocument/2006/relationships" xmlns:p="http://schemas.openxmlformats.org/presentationml/2006/main">
+  <p:cSld>
+    <p:spTree>
+      <p:nvGrpSpPr>
+        <p:cNvPr id="1" name=""/>
+        <p:cNvGrpSpPr/>
+        <p:nvPr/>
+      </p:nvGrpSpPr>
+      <p:grpSpPr>
+        <a:xfrm>
+          <a:off x="0" y="0"/>
+          <a:ext cx="0" cy="0"/>
+          <a:chOff x="0" y="0"/>
+          <a:chExt cx="0" cy="0"/>
+        </a:xfrm>
+      </p:grpSpPr>
+      <p:sp>
+        <p:nvSpPr>
+          <p:cNvPr id="2" name="Slide Image Placeholder 1"/>
+          <p:cNvSpPr>
+            <a:spLocks noGrp="1" noRot="1" noChangeAspect="1"/>
+          </p:cNvSpPr>
+          <p:nvPr>
+            <p:ph type="sldImg"/>
+          </p:nvPr>
+        </p:nvSpPr>
+        <p:spPr/>
+      </p:sp>
+      <p:sp>
+        <p:nvSpPr>
+          <p:cNvPr id="3" name="Notes Placeholder 2"/>
+          <p:cNvSpPr>
+            <a:spLocks noGrp="1"/>
+          </p:cNvSpPr>
+          <p:nvPr>
+            <p:ph type="body" idx="1"/>
+          </p:nvPr>
+        </p:nvSpPr>
+        <p:spPr/>
+        <p:txBody>
+          <a:bodyPr/>
+          <a:lstStyle/>
+          <a:p>
+            <a:r>
+              <a:rPr lang="en-US" dirty="0"/>
+              <a:t/>
+            </a:r>
+            <a:endParaRPr lang="en-US" dirty="0"/>
+          </a:p>
+        </p:txBody>
+      </p:sp>
+      <p:sp>
+        <p:nvSpPr>
+          <p:cNvPr id="4" name="Slide Number Placeholder 3"/>
+          <p:cNvSpPr>
+            <a:spLocks noGrp="1"/>
+          </p:cNvSpPr>
+          <p:nvPr>
+            <p:ph type="sldNum" sz="quarter" idx="10"/>
+          </p:nvPr>
+        </p:nvSpPr>
+        <p:spPr/>
+        <p:txBody>
+          <a:bodyPr/>
+          <a:lstStyle/>
+          <a:p>
+            <a:fld id="{F7021451-1387-4CA6-816F-3879F97B5CBC}" type="slidenum">
+              <a:rPr lang="en-US"/>
+              <a:t>5</a:t>
             </a:fld>
             <a:endParaRPr lang="en-US"/>
           </a:p>
@@ -6383,7 +6939,7 @@
                 <a:ea typeface="Aptos" pitchFamily="34" charset="-122"/>
                 <a:cs typeface="Aptos" pitchFamily="34" charset="-120"/>
               </a:rPr>
-              <a:t>1/3</a:t>
+              <a:t>1/4</a:t>
             </a:r>
             <a:endParaRPr lang="en-US" sz="1100" dirty="0"/>
           </a:p>
@@ -7458,7 +8014,7 @@
                           <a:ea typeface="Aptos" pitchFamily="34" charset="-122"/>
                           <a:cs typeface="Aptos" pitchFamily="34" charset="-120"/>
                         </a:rPr>
-                        <a:t>Phase-1 Pilot Routes (7 of 10)</a:t>
+                        <a:t>Phase-1 Pilot Routes (7 of 10 – all in 1.c)</a:t>
                       </a:r>
                       <a:endParaRPr lang="en-US" sz="1100" dirty="0">
                         <a:latin typeface="Aptos" charset="0"/>
@@ -9656,7 +10212,7 @@
                 <a:ea typeface="Aptos" pitchFamily="34" charset="-122"/>
                 <a:cs typeface="Aptos" pitchFamily="34" charset="-120"/>
               </a:rPr>
-              <a:t>2/3</a:t>
+              <a:t>2/4</a:t>
             </a:r>
             <a:endParaRPr lang="en-US" sz="1100" dirty="0"/>
           </a:p>
@@ -9722,7 +10278,5566 @@
                 <a:ea typeface="Aptos" pitchFamily="34" charset="-122"/>
                 <a:cs typeface="Aptos" pitchFamily="34" charset="-120"/>
               </a:rPr>
-              <a:t>1.c Vehicles: India H₂ Pilots – Phase-2 Projects (Jul 2026)</a:t>
+              <a:t>1.c Vehicles: India H₂ Pilots – Phase-1 Routes (Mar 2025)</a:t>
+            </a:r>
+            <a:endParaRPr lang="en-US" sz="2600" dirty="0"/>
+          </a:p>
+        </p:txBody>
+      </p:sp>
+      <p:sp>
+        <p:nvSpPr>
+          <p:cNvPr id="3" name="Text 1"/>
+          <p:cNvSpPr txBox="1"/>
+          <p:nvPr/>
+        </p:nvSpPr>
+        <p:spPr>
+          <a:xfrm>
+            <a:off x="9601200" y="164592"/>
+            <a:ext cx="2377440" cy="411480"/>
+          </a:xfrm>
+          <a:prstGeom prst="rect">
+            <a:avLst/>
+          </a:prstGeom>
+          <a:noFill/>
+          <a:ln/>
+        </p:spPr>
+        <p:txBody>
+          <a:bodyPr wrap="square" lIns="0" tIns="0" rIns="0" bIns="0" rtlCol="0" anchor="ctr"/>
+          <a:lstStyle/>
+          <a:p>
+            <a:pPr algn="r" indent="0" marL="0">
+              <a:buNone/>
+            </a:pPr>
+            <a:r>
+              <a:rPr lang="en-US" sz="1200" i="1" dirty="0">
+                <a:solidFill>
+                  <a:srgbClr val="262626"/>
+                </a:solidFill>
+                <a:latin typeface="Aptos" pitchFamily="34" charset="0"/>
+                <a:ea typeface="Aptos" pitchFamily="34" charset="-122"/>
+                <a:cs typeface="Aptos" pitchFamily="34" charset="-120"/>
+              </a:rPr>
+              <a:t>37 vehicles · 10 routes</a:t>
+            </a:r>
+            <a:endParaRPr lang="en-US" sz="1200" dirty="0"/>
+          </a:p>
+        </p:txBody>
+      </p:sp>
+      <p:sp>
+        <p:nvSpPr>
+          <p:cNvPr id="4" name="Shape 2"/>
+          <p:cNvSpPr/>
+          <p:nvPr/>
+        </p:nvSpPr>
+        <p:spPr>
+          <a:xfrm>
+            <a:off x="228600" y="731520"/>
+            <a:ext cx="3840480" cy="1965960"/>
+          </a:xfrm>
+          <a:prstGeom prst="rect">
+            <a:avLst/>
+          </a:prstGeom>
+          <a:solidFill>
+            <a:srgbClr val="FFFFFF"/>
+          </a:solidFill>
+          <a:ln w="12700">
+            <a:solidFill>
+              <a:srgbClr val="BDD7EE"/>
+            </a:solidFill>
+            <a:prstDash val="solid"/>
+          </a:ln>
+        </p:spPr>
+      </p:sp>
+      <p:sp>
+        <p:nvSpPr>
+          <p:cNvPr id="5" name="Text 3"/>
+          <p:cNvSpPr txBox="1"/>
+          <p:nvPr/>
+        </p:nvSpPr>
+        <p:spPr>
+          <a:xfrm>
+            <a:off x="274320" y="777240"/>
+            <a:ext cx="3749040" cy="329184"/>
+          </a:xfrm>
+          <a:prstGeom prst="rect">
+            <a:avLst/>
+          </a:prstGeom>
+          <a:noFill/>
+          <a:ln/>
+        </p:spPr>
+        <p:txBody>
+          <a:bodyPr wrap="square" lIns="0" tIns="0" rIns="0" bIns="0" rtlCol="0" anchor="ctr"/>
+          <a:lstStyle/>
+          <a:p>
+            <a:pPr algn="ctr" indent="0" marL="0">
+              <a:buNone/>
+            </a:pPr>
+            <a:r>
+              <a:rPr lang="en-US" sz="1300" b="1" dirty="0">
+                <a:solidFill>
+                  <a:srgbClr val="1F3864"/>
+                </a:solidFill>
+                <a:latin typeface="Aptos" pitchFamily="34" charset="0"/>
+                <a:ea typeface="Aptos" pitchFamily="34" charset="-122"/>
+                <a:cs typeface="Aptos" pitchFamily="34" charset="-120"/>
+              </a:rPr>
+              <a:t>Phase-1 Vehicles by Project (Nos.)</a:t>
+            </a:r>
+            <a:endParaRPr lang="en-US" sz="1300" dirty="0"/>
+          </a:p>
+        </p:txBody>
+      </p:sp>
+      <p:graphicFrame>
+        <p:nvGraphicFramePr>
+          <p:cNvPr id="6" name="Chart 0" descr=""/>
+          <p:cNvGraphicFramePr/>
+          <p:nvPr/>
+        </p:nvGraphicFramePr>
+        <p:xfrm>
+          <a:off x="301752" y="1078992"/>
+          <a:ext cx="3694176" cy="1581912"/>
+        </p:xfrm>
+        <a:graphic xmlns:a="http://schemas.openxmlformats.org/drawingml/2006/main">
+          <a:graphicData uri="http://schemas.openxmlformats.org/drawingml/2006/chart">
+            <c:chart xmlns:c="http://schemas.openxmlformats.org/drawingml/2006/chart" r:id="rId1"/>
+          </a:graphicData>
+        </a:graphic>
+      </p:graphicFrame>
+      <p:sp>
+        <p:nvSpPr>
+          <p:cNvPr id="7" name="Shape 4"/>
+          <p:cNvSpPr/>
+          <p:nvPr/>
+        </p:nvSpPr>
+        <p:spPr>
+          <a:xfrm>
+            <a:off x="4178808" y="731520"/>
+            <a:ext cx="3931920" cy="1965960"/>
+          </a:xfrm>
+          <a:prstGeom prst="rect">
+            <a:avLst/>
+          </a:prstGeom>
+          <a:solidFill>
+            <a:srgbClr val="FFFFFF"/>
+          </a:solidFill>
+          <a:ln w="12700">
+            <a:solidFill>
+              <a:srgbClr val="BDD7EE"/>
+            </a:solidFill>
+            <a:prstDash val="solid"/>
+          </a:ln>
+        </p:spPr>
+      </p:sp>
+      <p:sp>
+        <p:nvSpPr>
+          <p:cNvPr id="8" name="Text 5"/>
+          <p:cNvSpPr txBox="1"/>
+          <p:nvPr/>
+        </p:nvSpPr>
+        <p:spPr>
+          <a:xfrm>
+            <a:off x="4224528" y="777240"/>
+            <a:ext cx="3840480" cy="329184"/>
+          </a:xfrm>
+          <a:prstGeom prst="rect">
+            <a:avLst/>
+          </a:prstGeom>
+          <a:noFill/>
+          <a:ln/>
+        </p:spPr>
+        <p:txBody>
+          <a:bodyPr wrap="square" lIns="0" tIns="0" rIns="0" bIns="0" rtlCol="0" anchor="ctr"/>
+          <a:lstStyle/>
+          <a:p>
+            <a:pPr algn="ctr" indent="0" marL="0">
+              <a:buNone/>
+            </a:pPr>
+            <a:r>
+              <a:rPr lang="en-US" sz="1300" b="1" dirty="0">
+                <a:solidFill>
+                  <a:srgbClr val="1F3864"/>
+                </a:solidFill>
+                <a:latin typeface="Aptos" pitchFamily="34" charset="0"/>
+                <a:ea typeface="Aptos" pitchFamily="34" charset="-122"/>
+                <a:cs typeface="Aptos" pitchFamily="34" charset="-120"/>
+              </a:rPr>
+              <a:t>Phase-1 Technology Mix</a:t>
+            </a:r>
+            <a:endParaRPr lang="en-US" sz="1300" dirty="0"/>
+          </a:p>
+        </p:txBody>
+      </p:sp>
+      <p:graphicFrame>
+        <p:nvGraphicFramePr>
+          <p:cNvPr id="9" name="Chart 1" descr=""/>
+          <p:cNvGraphicFramePr/>
+          <p:nvPr/>
+        </p:nvGraphicFramePr>
+        <p:xfrm>
+          <a:off x="4361688" y="1078992"/>
+          <a:ext cx="1645920" cy="1600200"/>
+        </p:xfrm>
+        <a:graphic xmlns:a="http://schemas.openxmlformats.org/drawingml/2006/main">
+          <a:graphicData uri="http://schemas.openxmlformats.org/drawingml/2006/chart">
+            <c:chart xmlns:c="http://schemas.openxmlformats.org/drawingml/2006/chart" r:id="rId2"/>
+          </a:graphicData>
+        </a:graphic>
+      </p:graphicFrame>
+      <p:sp>
+        <p:nvSpPr>
+          <p:cNvPr id="10" name="Text 6"/>
+          <p:cNvSpPr txBox="1"/>
+          <p:nvPr/>
+        </p:nvSpPr>
+        <p:spPr>
+          <a:xfrm>
+            <a:off x="4818888" y="1645920"/>
+            <a:ext cx="731520" cy="457200"/>
+          </a:xfrm>
+          <a:prstGeom prst="rect">
+            <a:avLst/>
+          </a:prstGeom>
+          <a:noFill/>
+          <a:ln/>
+        </p:spPr>
+        <p:txBody>
+          <a:bodyPr wrap="square" lIns="0" tIns="0" rIns="0" bIns="0" rtlCol="0" anchor="ctr"/>
+          <a:lstStyle/>
+          <a:p>
+            <a:pPr algn="ctr" indent="0" marL="0">
+              <a:buNone/>
+            </a:pPr>
+            <a:r>
+              <a:rPr lang="en-US" sz="1500" b="1" dirty="0">
+                <a:solidFill>
+                  <a:srgbClr val="1F3864"/>
+                </a:solidFill>
+                <a:latin typeface="Aptos" pitchFamily="34" charset="0"/>
+                <a:ea typeface="Aptos" pitchFamily="34" charset="-122"/>
+                <a:cs typeface="Aptos" pitchFamily="34" charset="-120"/>
+              </a:rPr>
+              <a:t>37</a:t>
+            </a:r>
+            <a:endParaRPr lang="en-US" sz="1500" dirty="0"/>
+          </a:p>
+          <a:p>
+            <a:pPr algn="ctr" indent="0" marL="0">
+              <a:buNone/>
+            </a:pPr>
+            <a:r>
+              <a:rPr lang="en-US" sz="800" dirty="0">
+                <a:solidFill>
+                  <a:srgbClr val="595959"/>
+                </a:solidFill>
+                <a:latin typeface="Aptos" pitchFamily="34" charset="0"/>
+                <a:ea typeface="Aptos" pitchFamily="34" charset="-122"/>
+                <a:cs typeface="Aptos" pitchFamily="34" charset="-120"/>
+              </a:rPr>
+              <a:t>Vehicles</a:t>
+            </a:r>
+            <a:endParaRPr lang="en-US" sz="1500" dirty="0"/>
+          </a:p>
+        </p:txBody>
+      </p:sp>
+      <p:sp>
+        <p:nvSpPr>
+          <p:cNvPr id="11" name="Shape 7"/>
+          <p:cNvSpPr/>
+          <p:nvPr/>
+        </p:nvSpPr>
+        <p:spPr>
+          <a:xfrm>
+            <a:off x="6281928" y="1581912"/>
+            <a:ext cx="146304" cy="146304"/>
+          </a:xfrm>
+          <a:prstGeom prst="rect">
+            <a:avLst/>
+          </a:prstGeom>
+          <a:solidFill>
+            <a:srgbClr val="1F3864"/>
+          </a:solidFill>
+          <a:ln w="12700">
+            <a:solidFill>
+              <a:srgbClr val="1F3864"/>
+            </a:solidFill>
+            <a:prstDash val="solid"/>
+          </a:ln>
+        </p:spPr>
+      </p:sp>
+      <p:sp>
+        <p:nvSpPr>
+          <p:cNvPr id="12" name="Text 8"/>
+          <p:cNvSpPr txBox="1"/>
+          <p:nvPr/>
+        </p:nvSpPr>
+        <p:spPr>
+          <a:xfrm>
+            <a:off x="6492240" y="1508760"/>
+            <a:ext cx="1463040" cy="457200"/>
+          </a:xfrm>
+          <a:prstGeom prst="rect">
+            <a:avLst/>
+          </a:prstGeom>
+          <a:noFill/>
+          <a:ln/>
+        </p:spPr>
+        <p:txBody>
+          <a:bodyPr wrap="square" lIns="0" tIns="0" rIns="0" bIns="0" rtlCol="0" anchor="ctr"/>
+          <a:lstStyle/>
+          <a:p>
+            <a:pPr indent="0" marL="0">
+              <a:buNone/>
+            </a:pPr>
+            <a:r>
+              <a:rPr lang="en-US" sz="1100" dirty="0">
+                <a:solidFill>
+                  <a:srgbClr val="262626"/>
+                </a:solidFill>
+                <a:latin typeface="Aptos" pitchFamily="34" charset="0"/>
+                <a:ea typeface="Aptos" pitchFamily="34" charset="-122"/>
+                <a:cs typeface="Aptos" pitchFamily="34" charset="-120"/>
+              </a:rPr>
+              <a:t>Fuel Cell</a:t>
+            </a:r>
+            <a:endParaRPr lang="en-US" sz="1100" dirty="0"/>
+          </a:p>
+          <a:p>
+            <a:pPr indent="0" marL="0">
+              <a:buNone/>
+            </a:pPr>
+            <a:r>
+              <a:rPr lang="en-US" sz="1100" b="1" dirty="0">
+                <a:solidFill>
+                  <a:srgbClr val="262626"/>
+                </a:solidFill>
+                <a:latin typeface="Aptos" pitchFamily="34" charset="0"/>
+                <a:ea typeface="Aptos" pitchFamily="34" charset="-122"/>
+                <a:cs typeface="Aptos" pitchFamily="34" charset="-120"/>
+              </a:rPr>
+              <a:t>15 Nos.</a:t>
+            </a:r>
+            <a:endParaRPr lang="en-US" sz="1100" dirty="0"/>
+          </a:p>
+        </p:txBody>
+      </p:sp>
+      <p:sp>
+        <p:nvSpPr>
+          <p:cNvPr id="13" name="Shape 9"/>
+          <p:cNvSpPr/>
+          <p:nvPr/>
+        </p:nvSpPr>
+        <p:spPr>
+          <a:xfrm>
+            <a:off x="6281928" y="2084832"/>
+            <a:ext cx="146304" cy="146304"/>
+          </a:xfrm>
+          <a:prstGeom prst="rect">
+            <a:avLst/>
+          </a:prstGeom>
+          <a:solidFill>
+            <a:srgbClr val="C55A11"/>
+          </a:solidFill>
+          <a:ln w="12700">
+            <a:solidFill>
+              <a:srgbClr val="C55A11"/>
+            </a:solidFill>
+            <a:prstDash val="solid"/>
+          </a:ln>
+        </p:spPr>
+      </p:sp>
+      <p:sp>
+        <p:nvSpPr>
+          <p:cNvPr id="14" name="Text 10"/>
+          <p:cNvSpPr txBox="1"/>
+          <p:nvPr/>
+        </p:nvSpPr>
+        <p:spPr>
+          <a:xfrm>
+            <a:off x="6492240" y="2011680"/>
+            <a:ext cx="1463040" cy="457200"/>
+          </a:xfrm>
+          <a:prstGeom prst="rect">
+            <a:avLst/>
+          </a:prstGeom>
+          <a:noFill/>
+          <a:ln/>
+        </p:spPr>
+        <p:txBody>
+          <a:bodyPr wrap="square" lIns="0" tIns="0" rIns="0" bIns="0" rtlCol="0" anchor="ctr"/>
+          <a:lstStyle/>
+          <a:p>
+            <a:pPr indent="0" marL="0">
+              <a:buNone/>
+            </a:pPr>
+            <a:r>
+              <a:rPr lang="en-US" sz="1100" dirty="0">
+                <a:solidFill>
+                  <a:srgbClr val="262626"/>
+                </a:solidFill>
+                <a:latin typeface="Aptos" pitchFamily="34" charset="0"/>
+                <a:ea typeface="Aptos" pitchFamily="34" charset="-122"/>
+                <a:cs typeface="Aptos" pitchFamily="34" charset="-120"/>
+              </a:rPr>
+              <a:t>H₂-ICE</a:t>
+            </a:r>
+            <a:endParaRPr lang="en-US" sz="1100" dirty="0"/>
+          </a:p>
+          <a:p>
+            <a:pPr indent="0" marL="0">
+              <a:buNone/>
+            </a:pPr>
+            <a:r>
+              <a:rPr lang="en-US" sz="1100" b="1" dirty="0">
+                <a:solidFill>
+                  <a:srgbClr val="262626"/>
+                </a:solidFill>
+                <a:latin typeface="Aptos" pitchFamily="34" charset="0"/>
+                <a:ea typeface="Aptos" pitchFamily="34" charset="-122"/>
+                <a:cs typeface="Aptos" pitchFamily="34" charset="-120"/>
+              </a:rPr>
+              <a:t>22 Nos.</a:t>
+            </a:r>
+            <a:endParaRPr lang="en-US" sz="1100" dirty="0"/>
+          </a:p>
+        </p:txBody>
+      </p:sp>
+      <p:sp>
+        <p:nvSpPr>
+          <p:cNvPr id="15" name="Shape 11"/>
+          <p:cNvSpPr/>
+          <p:nvPr/>
+        </p:nvSpPr>
+        <p:spPr>
+          <a:xfrm>
+            <a:off x="8220456" y="731520"/>
+            <a:ext cx="3739896" cy="1965960"/>
+          </a:xfrm>
+          <a:prstGeom prst="rect">
+            <a:avLst/>
+          </a:prstGeom>
+          <a:solidFill>
+            <a:srgbClr val="FFFFFF"/>
+          </a:solidFill>
+          <a:ln w="12700">
+            <a:solidFill>
+              <a:srgbClr val="BDD7EE"/>
+            </a:solidFill>
+            <a:prstDash val="solid"/>
+          </a:ln>
+        </p:spPr>
+      </p:sp>
+      <p:sp>
+        <p:nvSpPr>
+          <p:cNvPr id="16" name="Text 12"/>
+          <p:cNvSpPr txBox="1"/>
+          <p:nvPr/>
+        </p:nvSpPr>
+        <p:spPr>
+          <a:xfrm>
+            <a:off x="8266176" y="777240"/>
+            <a:ext cx="3648456" cy="329184"/>
+          </a:xfrm>
+          <a:prstGeom prst="rect">
+            <a:avLst/>
+          </a:prstGeom>
+          <a:noFill/>
+          <a:ln/>
+        </p:spPr>
+        <p:txBody>
+          <a:bodyPr wrap="square" lIns="0" tIns="0" rIns="0" bIns="0" rtlCol="0" anchor="ctr"/>
+          <a:lstStyle/>
+          <a:p>
+            <a:pPr algn="ctr" indent="0" marL="0">
+              <a:buNone/>
+            </a:pPr>
+            <a:r>
+              <a:rPr lang="en-US" sz="1300" b="1" dirty="0">
+                <a:solidFill>
+                  <a:srgbClr val="1F3864"/>
+                </a:solidFill>
+                <a:latin typeface="Aptos" pitchFamily="34" charset="0"/>
+                <a:ea typeface="Aptos" pitchFamily="34" charset="-122"/>
+                <a:cs typeface="Aptos" pitchFamily="34" charset="-120"/>
+              </a:rPr>
+              <a:t>Phase-1 At a Glance</a:t>
+            </a:r>
+            <a:endParaRPr lang="en-US" sz="1300" dirty="0"/>
+          </a:p>
+        </p:txBody>
+      </p:sp>
+      <p:sp>
+        <p:nvSpPr>
+          <p:cNvPr id="17" name="Shape 13"/>
+          <p:cNvSpPr/>
+          <p:nvPr/>
+        </p:nvSpPr>
+        <p:spPr>
+          <a:xfrm>
+            <a:off x="8330184" y="1115568"/>
+            <a:ext cx="1719072" cy="713232"/>
+          </a:xfrm>
+          <a:prstGeom prst="roundRect">
+            <a:avLst>
+              <a:gd name="adj" fmla="val 10256"/>
+            </a:avLst>
+          </a:prstGeom>
+          <a:solidFill>
+            <a:srgbClr val="EEF4FB"/>
+          </a:solidFill>
+          <a:ln w="12700">
+            <a:solidFill>
+              <a:srgbClr val="BDD7EE"/>
+            </a:solidFill>
+            <a:prstDash val="solid"/>
+          </a:ln>
+        </p:spPr>
+      </p:sp>
+      <p:sp>
+        <p:nvSpPr>
+          <p:cNvPr id="18" name="Text 14"/>
+          <p:cNvSpPr txBox="1"/>
+          <p:nvPr/>
+        </p:nvSpPr>
+        <p:spPr>
+          <a:xfrm>
+            <a:off x="8330184" y="1133856"/>
+            <a:ext cx="1719072" cy="676656"/>
+          </a:xfrm>
+          <a:prstGeom prst="rect">
+            <a:avLst/>
+          </a:prstGeom>
+          <a:noFill/>
+          <a:ln/>
+        </p:spPr>
+        <p:txBody>
+          <a:bodyPr wrap="square" lIns="0" tIns="0" rIns="0" bIns="0" rtlCol="0" anchor="ctr"/>
+          <a:lstStyle/>
+          <a:p>
+            <a:pPr algn="ctr" indent="0" marL="0">
+              <a:buNone/>
+            </a:pPr>
+            <a:r>
+              <a:rPr lang="en-US" sz="1800" b="1" dirty="0">
+                <a:solidFill>
+                  <a:srgbClr val="1F3864"/>
+                </a:solidFill>
+                <a:latin typeface="Aptos" pitchFamily="34" charset="0"/>
+                <a:ea typeface="Aptos" pitchFamily="34" charset="-122"/>
+                <a:cs typeface="Aptos" pitchFamily="34" charset="-120"/>
+              </a:rPr>
+              <a:t>5</a:t>
+            </a:r>
+            <a:endParaRPr lang="en-US" sz="1800" dirty="0"/>
+          </a:p>
+          <a:p>
+            <a:pPr algn="ctr" indent="0" marL="0">
+              <a:buNone/>
+            </a:pPr>
+            <a:r>
+              <a:rPr lang="en-US" sz="1000" dirty="0">
+                <a:solidFill>
+                  <a:srgbClr val="262626"/>
+                </a:solidFill>
+                <a:latin typeface="Aptos" pitchFamily="34" charset="0"/>
+                <a:ea typeface="Aptos" pitchFamily="34" charset="-122"/>
+                <a:cs typeface="Aptos" pitchFamily="34" charset="-120"/>
+              </a:rPr>
+              <a:t>pilot projects</a:t>
+            </a:r>
+            <a:endParaRPr lang="en-US" sz="1800" dirty="0"/>
+          </a:p>
+        </p:txBody>
+      </p:sp>
+      <p:sp>
+        <p:nvSpPr>
+          <p:cNvPr id="19" name="Shape 15"/>
+          <p:cNvSpPr/>
+          <p:nvPr/>
+        </p:nvSpPr>
+        <p:spPr>
+          <a:xfrm>
+            <a:off x="10113264" y="1115568"/>
+            <a:ext cx="1719072" cy="713232"/>
+          </a:xfrm>
+          <a:prstGeom prst="roundRect">
+            <a:avLst>
+              <a:gd name="adj" fmla="val 10256"/>
+            </a:avLst>
+          </a:prstGeom>
+          <a:solidFill>
+            <a:srgbClr val="EEF4FB"/>
+          </a:solidFill>
+          <a:ln w="12700">
+            <a:solidFill>
+              <a:srgbClr val="BDD7EE"/>
+            </a:solidFill>
+            <a:prstDash val="solid"/>
+          </a:ln>
+        </p:spPr>
+      </p:sp>
+      <p:sp>
+        <p:nvSpPr>
+          <p:cNvPr id="20" name="Text 16"/>
+          <p:cNvSpPr txBox="1"/>
+          <p:nvPr/>
+        </p:nvSpPr>
+        <p:spPr>
+          <a:xfrm>
+            <a:off x="10113264" y="1133856"/>
+            <a:ext cx="1719072" cy="676656"/>
+          </a:xfrm>
+          <a:prstGeom prst="rect">
+            <a:avLst/>
+          </a:prstGeom>
+          <a:noFill/>
+          <a:ln/>
+        </p:spPr>
+        <p:txBody>
+          <a:bodyPr wrap="square" lIns="0" tIns="0" rIns="0" bIns="0" rtlCol="0" anchor="ctr"/>
+          <a:lstStyle/>
+          <a:p>
+            <a:pPr algn="ctr" indent="0" marL="0">
+              <a:buNone/>
+            </a:pPr>
+            <a:r>
+              <a:rPr lang="en-US" sz="1800" b="1" dirty="0">
+                <a:solidFill>
+                  <a:srgbClr val="1F3864"/>
+                </a:solidFill>
+                <a:latin typeface="Aptos" pitchFamily="34" charset="0"/>
+                <a:ea typeface="Aptos" pitchFamily="34" charset="-122"/>
+                <a:cs typeface="Aptos" pitchFamily="34" charset="-120"/>
+              </a:rPr>
+              <a:t>10</a:t>
+            </a:r>
+            <a:endParaRPr lang="en-US" sz="1800" dirty="0"/>
+          </a:p>
+          <a:p>
+            <a:pPr algn="ctr" indent="0" marL="0">
+              <a:buNone/>
+            </a:pPr>
+            <a:r>
+              <a:rPr lang="en-US" sz="1000" dirty="0">
+                <a:solidFill>
+                  <a:srgbClr val="262626"/>
+                </a:solidFill>
+                <a:latin typeface="Aptos" pitchFamily="34" charset="0"/>
+                <a:ea typeface="Aptos" pitchFamily="34" charset="-122"/>
+                <a:cs typeface="Aptos" pitchFamily="34" charset="-120"/>
+              </a:rPr>
+              <a:t>routes</a:t>
+            </a:r>
+            <a:endParaRPr lang="en-US" sz="1800" dirty="0"/>
+          </a:p>
+        </p:txBody>
+      </p:sp>
+      <p:sp>
+        <p:nvSpPr>
+          <p:cNvPr id="21" name="Shape 17"/>
+          <p:cNvSpPr/>
+          <p:nvPr/>
+        </p:nvSpPr>
+        <p:spPr>
+          <a:xfrm>
+            <a:off x="8330184" y="1901952"/>
+            <a:ext cx="1719072" cy="713232"/>
+          </a:xfrm>
+          <a:prstGeom prst="roundRect">
+            <a:avLst>
+              <a:gd name="adj" fmla="val 10256"/>
+            </a:avLst>
+          </a:prstGeom>
+          <a:solidFill>
+            <a:srgbClr val="EEF4FB"/>
+          </a:solidFill>
+          <a:ln w="12700">
+            <a:solidFill>
+              <a:srgbClr val="BDD7EE"/>
+            </a:solidFill>
+            <a:prstDash val="solid"/>
+          </a:ln>
+        </p:spPr>
+      </p:sp>
+      <p:sp>
+        <p:nvSpPr>
+          <p:cNvPr id="22" name="Text 18"/>
+          <p:cNvSpPr txBox="1"/>
+          <p:nvPr/>
+        </p:nvSpPr>
+        <p:spPr>
+          <a:xfrm>
+            <a:off x="8330184" y="1920240"/>
+            <a:ext cx="1719072" cy="676656"/>
+          </a:xfrm>
+          <a:prstGeom prst="rect">
+            <a:avLst/>
+          </a:prstGeom>
+          <a:noFill/>
+          <a:ln/>
+        </p:spPr>
+        <p:txBody>
+          <a:bodyPr wrap="square" lIns="0" tIns="0" rIns="0" bIns="0" rtlCol="0" anchor="ctr"/>
+          <a:lstStyle/>
+          <a:p>
+            <a:pPr algn="ctr" indent="0" marL="0">
+              <a:buNone/>
+            </a:pPr>
+            <a:r>
+              <a:rPr lang="en-US" sz="1800" b="1" dirty="0">
+                <a:solidFill>
+                  <a:srgbClr val="3A7D22"/>
+                </a:solidFill>
+                <a:latin typeface="Aptos" pitchFamily="34" charset="0"/>
+                <a:ea typeface="Aptos" pitchFamily="34" charset="-122"/>
+                <a:cs typeface="Aptos" pitchFamily="34" charset="-120"/>
+              </a:rPr>
+              <a:t>9</a:t>
+            </a:r>
+            <a:endParaRPr lang="en-US" sz="1800" dirty="0"/>
+          </a:p>
+          <a:p>
+            <a:pPr algn="ctr" indent="0" marL="0">
+              <a:buNone/>
+            </a:pPr>
+            <a:r>
+              <a:rPr lang="en-US" sz="1000" dirty="0">
+                <a:solidFill>
+                  <a:srgbClr val="262626"/>
+                </a:solidFill>
+                <a:latin typeface="Aptos" pitchFamily="34" charset="0"/>
+                <a:ea typeface="Aptos" pitchFamily="34" charset="-122"/>
+                <a:cs typeface="Aptos" pitchFamily="34" charset="-120"/>
+              </a:rPr>
+              <a:t>H₂ refuelling stations</a:t>
+            </a:r>
+            <a:endParaRPr lang="en-US" sz="1800" dirty="0"/>
+          </a:p>
+        </p:txBody>
+      </p:sp>
+      <p:sp>
+        <p:nvSpPr>
+          <p:cNvPr id="23" name="Shape 19"/>
+          <p:cNvSpPr/>
+          <p:nvPr/>
+        </p:nvSpPr>
+        <p:spPr>
+          <a:xfrm>
+            <a:off x="10113264" y="1901952"/>
+            <a:ext cx="1719072" cy="713232"/>
+          </a:xfrm>
+          <a:prstGeom prst="roundRect">
+            <a:avLst>
+              <a:gd name="adj" fmla="val 10256"/>
+            </a:avLst>
+          </a:prstGeom>
+          <a:solidFill>
+            <a:srgbClr val="EEF4FB"/>
+          </a:solidFill>
+          <a:ln w="12700">
+            <a:solidFill>
+              <a:srgbClr val="BDD7EE"/>
+            </a:solidFill>
+            <a:prstDash val="solid"/>
+          </a:ln>
+        </p:spPr>
+      </p:sp>
+      <p:sp>
+        <p:nvSpPr>
+          <p:cNvPr id="24" name="Text 20"/>
+          <p:cNvSpPr txBox="1"/>
+          <p:nvPr/>
+        </p:nvSpPr>
+        <p:spPr>
+          <a:xfrm>
+            <a:off x="10113264" y="1920240"/>
+            <a:ext cx="1719072" cy="676656"/>
+          </a:xfrm>
+          <a:prstGeom prst="rect">
+            <a:avLst/>
+          </a:prstGeom>
+          <a:noFill/>
+          <a:ln/>
+        </p:spPr>
+        <p:txBody>
+          <a:bodyPr wrap="square" lIns="0" tIns="0" rIns="0" bIns="0" rtlCol="0" anchor="ctr"/>
+          <a:lstStyle/>
+          <a:p>
+            <a:pPr algn="ctr" indent="0" marL="0">
+              <a:buNone/>
+            </a:pPr>
+            <a:r>
+              <a:rPr lang="en-US" sz="1800" b="1" dirty="0">
+                <a:solidFill>
+                  <a:srgbClr val="C55A11"/>
+                </a:solidFill>
+                <a:latin typeface="Aptos" pitchFamily="34" charset="0"/>
+                <a:ea typeface="Aptos" pitchFamily="34" charset="-122"/>
+                <a:cs typeface="Aptos" pitchFamily="34" charset="-120"/>
+              </a:rPr>
+              <a:t>₹208 cr</a:t>
+            </a:r>
+            <a:endParaRPr lang="en-US" sz="1800" dirty="0"/>
+          </a:p>
+          <a:p>
+            <a:pPr algn="ctr" indent="0" marL="0">
+              <a:buNone/>
+            </a:pPr>
+            <a:r>
+              <a:rPr lang="en-US" sz="1000" dirty="0">
+                <a:solidFill>
+                  <a:srgbClr val="262626"/>
+                </a:solidFill>
+                <a:latin typeface="Aptos" pitchFamily="34" charset="0"/>
+                <a:ea typeface="Aptos" pitchFamily="34" charset="-122"/>
+                <a:cs typeface="Aptos" pitchFamily="34" charset="-120"/>
+              </a:rPr>
+              <a:t>Govt. support</a:t>
+            </a:r>
+            <a:endParaRPr lang="en-US" sz="1800" dirty="0"/>
+          </a:p>
+        </p:txBody>
+      </p:sp>
+      <p:graphicFrame>
+        <p:nvGraphicFramePr>
+          <p:cNvPr id="5" name="Table 0"/>
+          <p:cNvGraphicFramePr>
+            <a:graphicFrameLocks noGrp="1"/>
+          </p:cNvGraphicFramePr>
+          <p:nvPr>
+            <p:extLst>
+              <p:ext uri="{D42A27DB-BD31-4B8C-83A1-F6EECF244321}">
+                <p14:modId xmlns:p14="http://schemas.microsoft.com/office/powerpoint/2010/main" val="1579011935"/>
+              </p:ext>
+            </p:extLst>
+          </p:nvPr>
+        </p:nvGraphicFramePr>
+        <p:xfrm>
+          <a:off x="228600" y="2788920"/>
+          <a:ext cx="11731752" cy="914400"/>
+        </p:xfrm>
+        <a:graphic>
+          <a:graphicData uri="http://schemas.openxmlformats.org/drawingml/2006/table">
+            <a:tbl>
+              <a:tblPr/>
+              <a:tblGrid>
+                <a:gridCol w="411480"/>
+                <a:gridCol w="2514600"/>
+                <a:gridCol w="1463040"/>
+                <a:gridCol w="2788920"/>
+                <a:gridCol w="2633472"/>
+                <a:gridCol w="1920240"/>
+              </a:tblGrid>
+              <a:tr h="292608">
+                <a:tc>
+                  <a:txBody>
+                    <a:bodyPr/>
+                    <a:lstStyle/>
+                    <a:p>
+                      <a:pPr algn="ctr" indent="0" marL="0">
+                        <a:buNone/>
+                      </a:pPr>
+                      <a:r>
+                        <a:rPr lang="en-US" sz="1000" b="1" dirty="0">
+                          <a:solidFill>
+                            <a:srgbClr val="FFFFFF"/>
+                          </a:solidFill>
+                          <a:latin typeface="Aptos" pitchFamily="34" charset="0"/>
+                          <a:ea typeface="Aptos" pitchFamily="34" charset="-122"/>
+                          <a:cs typeface="Aptos" pitchFamily="34" charset="-120"/>
+                        </a:rPr>
+                        <a:t>SN</a:t>
+                      </a:r>
+                      <a:endParaRPr lang="en-US" sz="1000" dirty="0">
+                        <a:latin typeface="Aptos" charset="0"/>
+                        <a:ea typeface="Aptos" charset="0"/>
+                        <a:cs typeface="Aptos" charset="0"/>
+                      </a:endParaRPr>
+                    </a:p>
+                  </a:txBody>
+                  <a:tcPr marL="63500" marR="63500" marT="25400" marB="25400" anchor="ctr">
+                    <a:lnL w="9525" cap="flat" cmpd="sng" algn="ctr">
+                      <a:solidFill>
+                        <a:srgbClr val="BDD7EE"/>
+                      </a:solidFill>
+                      <a:prstDash val="solid"/>
+                      <a:round/>
+                      <a:headEnd type="none" w="med" len="med"/>
+                      <a:tailEnd type="none" w="med" len="med"/>
+                    </a:lnL>
+                    <a:lnR w="9525" cap="flat" cmpd="sng" algn="ctr">
+                      <a:solidFill>
+                        <a:srgbClr val="BDD7EE"/>
+                      </a:solidFill>
+                      <a:prstDash val="solid"/>
+                      <a:round/>
+                      <a:headEnd type="none" w="med" len="med"/>
+                      <a:tailEnd type="none" w="med" len="med"/>
+                    </a:lnR>
+                    <a:lnT w="9525" cap="flat" cmpd="sng" algn="ctr">
+                      <a:solidFill>
+                        <a:srgbClr val="BDD7EE"/>
+                      </a:solidFill>
+                      <a:prstDash val="solid"/>
+                      <a:round/>
+                      <a:headEnd type="none" w="med" len="med"/>
+                      <a:tailEnd type="none" w="med" len="med"/>
+                    </a:lnT>
+                    <a:lnB w="9525" cap="flat" cmpd="sng" algn="ctr">
+                      <a:solidFill>
+                        <a:srgbClr val="BDD7EE"/>
+                      </a:solidFill>
+                      <a:prstDash val="solid"/>
+                      <a:round/>
+                      <a:headEnd type="none" w="med" len="med"/>
+                      <a:tailEnd type="none" w="med" len="med"/>
+                    </a:lnB>
+                    <a:solidFill>
+                      <a:srgbClr val="1F3864"/>
+                    </a:solidFill>
+                  </a:tcPr>
+                </a:tc>
+                <a:tc>
+                  <a:txBody>
+                    <a:bodyPr/>
+                    <a:lstStyle/>
+                    <a:p>
+                      <a:pPr algn="ctr" indent="0" marL="0">
+                        <a:buNone/>
+                      </a:pPr>
+                      <a:r>
+                        <a:rPr lang="en-US" sz="1000" b="1" dirty="0">
+                          <a:solidFill>
+                            <a:srgbClr val="FFFFFF"/>
+                          </a:solidFill>
+                          <a:latin typeface="Aptos" pitchFamily="34" charset="0"/>
+                          <a:ea typeface="Aptos" pitchFamily="34" charset="-122"/>
+                          <a:cs typeface="Aptos" pitchFamily="34" charset="-120"/>
+                        </a:rPr>
+                        <a:t>Route</a:t>
+                      </a:r>
+                      <a:endParaRPr lang="en-US" sz="1000" dirty="0">
+                        <a:latin typeface="Aptos" charset="0"/>
+                        <a:ea typeface="Aptos" charset="0"/>
+                        <a:cs typeface="Aptos" charset="0"/>
+                      </a:endParaRPr>
+                    </a:p>
+                  </a:txBody>
+                  <a:tcPr marL="63500" marR="63500" marT="25400" marB="25400" anchor="ctr">
+                    <a:lnL w="9525" cap="flat" cmpd="sng" algn="ctr">
+                      <a:solidFill>
+                        <a:srgbClr val="BDD7EE"/>
+                      </a:solidFill>
+                      <a:prstDash val="solid"/>
+                      <a:round/>
+                      <a:headEnd type="none" w="med" len="med"/>
+                      <a:tailEnd type="none" w="med" len="med"/>
+                    </a:lnL>
+                    <a:lnR w="9525" cap="flat" cmpd="sng" algn="ctr">
+                      <a:solidFill>
+                        <a:srgbClr val="BDD7EE"/>
+                      </a:solidFill>
+                      <a:prstDash val="solid"/>
+                      <a:round/>
+                      <a:headEnd type="none" w="med" len="med"/>
+                      <a:tailEnd type="none" w="med" len="med"/>
+                    </a:lnR>
+                    <a:lnT w="9525" cap="flat" cmpd="sng" algn="ctr">
+                      <a:solidFill>
+                        <a:srgbClr val="BDD7EE"/>
+                      </a:solidFill>
+                      <a:prstDash val="solid"/>
+                      <a:round/>
+                      <a:headEnd type="none" w="med" len="med"/>
+                      <a:tailEnd type="none" w="med" len="med"/>
+                    </a:lnT>
+                    <a:lnB w="9525" cap="flat" cmpd="sng" algn="ctr">
+                      <a:solidFill>
+                        <a:srgbClr val="BDD7EE"/>
+                      </a:solidFill>
+                      <a:prstDash val="solid"/>
+                      <a:round/>
+                      <a:headEnd type="none" w="med" len="med"/>
+                      <a:tailEnd type="none" w="med" len="med"/>
+                    </a:lnB>
+                    <a:solidFill>
+                      <a:srgbClr val="1F3864"/>
+                    </a:solidFill>
+                  </a:tcPr>
+                </a:tc>
+                <a:tc>
+                  <a:txBody>
+                    <a:bodyPr/>
+                    <a:lstStyle/>
+                    <a:p>
+                      <a:pPr algn="ctr" indent="0" marL="0">
+                        <a:buNone/>
+                      </a:pPr>
+                      <a:r>
+                        <a:rPr lang="en-US" sz="1000" b="1" dirty="0">
+                          <a:solidFill>
+                            <a:srgbClr val="FFFFFF"/>
+                          </a:solidFill>
+                          <a:latin typeface="Aptos" pitchFamily="34" charset="0"/>
+                          <a:ea typeface="Aptos" pitchFamily="34" charset="-122"/>
+                          <a:cs typeface="Aptos" pitchFamily="34" charset="-120"/>
+                        </a:rPr>
+                        <a:t>State(s)</a:t>
+                      </a:r>
+                      <a:endParaRPr lang="en-US" sz="1000" dirty="0">
+                        <a:latin typeface="Aptos" charset="0"/>
+                        <a:ea typeface="Aptos" charset="0"/>
+                        <a:cs typeface="Aptos" charset="0"/>
+                      </a:endParaRPr>
+                    </a:p>
+                  </a:txBody>
+                  <a:tcPr marL="63500" marR="63500" marT="25400" marB="25400" anchor="ctr">
+                    <a:lnL w="9525" cap="flat" cmpd="sng" algn="ctr">
+                      <a:solidFill>
+                        <a:srgbClr val="BDD7EE"/>
+                      </a:solidFill>
+                      <a:prstDash val="solid"/>
+                      <a:round/>
+                      <a:headEnd type="none" w="med" len="med"/>
+                      <a:tailEnd type="none" w="med" len="med"/>
+                    </a:lnL>
+                    <a:lnR w="9525" cap="flat" cmpd="sng" algn="ctr">
+                      <a:solidFill>
+                        <a:srgbClr val="BDD7EE"/>
+                      </a:solidFill>
+                      <a:prstDash val="solid"/>
+                      <a:round/>
+                      <a:headEnd type="none" w="med" len="med"/>
+                      <a:tailEnd type="none" w="med" len="med"/>
+                    </a:lnR>
+                    <a:lnT w="9525" cap="flat" cmpd="sng" algn="ctr">
+                      <a:solidFill>
+                        <a:srgbClr val="BDD7EE"/>
+                      </a:solidFill>
+                      <a:prstDash val="solid"/>
+                      <a:round/>
+                      <a:headEnd type="none" w="med" len="med"/>
+                      <a:tailEnd type="none" w="med" len="med"/>
+                    </a:lnT>
+                    <a:lnB w="9525" cap="flat" cmpd="sng" algn="ctr">
+                      <a:solidFill>
+                        <a:srgbClr val="BDD7EE"/>
+                      </a:solidFill>
+                      <a:prstDash val="solid"/>
+                      <a:round/>
+                      <a:headEnd type="none" w="med" len="med"/>
+                      <a:tailEnd type="none" w="med" len="med"/>
+                    </a:lnB>
+                    <a:solidFill>
+                      <a:srgbClr val="1F3864"/>
+                    </a:solidFill>
+                  </a:tcPr>
+                </a:tc>
+                <a:tc>
+                  <a:txBody>
+                    <a:bodyPr/>
+                    <a:lstStyle/>
+                    <a:p>
+                      <a:pPr algn="ctr" indent="0" marL="0">
+                        <a:buNone/>
+                      </a:pPr>
+                      <a:r>
+                        <a:rPr lang="en-US" sz="1000" b="1" dirty="0">
+                          <a:solidFill>
+                            <a:srgbClr val="FFFFFF"/>
+                          </a:solidFill>
+                          <a:latin typeface="Aptos" pitchFamily="34" charset="0"/>
+                          <a:ea typeface="Aptos" pitchFamily="34" charset="-122"/>
+                          <a:cs typeface="Aptos" pitchFamily="34" charset="-120"/>
+                        </a:rPr>
+                        <a:t>Project Lead &amp; Partners</a:t>
+                      </a:r>
+                      <a:endParaRPr lang="en-US" sz="1000" dirty="0">
+                        <a:latin typeface="Aptos" charset="0"/>
+                        <a:ea typeface="Aptos" charset="0"/>
+                        <a:cs typeface="Aptos" charset="0"/>
+                      </a:endParaRPr>
+                    </a:p>
+                  </a:txBody>
+                  <a:tcPr marL="63500" marR="63500" marT="25400" marB="25400" anchor="ctr">
+                    <a:lnL w="9525" cap="flat" cmpd="sng" algn="ctr">
+                      <a:solidFill>
+                        <a:srgbClr val="BDD7EE"/>
+                      </a:solidFill>
+                      <a:prstDash val="solid"/>
+                      <a:round/>
+                      <a:headEnd type="none" w="med" len="med"/>
+                      <a:tailEnd type="none" w="med" len="med"/>
+                    </a:lnL>
+                    <a:lnR w="9525" cap="flat" cmpd="sng" algn="ctr">
+                      <a:solidFill>
+                        <a:srgbClr val="BDD7EE"/>
+                      </a:solidFill>
+                      <a:prstDash val="solid"/>
+                      <a:round/>
+                      <a:headEnd type="none" w="med" len="med"/>
+                      <a:tailEnd type="none" w="med" len="med"/>
+                    </a:lnR>
+                    <a:lnT w="9525" cap="flat" cmpd="sng" algn="ctr">
+                      <a:solidFill>
+                        <a:srgbClr val="BDD7EE"/>
+                      </a:solidFill>
+                      <a:prstDash val="solid"/>
+                      <a:round/>
+                      <a:headEnd type="none" w="med" len="med"/>
+                      <a:tailEnd type="none" w="med" len="med"/>
+                    </a:lnT>
+                    <a:lnB w="9525" cap="flat" cmpd="sng" algn="ctr">
+                      <a:solidFill>
+                        <a:srgbClr val="BDD7EE"/>
+                      </a:solidFill>
+                      <a:prstDash val="solid"/>
+                      <a:round/>
+                      <a:headEnd type="none" w="med" len="med"/>
+                      <a:tailEnd type="none" w="med" len="med"/>
+                    </a:lnB>
+                    <a:solidFill>
+                      <a:srgbClr val="1F3864"/>
+                    </a:solidFill>
+                  </a:tcPr>
+                </a:tc>
+                <a:tc>
+                  <a:txBody>
+                    <a:bodyPr/>
+                    <a:lstStyle/>
+                    <a:p>
+                      <a:pPr algn="ctr" indent="0" marL="0">
+                        <a:buNone/>
+                      </a:pPr>
+                      <a:r>
+                        <a:rPr lang="en-US" sz="1000" b="1" dirty="0">
+                          <a:solidFill>
+                            <a:srgbClr val="FFFFFF"/>
+                          </a:solidFill>
+                          <a:latin typeface="Aptos" pitchFamily="34" charset="0"/>
+                          <a:ea typeface="Aptos" pitchFamily="34" charset="-122"/>
+                          <a:cs typeface="Aptos" pitchFamily="34" charset="-120"/>
+                        </a:rPr>
+                        <a:t>Vehicles</a:t>
+                      </a:r>
+                      <a:endParaRPr lang="en-US" sz="1000" dirty="0">
+                        <a:latin typeface="Aptos" charset="0"/>
+                        <a:ea typeface="Aptos" charset="0"/>
+                        <a:cs typeface="Aptos" charset="0"/>
+                      </a:endParaRPr>
+                    </a:p>
+                  </a:txBody>
+                  <a:tcPr marL="63500" marR="63500" marT="25400" marB="25400" anchor="ctr">
+                    <a:lnL w="9525" cap="flat" cmpd="sng" algn="ctr">
+                      <a:solidFill>
+                        <a:srgbClr val="BDD7EE"/>
+                      </a:solidFill>
+                      <a:prstDash val="solid"/>
+                      <a:round/>
+                      <a:headEnd type="none" w="med" len="med"/>
+                      <a:tailEnd type="none" w="med" len="med"/>
+                    </a:lnL>
+                    <a:lnR w="9525" cap="flat" cmpd="sng" algn="ctr">
+                      <a:solidFill>
+                        <a:srgbClr val="BDD7EE"/>
+                      </a:solidFill>
+                      <a:prstDash val="solid"/>
+                      <a:round/>
+                      <a:headEnd type="none" w="med" len="med"/>
+                      <a:tailEnd type="none" w="med" len="med"/>
+                    </a:lnR>
+                    <a:lnT w="9525" cap="flat" cmpd="sng" algn="ctr">
+                      <a:solidFill>
+                        <a:srgbClr val="BDD7EE"/>
+                      </a:solidFill>
+                      <a:prstDash val="solid"/>
+                      <a:round/>
+                      <a:headEnd type="none" w="med" len="med"/>
+                      <a:tailEnd type="none" w="med" len="med"/>
+                    </a:lnT>
+                    <a:lnB w="9525" cap="flat" cmpd="sng" algn="ctr">
+                      <a:solidFill>
+                        <a:srgbClr val="BDD7EE"/>
+                      </a:solidFill>
+                      <a:prstDash val="solid"/>
+                      <a:round/>
+                      <a:headEnd type="none" w="med" len="med"/>
+                      <a:tailEnd type="none" w="med" len="med"/>
+                    </a:lnB>
+                    <a:solidFill>
+                      <a:srgbClr val="1F3864"/>
+                    </a:solidFill>
+                  </a:tcPr>
+                </a:tc>
+                <a:tc>
+                  <a:txBody>
+                    <a:bodyPr/>
+                    <a:lstStyle/>
+                    <a:p>
+                      <a:pPr algn="ctr" indent="0" marL="0">
+                        <a:buNone/>
+                      </a:pPr>
+                      <a:r>
+                        <a:rPr lang="en-US" sz="1000" b="1" dirty="0">
+                          <a:solidFill>
+                            <a:srgbClr val="FFFFFF"/>
+                          </a:solidFill>
+                          <a:latin typeface="Aptos" pitchFamily="34" charset="0"/>
+                          <a:ea typeface="Aptos" pitchFamily="34" charset="-122"/>
+                          <a:cs typeface="Aptos" pitchFamily="34" charset="-120"/>
+                        </a:rPr>
+                        <a:t>Refuelling / Remarks</a:t>
+                      </a:r>
+                      <a:endParaRPr lang="en-US" sz="1000" dirty="0">
+                        <a:latin typeface="Aptos" charset="0"/>
+                        <a:ea typeface="Aptos" charset="0"/>
+                        <a:cs typeface="Aptos" charset="0"/>
+                      </a:endParaRPr>
+                    </a:p>
+                  </a:txBody>
+                  <a:tcPr marL="63500" marR="63500" marT="25400" marB="25400" anchor="ctr">
+                    <a:lnL w="9525" cap="flat" cmpd="sng" algn="ctr">
+                      <a:solidFill>
+                        <a:srgbClr val="BDD7EE"/>
+                      </a:solidFill>
+                      <a:prstDash val="solid"/>
+                      <a:round/>
+                      <a:headEnd type="none" w="med" len="med"/>
+                      <a:tailEnd type="none" w="med" len="med"/>
+                    </a:lnL>
+                    <a:lnR w="9525" cap="flat" cmpd="sng" algn="ctr">
+                      <a:solidFill>
+                        <a:srgbClr val="BDD7EE"/>
+                      </a:solidFill>
+                      <a:prstDash val="solid"/>
+                      <a:round/>
+                      <a:headEnd type="none" w="med" len="med"/>
+                      <a:tailEnd type="none" w="med" len="med"/>
+                    </a:lnR>
+                    <a:lnT w="9525" cap="flat" cmpd="sng" algn="ctr">
+                      <a:solidFill>
+                        <a:srgbClr val="BDD7EE"/>
+                      </a:solidFill>
+                      <a:prstDash val="solid"/>
+                      <a:round/>
+                      <a:headEnd type="none" w="med" len="med"/>
+                      <a:tailEnd type="none" w="med" len="med"/>
+                    </a:lnT>
+                    <a:lnB w="9525" cap="flat" cmpd="sng" algn="ctr">
+                      <a:solidFill>
+                        <a:srgbClr val="BDD7EE"/>
+                      </a:solidFill>
+                      <a:prstDash val="solid"/>
+                      <a:round/>
+                      <a:headEnd type="none" w="med" len="med"/>
+                      <a:tailEnd type="none" w="med" len="med"/>
+                    </a:lnB>
+                    <a:solidFill>
+                      <a:srgbClr val="1F3864"/>
+                    </a:solidFill>
+                  </a:tcPr>
+                </a:tc>
+              </a:tr>
+              <a:tr h="292608">
+                <a:tc>
+                  <a:txBody>
+                    <a:bodyPr/>
+                    <a:lstStyle/>
+                    <a:p>
+                      <a:pPr algn="ctr" indent="0" marL="0">
+                        <a:buNone/>
+                      </a:pPr>
+                      <a:r>
+                        <a:rPr lang="en-US" sz="1000" b="1" dirty="0">
+                          <a:solidFill>
+                            <a:srgbClr val="262626"/>
+                          </a:solidFill>
+                          <a:latin typeface="Aptos" pitchFamily="34" charset="0"/>
+                          <a:ea typeface="Aptos" pitchFamily="34" charset="-122"/>
+                          <a:cs typeface="Aptos" pitchFamily="34" charset="-120"/>
+                        </a:rPr>
+                        <a:t>1</a:t>
+                      </a:r>
+                      <a:endParaRPr lang="en-US" sz="1000" dirty="0">
+                        <a:latin typeface="Aptos" charset="0"/>
+                        <a:ea typeface="Aptos" charset="0"/>
+                        <a:cs typeface="Aptos" charset="0"/>
+                      </a:endParaRPr>
+                    </a:p>
+                  </a:txBody>
+                  <a:tcPr marL="63500" marR="63500" marT="25400" marB="25400" anchor="ctr">
+                    <a:lnL w="9525" cap="flat" cmpd="sng" algn="ctr">
+                      <a:solidFill>
+                        <a:srgbClr val="BDD7EE"/>
+                      </a:solidFill>
+                      <a:prstDash val="solid"/>
+                      <a:round/>
+                      <a:headEnd type="none" w="med" len="med"/>
+                      <a:tailEnd type="none" w="med" len="med"/>
+                    </a:lnL>
+                    <a:lnR w="9525" cap="flat" cmpd="sng" algn="ctr">
+                      <a:solidFill>
+                        <a:srgbClr val="BDD7EE"/>
+                      </a:solidFill>
+                      <a:prstDash val="solid"/>
+                      <a:round/>
+                      <a:headEnd type="none" w="med" len="med"/>
+                      <a:tailEnd type="none" w="med" len="med"/>
+                    </a:lnR>
+                    <a:lnT w="9525" cap="flat" cmpd="sng" algn="ctr">
+                      <a:solidFill>
+                        <a:srgbClr val="BDD7EE"/>
+                      </a:solidFill>
+                      <a:prstDash val="solid"/>
+                      <a:round/>
+                      <a:headEnd type="none" w="med" len="med"/>
+                      <a:tailEnd type="none" w="med" len="med"/>
+                    </a:lnT>
+                    <a:lnB w="9525" cap="flat" cmpd="sng" algn="ctr">
+                      <a:solidFill>
+                        <a:srgbClr val="BDD7EE"/>
+                      </a:solidFill>
+                      <a:prstDash val="solid"/>
+                      <a:round/>
+                      <a:headEnd type="none" w="med" len="med"/>
+                      <a:tailEnd type="none" w="med" len="med"/>
+                    </a:lnB>
+                    <a:solidFill>
+                      <a:srgbClr val="EEF4FB"/>
+                    </a:solidFill>
+                  </a:tcPr>
+                </a:tc>
+                <a:tc>
+                  <a:txBody>
+                    <a:bodyPr/>
+                    <a:lstStyle/>
+                    <a:p>
+                      <a:pPr algn="l" indent="0" marL="0">
+                        <a:buNone/>
+                      </a:pPr>
+                      <a:r>
+                        <a:rPr lang="en-US" sz="1000" dirty="0">
+                          <a:solidFill>
+                            <a:srgbClr val="262626"/>
+                          </a:solidFill>
+                          <a:latin typeface="Aptos" pitchFamily="34" charset="0"/>
+                          <a:ea typeface="Aptos" pitchFamily="34" charset="-122"/>
+                          <a:cs typeface="Aptos" pitchFamily="34" charset="-120"/>
+                        </a:rPr>
+                        <a:t>Greater Noida – Delhi – Agra</a:t>
+                      </a:r>
+                      <a:endParaRPr lang="en-US" sz="1000" dirty="0">
+                        <a:latin typeface="Aptos" charset="0"/>
+                        <a:ea typeface="Aptos" charset="0"/>
+                        <a:cs typeface="Aptos" charset="0"/>
+                      </a:endParaRPr>
+                    </a:p>
+                  </a:txBody>
+                  <a:tcPr marL="63500" marR="63500" marT="25400" marB="25400" anchor="ctr">
+                    <a:lnL w="9525" cap="flat" cmpd="sng" algn="ctr">
+                      <a:solidFill>
+                        <a:srgbClr val="BDD7EE"/>
+                      </a:solidFill>
+                      <a:prstDash val="solid"/>
+                      <a:round/>
+                      <a:headEnd type="none" w="med" len="med"/>
+                      <a:tailEnd type="none" w="med" len="med"/>
+                    </a:lnL>
+                    <a:lnR w="9525" cap="flat" cmpd="sng" algn="ctr">
+                      <a:solidFill>
+                        <a:srgbClr val="BDD7EE"/>
+                      </a:solidFill>
+                      <a:prstDash val="solid"/>
+                      <a:round/>
+                      <a:headEnd type="none" w="med" len="med"/>
+                      <a:tailEnd type="none" w="med" len="med"/>
+                    </a:lnR>
+                    <a:lnT w="9525" cap="flat" cmpd="sng" algn="ctr">
+                      <a:solidFill>
+                        <a:srgbClr val="BDD7EE"/>
+                      </a:solidFill>
+                      <a:prstDash val="solid"/>
+                      <a:round/>
+                      <a:headEnd type="none" w="med" len="med"/>
+                      <a:tailEnd type="none" w="med" len="med"/>
+                    </a:lnT>
+                    <a:lnB w="9525" cap="flat" cmpd="sng" algn="ctr">
+                      <a:solidFill>
+                        <a:srgbClr val="BDD7EE"/>
+                      </a:solidFill>
+                      <a:prstDash val="solid"/>
+                      <a:round/>
+                      <a:headEnd type="none" w="med" len="med"/>
+                      <a:tailEnd type="none" w="med" len="med"/>
+                    </a:lnB>
+                    <a:solidFill>
+                      <a:srgbClr val="EEF4FB"/>
+                    </a:solidFill>
+                  </a:tcPr>
+                </a:tc>
+                <a:tc>
+                  <a:txBody>
+                    <a:bodyPr/>
+                    <a:lstStyle/>
+                    <a:p>
+                      <a:pPr algn="l" indent="0" marL="0">
+                        <a:buNone/>
+                      </a:pPr>
+                      <a:r>
+                        <a:rPr lang="en-US" sz="1000" dirty="0">
+                          <a:solidFill>
+                            <a:srgbClr val="262626"/>
+                          </a:solidFill>
+                          <a:latin typeface="Aptos" pitchFamily="34" charset="0"/>
+                          <a:ea typeface="Aptos" pitchFamily="34" charset="-122"/>
+                          <a:cs typeface="Aptos" pitchFamily="34" charset="-120"/>
+                        </a:rPr>
+                        <a:t>UP, Delhi</a:t>
+                      </a:r>
+                      <a:endParaRPr lang="en-US" sz="1000" dirty="0">
+                        <a:latin typeface="Aptos" charset="0"/>
+                        <a:ea typeface="Aptos" charset="0"/>
+                        <a:cs typeface="Aptos" charset="0"/>
+                      </a:endParaRPr>
+                    </a:p>
+                  </a:txBody>
+                  <a:tcPr marL="63500" marR="63500" marT="25400" marB="25400" anchor="ctr">
+                    <a:lnL w="9525" cap="flat" cmpd="sng" algn="ctr">
+                      <a:solidFill>
+                        <a:srgbClr val="BDD7EE"/>
+                      </a:solidFill>
+                      <a:prstDash val="solid"/>
+                      <a:round/>
+                      <a:headEnd type="none" w="med" len="med"/>
+                      <a:tailEnd type="none" w="med" len="med"/>
+                    </a:lnL>
+                    <a:lnR w="9525" cap="flat" cmpd="sng" algn="ctr">
+                      <a:solidFill>
+                        <a:srgbClr val="BDD7EE"/>
+                      </a:solidFill>
+                      <a:prstDash val="solid"/>
+                      <a:round/>
+                      <a:headEnd type="none" w="med" len="med"/>
+                      <a:tailEnd type="none" w="med" len="med"/>
+                    </a:lnR>
+                    <a:lnT w="9525" cap="flat" cmpd="sng" algn="ctr">
+                      <a:solidFill>
+                        <a:srgbClr val="BDD7EE"/>
+                      </a:solidFill>
+                      <a:prstDash val="solid"/>
+                      <a:round/>
+                      <a:headEnd type="none" w="med" len="med"/>
+                      <a:tailEnd type="none" w="med" len="med"/>
+                    </a:lnT>
+                    <a:lnB w="9525" cap="flat" cmpd="sng" algn="ctr">
+                      <a:solidFill>
+                        <a:srgbClr val="BDD7EE"/>
+                      </a:solidFill>
+                      <a:prstDash val="solid"/>
+                      <a:round/>
+                      <a:headEnd type="none" w="med" len="med"/>
+                      <a:tailEnd type="none" w="med" len="med"/>
+                    </a:lnB>
+                    <a:solidFill>
+                      <a:srgbClr val="EEF4FB"/>
+                    </a:solidFill>
+                  </a:tcPr>
+                </a:tc>
+                <a:tc>
+                  <a:txBody>
+                    <a:bodyPr/>
+                    <a:lstStyle/>
+                    <a:p>
+                      <a:pPr algn="l" indent="0" marL="0">
+                        <a:buNone/>
+                      </a:pPr>
+                      <a:r>
+                        <a:rPr lang="en-US" sz="1000" dirty="0">
+                          <a:solidFill>
+                            <a:srgbClr val="262626"/>
+                          </a:solidFill>
+                          <a:latin typeface="Aptos" pitchFamily="34" charset="0"/>
+                          <a:ea typeface="Aptos" pitchFamily="34" charset="-122"/>
+                          <a:cs typeface="Aptos" pitchFamily="34" charset="-120"/>
+                        </a:rPr>
+                        <a:t>Tata Motors (+ IndianOil)</a:t>
+                      </a:r>
+                      <a:endParaRPr lang="en-US" sz="1000" dirty="0">
+                        <a:latin typeface="Aptos" charset="0"/>
+                        <a:ea typeface="Aptos" charset="0"/>
+                        <a:cs typeface="Aptos" charset="0"/>
+                      </a:endParaRPr>
+                    </a:p>
+                  </a:txBody>
+                  <a:tcPr marL="63500" marR="63500" marT="25400" marB="25400" anchor="ctr">
+                    <a:lnL w="9525" cap="flat" cmpd="sng" algn="ctr">
+                      <a:solidFill>
+                        <a:srgbClr val="BDD7EE"/>
+                      </a:solidFill>
+                      <a:prstDash val="solid"/>
+                      <a:round/>
+                      <a:headEnd type="none" w="med" len="med"/>
+                      <a:tailEnd type="none" w="med" len="med"/>
+                    </a:lnL>
+                    <a:lnR w="9525" cap="flat" cmpd="sng" algn="ctr">
+                      <a:solidFill>
+                        <a:srgbClr val="BDD7EE"/>
+                      </a:solidFill>
+                      <a:prstDash val="solid"/>
+                      <a:round/>
+                      <a:headEnd type="none" w="med" len="med"/>
+                      <a:tailEnd type="none" w="med" len="med"/>
+                    </a:lnR>
+                    <a:lnT w="9525" cap="flat" cmpd="sng" algn="ctr">
+                      <a:solidFill>
+                        <a:srgbClr val="BDD7EE"/>
+                      </a:solidFill>
+                      <a:prstDash val="solid"/>
+                      <a:round/>
+                      <a:headEnd type="none" w="med" len="med"/>
+                      <a:tailEnd type="none" w="med" len="med"/>
+                    </a:lnT>
+                    <a:lnB w="9525" cap="flat" cmpd="sng" algn="ctr">
+                      <a:solidFill>
+                        <a:srgbClr val="BDD7EE"/>
+                      </a:solidFill>
+                      <a:prstDash val="solid"/>
+                      <a:round/>
+                      <a:headEnd type="none" w="med" len="med"/>
+                      <a:tailEnd type="none" w="med" len="med"/>
+                    </a:lnB>
+                    <a:solidFill>
+                      <a:srgbClr val="EEF4FB"/>
+                    </a:solidFill>
+                  </a:tcPr>
+                </a:tc>
+                <a:tc>
+                  <a:txBody>
+                    <a:bodyPr/>
+                    <a:lstStyle/>
+                    <a:p>
+                      <a:pPr algn="l" indent="0" marL="0">
+                        <a:buNone/>
+                      </a:pPr>
+                      <a:r>
+                        <a:rPr lang="en-US" sz="1000" dirty="0">
+                          <a:solidFill>
+                            <a:srgbClr val="262626"/>
+                          </a:solidFill>
+                          <a:latin typeface="Aptos" pitchFamily="34" charset="0"/>
+                          <a:ea typeface="Aptos" pitchFamily="34" charset="-122"/>
+                          <a:cs typeface="Aptos" pitchFamily="34" charset="-120"/>
+                        </a:rPr>
+                        <a:t>H₂ trucks (Prima H.55S / H.28)</a:t>
+                      </a:r>
+                      <a:endParaRPr lang="en-US" sz="1000" dirty="0">
+                        <a:latin typeface="Aptos" charset="0"/>
+                        <a:ea typeface="Aptos" charset="0"/>
+                        <a:cs typeface="Aptos" charset="0"/>
+                      </a:endParaRPr>
+                    </a:p>
+                  </a:txBody>
+                  <a:tcPr marL="63500" marR="63500" marT="25400" marB="25400" anchor="ctr">
+                    <a:lnL w="9525" cap="flat" cmpd="sng" algn="ctr">
+                      <a:solidFill>
+                        <a:srgbClr val="BDD7EE"/>
+                      </a:solidFill>
+                      <a:prstDash val="solid"/>
+                      <a:round/>
+                      <a:headEnd type="none" w="med" len="med"/>
+                      <a:tailEnd type="none" w="med" len="med"/>
+                    </a:lnL>
+                    <a:lnR w="9525" cap="flat" cmpd="sng" algn="ctr">
+                      <a:solidFill>
+                        <a:srgbClr val="BDD7EE"/>
+                      </a:solidFill>
+                      <a:prstDash val="solid"/>
+                      <a:round/>
+                      <a:headEnd type="none" w="med" len="med"/>
+                      <a:tailEnd type="none" w="med" len="med"/>
+                    </a:lnR>
+                    <a:lnT w="9525" cap="flat" cmpd="sng" algn="ctr">
+                      <a:solidFill>
+                        <a:srgbClr val="BDD7EE"/>
+                      </a:solidFill>
+                      <a:prstDash val="solid"/>
+                      <a:round/>
+                      <a:headEnd type="none" w="med" len="med"/>
+                      <a:tailEnd type="none" w="med" len="med"/>
+                    </a:lnT>
+                    <a:lnB w="9525" cap="flat" cmpd="sng" algn="ctr">
+                      <a:solidFill>
+                        <a:srgbClr val="BDD7EE"/>
+                      </a:solidFill>
+                      <a:prstDash val="solid"/>
+                      <a:round/>
+                      <a:headEnd type="none" w="med" len="med"/>
+                      <a:tailEnd type="none" w="med" len="med"/>
+                    </a:lnB>
+                    <a:solidFill>
+                      <a:srgbClr val="EEF4FB"/>
+                    </a:solidFill>
+                  </a:tcPr>
+                </a:tc>
+                <a:tc>
+                  <a:txBody>
+                    <a:bodyPr/>
+                    <a:lstStyle/>
+                    <a:p>
+                      <a:pPr algn="l" indent="0" marL="0">
+                        <a:buNone/>
+                      </a:pPr>
+                      <a:r>
+                        <a:rPr lang="en-US" sz="1000" dirty="0">
+                          <a:solidFill>
+                            <a:srgbClr val="262626"/>
+                          </a:solidFill>
+                          <a:latin typeface="Aptos" pitchFamily="34" charset="0"/>
+                          <a:ea typeface="Aptos" pitchFamily="34" charset="-122"/>
+                          <a:cs typeface="Aptos" pitchFamily="34" charset="-120"/>
+                        </a:rPr>
+                        <a:t>Delhi-NCR corridor</a:t>
+                      </a:r>
+                      <a:endParaRPr lang="en-US" sz="1000" dirty="0">
+                        <a:latin typeface="Aptos" charset="0"/>
+                        <a:ea typeface="Aptos" charset="0"/>
+                        <a:cs typeface="Aptos" charset="0"/>
+                      </a:endParaRPr>
+                    </a:p>
+                  </a:txBody>
+                  <a:tcPr marL="63500" marR="63500" marT="25400" marB="25400" anchor="ctr">
+                    <a:lnL w="9525" cap="flat" cmpd="sng" algn="ctr">
+                      <a:solidFill>
+                        <a:srgbClr val="BDD7EE"/>
+                      </a:solidFill>
+                      <a:prstDash val="solid"/>
+                      <a:round/>
+                      <a:headEnd type="none" w="med" len="med"/>
+                      <a:tailEnd type="none" w="med" len="med"/>
+                    </a:lnL>
+                    <a:lnR w="9525" cap="flat" cmpd="sng" algn="ctr">
+                      <a:solidFill>
+                        <a:srgbClr val="BDD7EE"/>
+                      </a:solidFill>
+                      <a:prstDash val="solid"/>
+                      <a:round/>
+                      <a:headEnd type="none" w="med" len="med"/>
+                      <a:tailEnd type="none" w="med" len="med"/>
+                    </a:lnR>
+                    <a:lnT w="9525" cap="flat" cmpd="sng" algn="ctr">
+                      <a:solidFill>
+                        <a:srgbClr val="BDD7EE"/>
+                      </a:solidFill>
+                      <a:prstDash val="solid"/>
+                      <a:round/>
+                      <a:headEnd type="none" w="med" len="med"/>
+                      <a:tailEnd type="none" w="med" len="med"/>
+                    </a:lnT>
+                    <a:lnB w="9525" cap="flat" cmpd="sng" algn="ctr">
+                      <a:solidFill>
+                        <a:srgbClr val="BDD7EE"/>
+                      </a:solidFill>
+                      <a:prstDash val="solid"/>
+                      <a:round/>
+                      <a:headEnd type="none" w="med" len="med"/>
+                      <a:tailEnd type="none" w="med" len="med"/>
+                    </a:lnB>
+                    <a:solidFill>
+                      <a:srgbClr val="EEF4FB"/>
+                    </a:solidFill>
+                  </a:tcPr>
+                </a:tc>
+              </a:tr>
+              <a:tr h="292608">
+                <a:tc>
+                  <a:txBody>
+                    <a:bodyPr/>
+                    <a:lstStyle/>
+                    <a:p>
+                      <a:pPr algn="ctr" indent="0" marL="0">
+                        <a:buNone/>
+                      </a:pPr>
+                      <a:r>
+                        <a:rPr lang="en-US" sz="1000" b="1" dirty="0">
+                          <a:solidFill>
+                            <a:srgbClr val="262626"/>
+                          </a:solidFill>
+                          <a:latin typeface="Aptos" pitchFamily="34" charset="0"/>
+                          <a:ea typeface="Aptos" pitchFamily="34" charset="-122"/>
+                          <a:cs typeface="Aptos" pitchFamily="34" charset="-120"/>
+                        </a:rPr>
+                        <a:t>2</a:t>
+                      </a:r>
+                      <a:endParaRPr lang="en-US" sz="1000" dirty="0">
+                        <a:latin typeface="Aptos" charset="0"/>
+                        <a:ea typeface="Aptos" charset="0"/>
+                        <a:cs typeface="Aptos" charset="0"/>
+                      </a:endParaRPr>
+                    </a:p>
+                  </a:txBody>
+                  <a:tcPr marL="63500" marR="63500" marT="25400" marB="25400" anchor="ctr">
+                    <a:lnL w="9525" cap="flat" cmpd="sng" algn="ctr">
+                      <a:solidFill>
+                        <a:srgbClr val="BDD7EE"/>
+                      </a:solidFill>
+                      <a:prstDash val="solid"/>
+                      <a:round/>
+                      <a:headEnd type="none" w="med" len="med"/>
+                      <a:tailEnd type="none" w="med" len="med"/>
+                    </a:lnL>
+                    <a:lnR w="9525" cap="flat" cmpd="sng" algn="ctr">
+                      <a:solidFill>
+                        <a:srgbClr val="BDD7EE"/>
+                      </a:solidFill>
+                      <a:prstDash val="solid"/>
+                      <a:round/>
+                      <a:headEnd type="none" w="med" len="med"/>
+                      <a:tailEnd type="none" w="med" len="med"/>
+                    </a:lnR>
+                    <a:lnT w="9525" cap="flat" cmpd="sng" algn="ctr">
+                      <a:solidFill>
+                        <a:srgbClr val="BDD7EE"/>
+                      </a:solidFill>
+                      <a:prstDash val="solid"/>
+                      <a:round/>
+                      <a:headEnd type="none" w="med" len="med"/>
+                      <a:tailEnd type="none" w="med" len="med"/>
+                    </a:lnT>
+                    <a:lnB w="9525" cap="flat" cmpd="sng" algn="ctr">
+                      <a:solidFill>
+                        <a:srgbClr val="BDD7EE"/>
+                      </a:solidFill>
+                      <a:prstDash val="solid"/>
+                      <a:round/>
+                      <a:headEnd type="none" w="med" len="med"/>
+                      <a:tailEnd type="none" w="med" len="med"/>
+                    </a:lnB>
+                    <a:solidFill>
+                      <a:srgbClr val="FFFFFF"/>
+                    </a:solidFill>
+                  </a:tcPr>
+                </a:tc>
+                <a:tc>
+                  <a:txBody>
+                    <a:bodyPr/>
+                    <a:lstStyle/>
+                    <a:p>
+                      <a:pPr algn="l" indent="0" marL="0">
+                        <a:buNone/>
+                      </a:pPr>
+                      <a:r>
+                        <a:rPr lang="en-US" sz="1000" dirty="0">
+                          <a:solidFill>
+                            <a:srgbClr val="262626"/>
+                          </a:solidFill>
+                          <a:latin typeface="Aptos" pitchFamily="34" charset="0"/>
+                          <a:ea typeface="Aptos" pitchFamily="34" charset="-122"/>
+                          <a:cs typeface="Aptos" pitchFamily="34" charset="-120"/>
+                        </a:rPr>
+                        <a:t>Sahibabad – Faridabad – Delhi</a:t>
+                      </a:r>
+                      <a:endParaRPr lang="en-US" sz="1000" dirty="0">
+                        <a:latin typeface="Aptos" charset="0"/>
+                        <a:ea typeface="Aptos" charset="0"/>
+                        <a:cs typeface="Aptos" charset="0"/>
+                      </a:endParaRPr>
+                    </a:p>
+                  </a:txBody>
+                  <a:tcPr marL="63500" marR="63500" marT="25400" marB="25400" anchor="ctr">
+                    <a:lnL w="9525" cap="flat" cmpd="sng" algn="ctr">
+                      <a:solidFill>
+                        <a:srgbClr val="BDD7EE"/>
+                      </a:solidFill>
+                      <a:prstDash val="solid"/>
+                      <a:round/>
+                      <a:headEnd type="none" w="med" len="med"/>
+                      <a:tailEnd type="none" w="med" len="med"/>
+                    </a:lnL>
+                    <a:lnR w="9525" cap="flat" cmpd="sng" algn="ctr">
+                      <a:solidFill>
+                        <a:srgbClr val="BDD7EE"/>
+                      </a:solidFill>
+                      <a:prstDash val="solid"/>
+                      <a:round/>
+                      <a:headEnd type="none" w="med" len="med"/>
+                      <a:tailEnd type="none" w="med" len="med"/>
+                    </a:lnR>
+                    <a:lnT w="9525" cap="flat" cmpd="sng" algn="ctr">
+                      <a:solidFill>
+                        <a:srgbClr val="BDD7EE"/>
+                      </a:solidFill>
+                      <a:prstDash val="solid"/>
+                      <a:round/>
+                      <a:headEnd type="none" w="med" len="med"/>
+                      <a:tailEnd type="none" w="med" len="med"/>
+                    </a:lnT>
+                    <a:lnB w="9525" cap="flat" cmpd="sng" algn="ctr">
+                      <a:solidFill>
+                        <a:srgbClr val="BDD7EE"/>
+                      </a:solidFill>
+                      <a:prstDash val="solid"/>
+                      <a:round/>
+                      <a:headEnd type="none" w="med" len="med"/>
+                      <a:tailEnd type="none" w="med" len="med"/>
+                    </a:lnB>
+                    <a:solidFill>
+                      <a:srgbClr val="FFFFFF"/>
+                    </a:solidFill>
+                  </a:tcPr>
+                </a:tc>
+                <a:tc>
+                  <a:txBody>
+                    <a:bodyPr/>
+                    <a:lstStyle/>
+                    <a:p>
+                      <a:pPr algn="l" indent="0" marL="0">
+                        <a:buNone/>
+                      </a:pPr>
+                      <a:r>
+                        <a:rPr lang="en-US" sz="1000" dirty="0">
+                          <a:solidFill>
+                            <a:srgbClr val="262626"/>
+                          </a:solidFill>
+                          <a:latin typeface="Aptos" pitchFamily="34" charset="0"/>
+                          <a:ea typeface="Aptos" pitchFamily="34" charset="-122"/>
+                          <a:cs typeface="Aptos" pitchFamily="34" charset="-120"/>
+                        </a:rPr>
+                        <a:t>UP, Haryana, Delhi</a:t>
+                      </a:r>
+                      <a:endParaRPr lang="en-US" sz="1000" dirty="0">
+                        <a:latin typeface="Aptos" charset="0"/>
+                        <a:ea typeface="Aptos" charset="0"/>
+                        <a:cs typeface="Aptos" charset="0"/>
+                      </a:endParaRPr>
+                    </a:p>
+                  </a:txBody>
+                  <a:tcPr marL="63500" marR="63500" marT="25400" marB="25400" anchor="ctr">
+                    <a:lnL w="9525" cap="flat" cmpd="sng" algn="ctr">
+                      <a:solidFill>
+                        <a:srgbClr val="BDD7EE"/>
+                      </a:solidFill>
+                      <a:prstDash val="solid"/>
+                      <a:round/>
+                      <a:headEnd type="none" w="med" len="med"/>
+                      <a:tailEnd type="none" w="med" len="med"/>
+                    </a:lnL>
+                    <a:lnR w="9525" cap="flat" cmpd="sng" algn="ctr">
+                      <a:solidFill>
+                        <a:srgbClr val="BDD7EE"/>
+                      </a:solidFill>
+                      <a:prstDash val="solid"/>
+                      <a:round/>
+                      <a:headEnd type="none" w="med" len="med"/>
+                      <a:tailEnd type="none" w="med" len="med"/>
+                    </a:lnR>
+                    <a:lnT w="9525" cap="flat" cmpd="sng" algn="ctr">
+                      <a:solidFill>
+                        <a:srgbClr val="BDD7EE"/>
+                      </a:solidFill>
+                      <a:prstDash val="solid"/>
+                      <a:round/>
+                      <a:headEnd type="none" w="med" len="med"/>
+                      <a:tailEnd type="none" w="med" len="med"/>
+                    </a:lnT>
+                    <a:lnB w="9525" cap="flat" cmpd="sng" algn="ctr">
+                      <a:solidFill>
+                        <a:srgbClr val="BDD7EE"/>
+                      </a:solidFill>
+                      <a:prstDash val="solid"/>
+                      <a:round/>
+                      <a:headEnd type="none" w="med" len="med"/>
+                      <a:tailEnd type="none" w="med" len="med"/>
+                    </a:lnB>
+                    <a:solidFill>
+                      <a:srgbClr val="FFFFFF"/>
+                    </a:solidFill>
+                  </a:tcPr>
+                </a:tc>
+                <a:tc>
+                  <a:txBody>
+                    <a:bodyPr/>
+                    <a:lstStyle/>
+                    <a:p>
+                      <a:pPr algn="l" indent="0" marL="0">
+                        <a:buNone/>
+                      </a:pPr>
+                      <a:r>
+                        <a:rPr lang="en-US" sz="1000" dirty="0">
+                          <a:solidFill>
+                            <a:srgbClr val="262626"/>
+                          </a:solidFill>
+                          <a:latin typeface="Aptos" pitchFamily="34" charset="0"/>
+                          <a:ea typeface="Aptos" pitchFamily="34" charset="-122"/>
+                          <a:cs typeface="Aptos" pitchFamily="34" charset="-120"/>
+                        </a:rPr>
+                        <a:t>Tata Motors (+ IndianOil)</a:t>
+                      </a:r>
+                      <a:endParaRPr lang="en-US" sz="1000" dirty="0">
+                        <a:latin typeface="Aptos" charset="0"/>
+                        <a:ea typeface="Aptos" charset="0"/>
+                        <a:cs typeface="Aptos" charset="0"/>
+                      </a:endParaRPr>
+                    </a:p>
+                  </a:txBody>
+                  <a:tcPr marL="63500" marR="63500" marT="25400" marB="25400" anchor="ctr">
+                    <a:lnL w="9525" cap="flat" cmpd="sng" algn="ctr">
+                      <a:solidFill>
+                        <a:srgbClr val="BDD7EE"/>
+                      </a:solidFill>
+                      <a:prstDash val="solid"/>
+                      <a:round/>
+                      <a:headEnd type="none" w="med" len="med"/>
+                      <a:tailEnd type="none" w="med" len="med"/>
+                    </a:lnL>
+                    <a:lnR w="9525" cap="flat" cmpd="sng" algn="ctr">
+                      <a:solidFill>
+                        <a:srgbClr val="BDD7EE"/>
+                      </a:solidFill>
+                      <a:prstDash val="solid"/>
+                      <a:round/>
+                      <a:headEnd type="none" w="med" len="med"/>
+                      <a:tailEnd type="none" w="med" len="med"/>
+                    </a:lnR>
+                    <a:lnT w="9525" cap="flat" cmpd="sng" algn="ctr">
+                      <a:solidFill>
+                        <a:srgbClr val="BDD7EE"/>
+                      </a:solidFill>
+                      <a:prstDash val="solid"/>
+                      <a:round/>
+                      <a:headEnd type="none" w="med" len="med"/>
+                      <a:tailEnd type="none" w="med" len="med"/>
+                    </a:lnT>
+                    <a:lnB w="9525" cap="flat" cmpd="sng" algn="ctr">
+                      <a:solidFill>
+                        <a:srgbClr val="BDD7EE"/>
+                      </a:solidFill>
+                      <a:prstDash val="solid"/>
+                      <a:round/>
+                      <a:headEnd type="none" w="med" len="med"/>
+                      <a:tailEnd type="none" w="med" len="med"/>
+                    </a:lnB>
+                    <a:solidFill>
+                      <a:srgbClr val="FFFFFF"/>
+                    </a:solidFill>
+                  </a:tcPr>
+                </a:tc>
+                <a:tc>
+                  <a:txBody>
+                    <a:bodyPr/>
+                    <a:lstStyle/>
+                    <a:p>
+                      <a:pPr algn="l" indent="0" marL="0">
+                        <a:buNone/>
+                      </a:pPr>
+                      <a:r>
+                        <a:rPr lang="en-US" sz="1000" dirty="0">
+                          <a:solidFill>
+                            <a:srgbClr val="262626"/>
+                          </a:solidFill>
+                          <a:latin typeface="Aptos" pitchFamily="34" charset="0"/>
+                          <a:ea typeface="Aptos" pitchFamily="34" charset="-122"/>
+                          <a:cs typeface="Aptos" pitchFamily="34" charset="-120"/>
+                        </a:rPr>
+                        <a:t>H₂ trucks</a:t>
+                      </a:r>
+                      <a:endParaRPr lang="en-US" sz="1000" dirty="0">
+                        <a:latin typeface="Aptos" charset="0"/>
+                        <a:ea typeface="Aptos" charset="0"/>
+                        <a:cs typeface="Aptos" charset="0"/>
+                      </a:endParaRPr>
+                    </a:p>
+                  </a:txBody>
+                  <a:tcPr marL="63500" marR="63500" marT="25400" marB="25400" anchor="ctr">
+                    <a:lnL w="9525" cap="flat" cmpd="sng" algn="ctr">
+                      <a:solidFill>
+                        <a:srgbClr val="BDD7EE"/>
+                      </a:solidFill>
+                      <a:prstDash val="solid"/>
+                      <a:round/>
+                      <a:headEnd type="none" w="med" len="med"/>
+                      <a:tailEnd type="none" w="med" len="med"/>
+                    </a:lnL>
+                    <a:lnR w="9525" cap="flat" cmpd="sng" algn="ctr">
+                      <a:solidFill>
+                        <a:srgbClr val="BDD7EE"/>
+                      </a:solidFill>
+                      <a:prstDash val="solid"/>
+                      <a:round/>
+                      <a:headEnd type="none" w="med" len="med"/>
+                      <a:tailEnd type="none" w="med" len="med"/>
+                    </a:lnR>
+                    <a:lnT w="9525" cap="flat" cmpd="sng" algn="ctr">
+                      <a:solidFill>
+                        <a:srgbClr val="BDD7EE"/>
+                      </a:solidFill>
+                      <a:prstDash val="solid"/>
+                      <a:round/>
+                      <a:headEnd type="none" w="med" len="med"/>
+                      <a:tailEnd type="none" w="med" len="med"/>
+                    </a:lnT>
+                    <a:lnB w="9525" cap="flat" cmpd="sng" algn="ctr">
+                      <a:solidFill>
+                        <a:srgbClr val="BDD7EE"/>
+                      </a:solidFill>
+                      <a:prstDash val="solid"/>
+                      <a:round/>
+                      <a:headEnd type="none" w="med" len="med"/>
+                      <a:tailEnd type="none" w="med" len="med"/>
+                    </a:lnB>
+                    <a:solidFill>
+                      <a:srgbClr val="FFFFFF"/>
+                    </a:solidFill>
+                  </a:tcPr>
+                </a:tc>
+                <a:tc>
+                  <a:txBody>
+                    <a:bodyPr/>
+                    <a:lstStyle/>
+                    <a:p>
+                      <a:pPr algn="l" indent="0" marL="0">
+                        <a:buNone/>
+                      </a:pPr>
+                      <a:r>
+                        <a:rPr lang="en-US" sz="1000" dirty="0">
+                          <a:solidFill>
+                            <a:srgbClr val="262626"/>
+                          </a:solidFill>
+                          <a:latin typeface="Aptos" pitchFamily="34" charset="0"/>
+                          <a:ea typeface="Aptos" pitchFamily="34" charset="-122"/>
+                          <a:cs typeface="Aptos" pitchFamily="34" charset="-120"/>
+                        </a:rPr>
+                        <a:t>IOCL R&amp;D HRS, Faridabad</a:t>
+                      </a:r>
+                      <a:endParaRPr lang="en-US" sz="1000" dirty="0">
+                        <a:latin typeface="Aptos" charset="0"/>
+                        <a:ea typeface="Aptos" charset="0"/>
+                        <a:cs typeface="Aptos" charset="0"/>
+                      </a:endParaRPr>
+                    </a:p>
+                  </a:txBody>
+                  <a:tcPr marL="63500" marR="63500" marT="25400" marB="25400" anchor="ctr">
+                    <a:lnL w="9525" cap="flat" cmpd="sng" algn="ctr">
+                      <a:solidFill>
+                        <a:srgbClr val="BDD7EE"/>
+                      </a:solidFill>
+                      <a:prstDash val="solid"/>
+                      <a:round/>
+                      <a:headEnd type="none" w="med" len="med"/>
+                      <a:tailEnd type="none" w="med" len="med"/>
+                    </a:lnL>
+                    <a:lnR w="9525" cap="flat" cmpd="sng" algn="ctr">
+                      <a:solidFill>
+                        <a:srgbClr val="BDD7EE"/>
+                      </a:solidFill>
+                      <a:prstDash val="solid"/>
+                      <a:round/>
+                      <a:headEnd type="none" w="med" len="med"/>
+                      <a:tailEnd type="none" w="med" len="med"/>
+                    </a:lnR>
+                    <a:lnT w="9525" cap="flat" cmpd="sng" algn="ctr">
+                      <a:solidFill>
+                        <a:srgbClr val="BDD7EE"/>
+                      </a:solidFill>
+                      <a:prstDash val="solid"/>
+                      <a:round/>
+                      <a:headEnd type="none" w="med" len="med"/>
+                      <a:tailEnd type="none" w="med" len="med"/>
+                    </a:lnT>
+                    <a:lnB w="9525" cap="flat" cmpd="sng" algn="ctr">
+                      <a:solidFill>
+                        <a:srgbClr val="BDD7EE"/>
+                      </a:solidFill>
+                      <a:prstDash val="solid"/>
+                      <a:round/>
+                      <a:headEnd type="none" w="med" len="med"/>
+                      <a:tailEnd type="none" w="med" len="med"/>
+                    </a:lnB>
+                    <a:solidFill>
+                      <a:srgbClr val="FFFFFF"/>
+                    </a:solidFill>
+                  </a:tcPr>
+                </a:tc>
+              </a:tr>
+              <a:tr h="292608">
+                <a:tc>
+                  <a:txBody>
+                    <a:bodyPr/>
+                    <a:lstStyle/>
+                    <a:p>
+                      <a:pPr algn="ctr" indent="0" marL="0">
+                        <a:buNone/>
+                      </a:pPr>
+                      <a:r>
+                        <a:rPr lang="en-US" sz="1000" b="1" dirty="0">
+                          <a:solidFill>
+                            <a:srgbClr val="262626"/>
+                          </a:solidFill>
+                          <a:latin typeface="Aptos" pitchFamily="34" charset="0"/>
+                          <a:ea typeface="Aptos" pitchFamily="34" charset="-122"/>
+                          <a:cs typeface="Aptos" pitchFamily="34" charset="-120"/>
+                        </a:rPr>
+                        <a:t>3</a:t>
+                      </a:r>
+                      <a:endParaRPr lang="en-US" sz="1000" dirty="0">
+                        <a:latin typeface="Aptos" charset="0"/>
+                        <a:ea typeface="Aptos" charset="0"/>
+                        <a:cs typeface="Aptos" charset="0"/>
+                      </a:endParaRPr>
+                    </a:p>
+                  </a:txBody>
+                  <a:tcPr marL="63500" marR="63500" marT="25400" marB="25400" anchor="ctr">
+                    <a:lnL w="9525" cap="flat" cmpd="sng" algn="ctr">
+                      <a:solidFill>
+                        <a:srgbClr val="BDD7EE"/>
+                      </a:solidFill>
+                      <a:prstDash val="solid"/>
+                      <a:round/>
+                      <a:headEnd type="none" w="med" len="med"/>
+                      <a:tailEnd type="none" w="med" len="med"/>
+                    </a:lnL>
+                    <a:lnR w="9525" cap="flat" cmpd="sng" algn="ctr">
+                      <a:solidFill>
+                        <a:srgbClr val="BDD7EE"/>
+                      </a:solidFill>
+                      <a:prstDash val="solid"/>
+                      <a:round/>
+                      <a:headEnd type="none" w="med" len="med"/>
+                      <a:tailEnd type="none" w="med" len="med"/>
+                    </a:lnR>
+                    <a:lnT w="9525" cap="flat" cmpd="sng" algn="ctr">
+                      <a:solidFill>
+                        <a:srgbClr val="BDD7EE"/>
+                      </a:solidFill>
+                      <a:prstDash val="solid"/>
+                      <a:round/>
+                      <a:headEnd type="none" w="med" len="med"/>
+                      <a:tailEnd type="none" w="med" len="med"/>
+                    </a:lnT>
+                    <a:lnB w="9525" cap="flat" cmpd="sng" algn="ctr">
+                      <a:solidFill>
+                        <a:srgbClr val="BDD7EE"/>
+                      </a:solidFill>
+                      <a:prstDash val="solid"/>
+                      <a:round/>
+                      <a:headEnd type="none" w="med" len="med"/>
+                      <a:tailEnd type="none" w="med" len="med"/>
+                    </a:lnB>
+                    <a:solidFill>
+                      <a:srgbClr val="EEF4FB"/>
+                    </a:solidFill>
+                  </a:tcPr>
+                </a:tc>
+                <a:tc>
+                  <a:txBody>
+                    <a:bodyPr/>
+                    <a:lstStyle/>
+                    <a:p>
+                      <a:pPr algn="l" indent="0" marL="0">
+                        <a:buNone/>
+                      </a:pPr>
+                      <a:r>
+                        <a:rPr lang="en-US" sz="1000" dirty="0">
+                          <a:solidFill>
+                            <a:srgbClr val="262626"/>
+                          </a:solidFill>
+                          <a:latin typeface="Aptos" pitchFamily="34" charset="0"/>
+                          <a:ea typeface="Aptos" pitchFamily="34" charset="-122"/>
+                          <a:cs typeface="Aptos" pitchFamily="34" charset="-120"/>
+                        </a:rPr>
+                        <a:t>Ahmedabad – Vadodara – Surat</a:t>
+                      </a:r>
+                      <a:endParaRPr lang="en-US" sz="1000" dirty="0">
+                        <a:latin typeface="Aptos" charset="0"/>
+                        <a:ea typeface="Aptos" charset="0"/>
+                        <a:cs typeface="Aptos" charset="0"/>
+                      </a:endParaRPr>
+                    </a:p>
+                  </a:txBody>
+                  <a:tcPr marL="63500" marR="63500" marT="25400" marB="25400" anchor="ctr">
+                    <a:lnL w="9525" cap="flat" cmpd="sng" algn="ctr">
+                      <a:solidFill>
+                        <a:srgbClr val="BDD7EE"/>
+                      </a:solidFill>
+                      <a:prstDash val="solid"/>
+                      <a:round/>
+                      <a:headEnd type="none" w="med" len="med"/>
+                      <a:tailEnd type="none" w="med" len="med"/>
+                    </a:lnL>
+                    <a:lnR w="9525" cap="flat" cmpd="sng" algn="ctr">
+                      <a:solidFill>
+                        <a:srgbClr val="BDD7EE"/>
+                      </a:solidFill>
+                      <a:prstDash val="solid"/>
+                      <a:round/>
+                      <a:headEnd type="none" w="med" len="med"/>
+                      <a:tailEnd type="none" w="med" len="med"/>
+                    </a:lnR>
+                    <a:lnT w="9525" cap="flat" cmpd="sng" algn="ctr">
+                      <a:solidFill>
+                        <a:srgbClr val="BDD7EE"/>
+                      </a:solidFill>
+                      <a:prstDash val="solid"/>
+                      <a:round/>
+                      <a:headEnd type="none" w="med" len="med"/>
+                      <a:tailEnd type="none" w="med" len="med"/>
+                    </a:lnT>
+                    <a:lnB w="9525" cap="flat" cmpd="sng" algn="ctr">
+                      <a:solidFill>
+                        <a:srgbClr val="BDD7EE"/>
+                      </a:solidFill>
+                      <a:prstDash val="solid"/>
+                      <a:round/>
+                      <a:headEnd type="none" w="med" len="med"/>
+                      <a:tailEnd type="none" w="med" len="med"/>
+                    </a:lnB>
+                    <a:solidFill>
+                      <a:srgbClr val="EEF4FB"/>
+                    </a:solidFill>
+                  </a:tcPr>
+                </a:tc>
+                <a:tc>
+                  <a:txBody>
+                    <a:bodyPr/>
+                    <a:lstStyle/>
+                    <a:p>
+                      <a:pPr algn="l" indent="0" marL="0">
+                        <a:buNone/>
+                      </a:pPr>
+                      <a:r>
+                        <a:rPr lang="en-US" sz="1000" dirty="0">
+                          <a:solidFill>
+                            <a:srgbClr val="262626"/>
+                          </a:solidFill>
+                          <a:latin typeface="Aptos" pitchFamily="34" charset="0"/>
+                          <a:ea typeface="Aptos" pitchFamily="34" charset="-122"/>
+                          <a:cs typeface="Aptos" pitchFamily="34" charset="-120"/>
+                        </a:rPr>
+                        <a:t>Gujarat</a:t>
+                      </a:r>
+                      <a:endParaRPr lang="en-US" sz="1000" dirty="0">
+                        <a:latin typeface="Aptos" charset="0"/>
+                        <a:ea typeface="Aptos" charset="0"/>
+                        <a:cs typeface="Aptos" charset="0"/>
+                      </a:endParaRPr>
+                    </a:p>
+                  </a:txBody>
+                  <a:tcPr marL="63500" marR="63500" marT="25400" marB="25400" anchor="ctr">
+                    <a:lnL w="9525" cap="flat" cmpd="sng" algn="ctr">
+                      <a:solidFill>
+                        <a:srgbClr val="BDD7EE"/>
+                      </a:solidFill>
+                      <a:prstDash val="solid"/>
+                      <a:round/>
+                      <a:headEnd type="none" w="med" len="med"/>
+                      <a:tailEnd type="none" w="med" len="med"/>
+                    </a:lnL>
+                    <a:lnR w="9525" cap="flat" cmpd="sng" algn="ctr">
+                      <a:solidFill>
+                        <a:srgbClr val="BDD7EE"/>
+                      </a:solidFill>
+                      <a:prstDash val="solid"/>
+                      <a:round/>
+                      <a:headEnd type="none" w="med" len="med"/>
+                      <a:tailEnd type="none" w="med" len="med"/>
+                    </a:lnR>
+                    <a:lnT w="9525" cap="flat" cmpd="sng" algn="ctr">
+                      <a:solidFill>
+                        <a:srgbClr val="BDD7EE"/>
+                      </a:solidFill>
+                      <a:prstDash val="solid"/>
+                      <a:round/>
+                      <a:headEnd type="none" w="med" len="med"/>
+                      <a:tailEnd type="none" w="med" len="med"/>
+                    </a:lnT>
+                    <a:lnB w="9525" cap="flat" cmpd="sng" algn="ctr">
+                      <a:solidFill>
+                        <a:srgbClr val="BDD7EE"/>
+                      </a:solidFill>
+                      <a:prstDash val="solid"/>
+                      <a:round/>
+                      <a:headEnd type="none" w="med" len="med"/>
+                      <a:tailEnd type="none" w="med" len="med"/>
+                    </a:lnB>
+                    <a:solidFill>
+                      <a:srgbClr val="EEF4FB"/>
+                    </a:solidFill>
+                  </a:tcPr>
+                </a:tc>
+                <a:tc>
+                  <a:txBody>
+                    <a:bodyPr/>
+                    <a:lstStyle/>
+                    <a:p>
+                      <a:pPr algn="l" indent="0" marL="0">
+                        <a:buNone/>
+                      </a:pPr>
+                      <a:r>
+                        <a:rPr lang="en-US" sz="1000" dirty="0">
+                          <a:solidFill>
+                            <a:srgbClr val="262626"/>
+                          </a:solidFill>
+                          <a:latin typeface="Aptos" pitchFamily="34" charset="0"/>
+                          <a:ea typeface="Aptos" pitchFamily="34" charset="-122"/>
+                          <a:cs typeface="Aptos" pitchFamily="34" charset="-120"/>
+                        </a:rPr>
+                        <a:t>Tata Motors</a:t>
+                      </a:r>
+                      <a:endParaRPr lang="en-US" sz="1000" dirty="0">
+                        <a:latin typeface="Aptos" charset="0"/>
+                        <a:ea typeface="Aptos" charset="0"/>
+                        <a:cs typeface="Aptos" charset="0"/>
+                      </a:endParaRPr>
+                    </a:p>
+                  </a:txBody>
+                  <a:tcPr marL="63500" marR="63500" marT="25400" marB="25400" anchor="ctr">
+                    <a:lnL w="9525" cap="flat" cmpd="sng" algn="ctr">
+                      <a:solidFill>
+                        <a:srgbClr val="BDD7EE"/>
+                      </a:solidFill>
+                      <a:prstDash val="solid"/>
+                      <a:round/>
+                      <a:headEnd type="none" w="med" len="med"/>
+                      <a:tailEnd type="none" w="med" len="med"/>
+                    </a:lnL>
+                    <a:lnR w="9525" cap="flat" cmpd="sng" algn="ctr">
+                      <a:solidFill>
+                        <a:srgbClr val="BDD7EE"/>
+                      </a:solidFill>
+                      <a:prstDash val="solid"/>
+                      <a:round/>
+                      <a:headEnd type="none" w="med" len="med"/>
+                      <a:tailEnd type="none" w="med" len="med"/>
+                    </a:lnR>
+                    <a:lnT w="9525" cap="flat" cmpd="sng" algn="ctr">
+                      <a:solidFill>
+                        <a:srgbClr val="BDD7EE"/>
+                      </a:solidFill>
+                      <a:prstDash val="solid"/>
+                      <a:round/>
+                      <a:headEnd type="none" w="med" len="med"/>
+                      <a:tailEnd type="none" w="med" len="med"/>
+                    </a:lnT>
+                    <a:lnB w="9525" cap="flat" cmpd="sng" algn="ctr">
+                      <a:solidFill>
+                        <a:srgbClr val="BDD7EE"/>
+                      </a:solidFill>
+                      <a:prstDash val="solid"/>
+                      <a:round/>
+                      <a:headEnd type="none" w="med" len="med"/>
+                      <a:tailEnd type="none" w="med" len="med"/>
+                    </a:lnB>
+                    <a:solidFill>
+                      <a:srgbClr val="EEF4FB"/>
+                    </a:solidFill>
+                  </a:tcPr>
+                </a:tc>
+                <a:tc>
+                  <a:txBody>
+                    <a:bodyPr/>
+                    <a:lstStyle/>
+                    <a:p>
+                      <a:pPr algn="l" indent="0" marL="0">
+                        <a:buNone/>
+                      </a:pPr>
+                      <a:r>
+                        <a:rPr lang="en-US" sz="1000" dirty="0">
+                          <a:solidFill>
+                            <a:srgbClr val="262626"/>
+                          </a:solidFill>
+                          <a:latin typeface="Aptos" pitchFamily="34" charset="0"/>
+                          <a:ea typeface="Aptos" pitchFamily="34" charset="-122"/>
+                          <a:cs typeface="Aptos" pitchFamily="34" charset="-120"/>
+                        </a:rPr>
+                        <a:t>H₂ trucks</a:t>
+                      </a:r>
+                      <a:endParaRPr lang="en-US" sz="1000" dirty="0">
+                        <a:latin typeface="Aptos" charset="0"/>
+                        <a:ea typeface="Aptos" charset="0"/>
+                        <a:cs typeface="Aptos" charset="0"/>
+                      </a:endParaRPr>
+                    </a:p>
+                  </a:txBody>
+                  <a:tcPr marL="63500" marR="63500" marT="25400" marB="25400" anchor="ctr">
+                    <a:lnL w="9525" cap="flat" cmpd="sng" algn="ctr">
+                      <a:solidFill>
+                        <a:srgbClr val="BDD7EE"/>
+                      </a:solidFill>
+                      <a:prstDash val="solid"/>
+                      <a:round/>
+                      <a:headEnd type="none" w="med" len="med"/>
+                      <a:tailEnd type="none" w="med" len="med"/>
+                    </a:lnL>
+                    <a:lnR w="9525" cap="flat" cmpd="sng" algn="ctr">
+                      <a:solidFill>
+                        <a:srgbClr val="BDD7EE"/>
+                      </a:solidFill>
+                      <a:prstDash val="solid"/>
+                      <a:round/>
+                      <a:headEnd type="none" w="med" len="med"/>
+                      <a:tailEnd type="none" w="med" len="med"/>
+                    </a:lnR>
+                    <a:lnT w="9525" cap="flat" cmpd="sng" algn="ctr">
+                      <a:solidFill>
+                        <a:srgbClr val="BDD7EE"/>
+                      </a:solidFill>
+                      <a:prstDash val="solid"/>
+                      <a:round/>
+                      <a:headEnd type="none" w="med" len="med"/>
+                      <a:tailEnd type="none" w="med" len="med"/>
+                    </a:lnT>
+                    <a:lnB w="9525" cap="flat" cmpd="sng" algn="ctr">
+                      <a:solidFill>
+                        <a:srgbClr val="BDD7EE"/>
+                      </a:solidFill>
+                      <a:prstDash val="solid"/>
+                      <a:round/>
+                      <a:headEnd type="none" w="med" len="med"/>
+                      <a:tailEnd type="none" w="med" len="med"/>
+                    </a:lnB>
+                    <a:solidFill>
+                      <a:srgbClr val="EEF4FB"/>
+                    </a:solidFill>
+                  </a:tcPr>
+                </a:tc>
+                <a:tc>
+                  <a:txBody>
+                    <a:bodyPr/>
+                    <a:lstStyle/>
+                    <a:p>
+                      <a:pPr algn="l" indent="0" marL="0">
+                        <a:buNone/>
+                      </a:pPr>
+                      <a:r>
+                        <a:rPr lang="en-US" sz="1000" dirty="0">
+                          <a:solidFill>
+                            <a:srgbClr val="262626"/>
+                          </a:solidFill>
+                          <a:latin typeface="Aptos" pitchFamily="34" charset="0"/>
+                          <a:ea typeface="Aptos" pitchFamily="34" charset="-122"/>
+                          <a:cs typeface="Aptos" pitchFamily="34" charset="-120"/>
+                        </a:rPr>
+                        <a:t>IOCL HRS, Vadodara</a:t>
+                      </a:r>
+                      <a:endParaRPr lang="en-US" sz="1000" dirty="0">
+                        <a:latin typeface="Aptos" charset="0"/>
+                        <a:ea typeface="Aptos" charset="0"/>
+                        <a:cs typeface="Aptos" charset="0"/>
+                      </a:endParaRPr>
+                    </a:p>
+                  </a:txBody>
+                  <a:tcPr marL="63500" marR="63500" marT="25400" marB="25400" anchor="ctr">
+                    <a:lnL w="9525" cap="flat" cmpd="sng" algn="ctr">
+                      <a:solidFill>
+                        <a:srgbClr val="BDD7EE"/>
+                      </a:solidFill>
+                      <a:prstDash val="solid"/>
+                      <a:round/>
+                      <a:headEnd type="none" w="med" len="med"/>
+                      <a:tailEnd type="none" w="med" len="med"/>
+                    </a:lnL>
+                    <a:lnR w="9525" cap="flat" cmpd="sng" algn="ctr">
+                      <a:solidFill>
+                        <a:srgbClr val="BDD7EE"/>
+                      </a:solidFill>
+                      <a:prstDash val="solid"/>
+                      <a:round/>
+                      <a:headEnd type="none" w="med" len="med"/>
+                      <a:tailEnd type="none" w="med" len="med"/>
+                    </a:lnR>
+                    <a:lnT w="9525" cap="flat" cmpd="sng" algn="ctr">
+                      <a:solidFill>
+                        <a:srgbClr val="BDD7EE"/>
+                      </a:solidFill>
+                      <a:prstDash val="solid"/>
+                      <a:round/>
+                      <a:headEnd type="none" w="med" len="med"/>
+                      <a:tailEnd type="none" w="med" len="med"/>
+                    </a:lnT>
+                    <a:lnB w="9525" cap="flat" cmpd="sng" algn="ctr">
+                      <a:solidFill>
+                        <a:srgbClr val="BDD7EE"/>
+                      </a:solidFill>
+                      <a:prstDash val="solid"/>
+                      <a:round/>
+                      <a:headEnd type="none" w="med" len="med"/>
+                      <a:tailEnd type="none" w="med" len="med"/>
+                    </a:lnB>
+                    <a:solidFill>
+                      <a:srgbClr val="EEF4FB"/>
+                    </a:solidFill>
+                  </a:tcPr>
+                </a:tc>
+              </a:tr>
+              <a:tr h="292608">
+                <a:tc>
+                  <a:txBody>
+                    <a:bodyPr/>
+                    <a:lstStyle/>
+                    <a:p>
+                      <a:pPr algn="ctr" indent="0" marL="0">
+                        <a:buNone/>
+                      </a:pPr>
+                      <a:r>
+                        <a:rPr lang="en-US" sz="1000" b="1" dirty="0">
+                          <a:solidFill>
+                            <a:srgbClr val="262626"/>
+                          </a:solidFill>
+                          <a:latin typeface="Aptos" pitchFamily="34" charset="0"/>
+                          <a:ea typeface="Aptos" pitchFamily="34" charset="-122"/>
+                          <a:cs typeface="Aptos" pitchFamily="34" charset="-120"/>
+                        </a:rPr>
+                        <a:t>4</a:t>
+                      </a:r>
+                      <a:endParaRPr lang="en-US" sz="1000" dirty="0">
+                        <a:latin typeface="Aptos" charset="0"/>
+                        <a:ea typeface="Aptos" charset="0"/>
+                        <a:cs typeface="Aptos" charset="0"/>
+                      </a:endParaRPr>
+                    </a:p>
+                  </a:txBody>
+                  <a:tcPr marL="63500" marR="63500" marT="25400" marB="25400" anchor="ctr">
+                    <a:lnL w="9525" cap="flat" cmpd="sng" algn="ctr">
+                      <a:solidFill>
+                        <a:srgbClr val="BDD7EE"/>
+                      </a:solidFill>
+                      <a:prstDash val="solid"/>
+                      <a:round/>
+                      <a:headEnd type="none" w="med" len="med"/>
+                      <a:tailEnd type="none" w="med" len="med"/>
+                    </a:lnL>
+                    <a:lnR w="9525" cap="flat" cmpd="sng" algn="ctr">
+                      <a:solidFill>
+                        <a:srgbClr val="BDD7EE"/>
+                      </a:solidFill>
+                      <a:prstDash val="solid"/>
+                      <a:round/>
+                      <a:headEnd type="none" w="med" len="med"/>
+                      <a:tailEnd type="none" w="med" len="med"/>
+                    </a:lnR>
+                    <a:lnT w="9525" cap="flat" cmpd="sng" algn="ctr">
+                      <a:solidFill>
+                        <a:srgbClr val="BDD7EE"/>
+                      </a:solidFill>
+                      <a:prstDash val="solid"/>
+                      <a:round/>
+                      <a:headEnd type="none" w="med" len="med"/>
+                      <a:tailEnd type="none" w="med" len="med"/>
+                    </a:lnT>
+                    <a:lnB w="9525" cap="flat" cmpd="sng" algn="ctr">
+                      <a:solidFill>
+                        <a:srgbClr val="BDD7EE"/>
+                      </a:solidFill>
+                      <a:prstDash val="solid"/>
+                      <a:round/>
+                      <a:headEnd type="none" w="med" len="med"/>
+                      <a:tailEnd type="none" w="med" len="med"/>
+                    </a:lnB>
+                    <a:solidFill>
+                      <a:srgbClr val="FFFFFF"/>
+                    </a:solidFill>
+                  </a:tcPr>
+                </a:tc>
+                <a:tc>
+                  <a:txBody>
+                    <a:bodyPr/>
+                    <a:lstStyle/>
+                    <a:p>
+                      <a:pPr algn="l" indent="0" marL="0">
+                        <a:buNone/>
+                      </a:pPr>
+                      <a:r>
+                        <a:rPr lang="en-US" sz="1000" dirty="0">
+                          <a:solidFill>
+                            <a:srgbClr val="262626"/>
+                          </a:solidFill>
+                          <a:latin typeface="Aptos" pitchFamily="34" charset="0"/>
+                          <a:ea typeface="Aptos" pitchFamily="34" charset="-122"/>
+                          <a:cs typeface="Aptos" pitchFamily="34" charset="-120"/>
+                        </a:rPr>
+                        <a:t>Pune – Mumbai</a:t>
+                      </a:r>
+                      <a:endParaRPr lang="en-US" sz="1000" dirty="0">
+                        <a:latin typeface="Aptos" charset="0"/>
+                        <a:ea typeface="Aptos" charset="0"/>
+                        <a:cs typeface="Aptos" charset="0"/>
+                      </a:endParaRPr>
+                    </a:p>
+                  </a:txBody>
+                  <a:tcPr marL="63500" marR="63500" marT="25400" marB="25400" anchor="ctr">
+                    <a:lnL w="9525" cap="flat" cmpd="sng" algn="ctr">
+                      <a:solidFill>
+                        <a:srgbClr val="BDD7EE"/>
+                      </a:solidFill>
+                      <a:prstDash val="solid"/>
+                      <a:round/>
+                      <a:headEnd type="none" w="med" len="med"/>
+                      <a:tailEnd type="none" w="med" len="med"/>
+                    </a:lnL>
+                    <a:lnR w="9525" cap="flat" cmpd="sng" algn="ctr">
+                      <a:solidFill>
+                        <a:srgbClr val="BDD7EE"/>
+                      </a:solidFill>
+                      <a:prstDash val="solid"/>
+                      <a:round/>
+                      <a:headEnd type="none" w="med" len="med"/>
+                      <a:tailEnd type="none" w="med" len="med"/>
+                    </a:lnR>
+                    <a:lnT w="9525" cap="flat" cmpd="sng" algn="ctr">
+                      <a:solidFill>
+                        <a:srgbClr val="BDD7EE"/>
+                      </a:solidFill>
+                      <a:prstDash val="solid"/>
+                      <a:round/>
+                      <a:headEnd type="none" w="med" len="med"/>
+                      <a:tailEnd type="none" w="med" len="med"/>
+                    </a:lnT>
+                    <a:lnB w="9525" cap="flat" cmpd="sng" algn="ctr">
+                      <a:solidFill>
+                        <a:srgbClr val="BDD7EE"/>
+                      </a:solidFill>
+                      <a:prstDash val="solid"/>
+                      <a:round/>
+                      <a:headEnd type="none" w="med" len="med"/>
+                      <a:tailEnd type="none" w="med" len="med"/>
+                    </a:lnB>
+                    <a:solidFill>
+                      <a:srgbClr val="FFFFFF"/>
+                    </a:solidFill>
+                  </a:tcPr>
+                </a:tc>
+                <a:tc>
+                  <a:txBody>
+                    <a:bodyPr/>
+                    <a:lstStyle/>
+                    <a:p>
+                      <a:pPr algn="l" indent="0" marL="0">
+                        <a:buNone/>
+                      </a:pPr>
+                      <a:r>
+                        <a:rPr lang="en-US" sz="1000" dirty="0">
+                          <a:solidFill>
+                            <a:srgbClr val="262626"/>
+                          </a:solidFill>
+                          <a:latin typeface="Aptos" pitchFamily="34" charset="0"/>
+                          <a:ea typeface="Aptos" pitchFamily="34" charset="-122"/>
+                          <a:cs typeface="Aptos" pitchFamily="34" charset="-120"/>
+                        </a:rPr>
+                        <a:t>Maharashtra</a:t>
+                      </a:r>
+                      <a:endParaRPr lang="en-US" sz="1000" dirty="0">
+                        <a:latin typeface="Aptos" charset="0"/>
+                        <a:ea typeface="Aptos" charset="0"/>
+                        <a:cs typeface="Aptos" charset="0"/>
+                      </a:endParaRPr>
+                    </a:p>
+                  </a:txBody>
+                  <a:tcPr marL="63500" marR="63500" marT="25400" marB="25400" anchor="ctr">
+                    <a:lnL w="9525" cap="flat" cmpd="sng" algn="ctr">
+                      <a:solidFill>
+                        <a:srgbClr val="BDD7EE"/>
+                      </a:solidFill>
+                      <a:prstDash val="solid"/>
+                      <a:round/>
+                      <a:headEnd type="none" w="med" len="med"/>
+                      <a:tailEnd type="none" w="med" len="med"/>
+                    </a:lnL>
+                    <a:lnR w="9525" cap="flat" cmpd="sng" algn="ctr">
+                      <a:solidFill>
+                        <a:srgbClr val="BDD7EE"/>
+                      </a:solidFill>
+                      <a:prstDash val="solid"/>
+                      <a:round/>
+                      <a:headEnd type="none" w="med" len="med"/>
+                      <a:tailEnd type="none" w="med" len="med"/>
+                    </a:lnR>
+                    <a:lnT w="9525" cap="flat" cmpd="sng" algn="ctr">
+                      <a:solidFill>
+                        <a:srgbClr val="BDD7EE"/>
+                      </a:solidFill>
+                      <a:prstDash val="solid"/>
+                      <a:round/>
+                      <a:headEnd type="none" w="med" len="med"/>
+                      <a:tailEnd type="none" w="med" len="med"/>
+                    </a:lnT>
+                    <a:lnB w="9525" cap="flat" cmpd="sng" algn="ctr">
+                      <a:solidFill>
+                        <a:srgbClr val="BDD7EE"/>
+                      </a:solidFill>
+                      <a:prstDash val="solid"/>
+                      <a:round/>
+                      <a:headEnd type="none" w="med" len="med"/>
+                      <a:tailEnd type="none" w="med" len="med"/>
+                    </a:lnB>
+                    <a:solidFill>
+                      <a:srgbClr val="FFFFFF"/>
+                    </a:solidFill>
+                  </a:tcPr>
+                </a:tc>
+                <a:tc>
+                  <a:txBody>
+                    <a:bodyPr/>
+                    <a:lstStyle/>
+                    <a:p>
+                      <a:pPr algn="l" indent="0" marL="0">
+                        <a:buNone/>
+                      </a:pPr>
+                      <a:r>
+                        <a:rPr lang="en-US" sz="1000" dirty="0">
+                          <a:solidFill>
+                            <a:srgbClr val="262626"/>
+                          </a:solidFill>
+                          <a:latin typeface="Aptos" pitchFamily="34" charset="0"/>
+                          <a:ea typeface="Aptos" pitchFamily="34" charset="-122"/>
+                          <a:cs typeface="Aptos" pitchFamily="34" charset="-120"/>
+                        </a:rPr>
+                        <a:t>Tata Motors</a:t>
+                      </a:r>
+                      <a:endParaRPr lang="en-US" sz="1000" dirty="0">
+                        <a:latin typeface="Aptos" charset="0"/>
+                        <a:ea typeface="Aptos" charset="0"/>
+                        <a:cs typeface="Aptos" charset="0"/>
+                      </a:endParaRPr>
+                    </a:p>
+                  </a:txBody>
+                  <a:tcPr marL="63500" marR="63500" marT="25400" marB="25400" anchor="ctr">
+                    <a:lnL w="9525" cap="flat" cmpd="sng" algn="ctr">
+                      <a:solidFill>
+                        <a:srgbClr val="BDD7EE"/>
+                      </a:solidFill>
+                      <a:prstDash val="solid"/>
+                      <a:round/>
+                      <a:headEnd type="none" w="med" len="med"/>
+                      <a:tailEnd type="none" w="med" len="med"/>
+                    </a:lnL>
+                    <a:lnR w="9525" cap="flat" cmpd="sng" algn="ctr">
+                      <a:solidFill>
+                        <a:srgbClr val="BDD7EE"/>
+                      </a:solidFill>
+                      <a:prstDash val="solid"/>
+                      <a:round/>
+                      <a:headEnd type="none" w="med" len="med"/>
+                      <a:tailEnd type="none" w="med" len="med"/>
+                    </a:lnR>
+                    <a:lnT w="9525" cap="flat" cmpd="sng" algn="ctr">
+                      <a:solidFill>
+                        <a:srgbClr val="BDD7EE"/>
+                      </a:solidFill>
+                      <a:prstDash val="solid"/>
+                      <a:round/>
+                      <a:headEnd type="none" w="med" len="med"/>
+                      <a:tailEnd type="none" w="med" len="med"/>
+                    </a:lnT>
+                    <a:lnB w="9525" cap="flat" cmpd="sng" algn="ctr">
+                      <a:solidFill>
+                        <a:srgbClr val="BDD7EE"/>
+                      </a:solidFill>
+                      <a:prstDash val="solid"/>
+                      <a:round/>
+                      <a:headEnd type="none" w="med" len="med"/>
+                      <a:tailEnd type="none" w="med" len="med"/>
+                    </a:lnB>
+                    <a:solidFill>
+                      <a:srgbClr val="FFFFFF"/>
+                    </a:solidFill>
+                  </a:tcPr>
+                </a:tc>
+                <a:tc>
+                  <a:txBody>
+                    <a:bodyPr/>
+                    <a:lstStyle/>
+                    <a:p>
+                      <a:pPr algn="l" indent="0" marL="0">
+                        <a:buNone/>
+                      </a:pPr>
+                      <a:r>
+                        <a:rPr lang="en-US" sz="1000" dirty="0">
+                          <a:solidFill>
+                            <a:srgbClr val="262626"/>
+                          </a:solidFill>
+                          <a:latin typeface="Aptos" pitchFamily="34" charset="0"/>
+                          <a:ea typeface="Aptos" pitchFamily="34" charset="-122"/>
+                          <a:cs typeface="Aptos" pitchFamily="34" charset="-120"/>
+                        </a:rPr>
+                        <a:t>H₂ trucks</a:t>
+                      </a:r>
+                      <a:endParaRPr lang="en-US" sz="1000" dirty="0">
+                        <a:latin typeface="Aptos" charset="0"/>
+                        <a:ea typeface="Aptos" charset="0"/>
+                        <a:cs typeface="Aptos" charset="0"/>
+                      </a:endParaRPr>
+                    </a:p>
+                  </a:txBody>
+                  <a:tcPr marL="63500" marR="63500" marT="25400" marB="25400" anchor="ctr">
+                    <a:lnL w="9525" cap="flat" cmpd="sng" algn="ctr">
+                      <a:solidFill>
+                        <a:srgbClr val="BDD7EE"/>
+                      </a:solidFill>
+                      <a:prstDash val="solid"/>
+                      <a:round/>
+                      <a:headEnd type="none" w="med" len="med"/>
+                      <a:tailEnd type="none" w="med" len="med"/>
+                    </a:lnL>
+                    <a:lnR w="9525" cap="flat" cmpd="sng" algn="ctr">
+                      <a:solidFill>
+                        <a:srgbClr val="BDD7EE"/>
+                      </a:solidFill>
+                      <a:prstDash val="solid"/>
+                      <a:round/>
+                      <a:headEnd type="none" w="med" len="med"/>
+                      <a:tailEnd type="none" w="med" len="med"/>
+                    </a:lnR>
+                    <a:lnT w="9525" cap="flat" cmpd="sng" algn="ctr">
+                      <a:solidFill>
+                        <a:srgbClr val="BDD7EE"/>
+                      </a:solidFill>
+                      <a:prstDash val="solid"/>
+                      <a:round/>
+                      <a:headEnd type="none" w="med" len="med"/>
+                      <a:tailEnd type="none" w="med" len="med"/>
+                    </a:lnT>
+                    <a:lnB w="9525" cap="flat" cmpd="sng" algn="ctr">
+                      <a:solidFill>
+                        <a:srgbClr val="BDD7EE"/>
+                      </a:solidFill>
+                      <a:prstDash val="solid"/>
+                      <a:round/>
+                      <a:headEnd type="none" w="med" len="med"/>
+                      <a:tailEnd type="none" w="med" len="med"/>
+                    </a:lnB>
+                    <a:solidFill>
+                      <a:srgbClr val="FFFFFF"/>
+                    </a:solidFill>
+                  </a:tcPr>
+                </a:tc>
+                <a:tc>
+                  <a:txBody>
+                    <a:bodyPr/>
+                    <a:lstStyle/>
+                    <a:p>
+                      <a:pPr algn="l" indent="0" marL="0">
+                        <a:buNone/>
+                      </a:pPr>
+                      <a:r>
+                        <a:rPr lang="en-US" sz="1000" dirty="0">
+                          <a:solidFill>
+                            <a:srgbClr val="262626"/>
+                          </a:solidFill>
+                          <a:latin typeface="Aptos" pitchFamily="34" charset="0"/>
+                          <a:ea typeface="Aptos" pitchFamily="34" charset="-122"/>
+                          <a:cs typeface="Aptos" pitchFamily="34" charset="-120"/>
+                        </a:rPr>
+                        <a:t>Expressway corridor</a:t>
+                      </a:r>
+                      <a:endParaRPr lang="en-US" sz="1000" dirty="0">
+                        <a:latin typeface="Aptos" charset="0"/>
+                        <a:ea typeface="Aptos" charset="0"/>
+                        <a:cs typeface="Aptos" charset="0"/>
+                      </a:endParaRPr>
+                    </a:p>
+                  </a:txBody>
+                  <a:tcPr marL="63500" marR="63500" marT="25400" marB="25400" anchor="ctr">
+                    <a:lnL w="9525" cap="flat" cmpd="sng" algn="ctr">
+                      <a:solidFill>
+                        <a:srgbClr val="BDD7EE"/>
+                      </a:solidFill>
+                      <a:prstDash val="solid"/>
+                      <a:round/>
+                      <a:headEnd type="none" w="med" len="med"/>
+                      <a:tailEnd type="none" w="med" len="med"/>
+                    </a:lnL>
+                    <a:lnR w="9525" cap="flat" cmpd="sng" algn="ctr">
+                      <a:solidFill>
+                        <a:srgbClr val="BDD7EE"/>
+                      </a:solidFill>
+                      <a:prstDash val="solid"/>
+                      <a:round/>
+                      <a:headEnd type="none" w="med" len="med"/>
+                      <a:tailEnd type="none" w="med" len="med"/>
+                    </a:lnR>
+                    <a:lnT w="9525" cap="flat" cmpd="sng" algn="ctr">
+                      <a:solidFill>
+                        <a:srgbClr val="BDD7EE"/>
+                      </a:solidFill>
+                      <a:prstDash val="solid"/>
+                      <a:round/>
+                      <a:headEnd type="none" w="med" len="med"/>
+                      <a:tailEnd type="none" w="med" len="med"/>
+                    </a:lnT>
+                    <a:lnB w="9525" cap="flat" cmpd="sng" algn="ctr">
+                      <a:solidFill>
+                        <a:srgbClr val="BDD7EE"/>
+                      </a:solidFill>
+                      <a:prstDash val="solid"/>
+                      <a:round/>
+                      <a:headEnd type="none" w="med" len="med"/>
+                      <a:tailEnd type="none" w="med" len="med"/>
+                    </a:lnB>
+                    <a:solidFill>
+                      <a:srgbClr val="FFFFFF"/>
+                    </a:solidFill>
+                  </a:tcPr>
+                </a:tc>
+              </a:tr>
+              <a:tr h="292608">
+                <a:tc>
+                  <a:txBody>
+                    <a:bodyPr/>
+                    <a:lstStyle/>
+                    <a:p>
+                      <a:pPr algn="ctr" indent="0" marL="0">
+                        <a:buNone/>
+                      </a:pPr>
+                      <a:r>
+                        <a:rPr lang="en-US" sz="1000" b="1" dirty="0">
+                          <a:solidFill>
+                            <a:srgbClr val="262626"/>
+                          </a:solidFill>
+                          <a:latin typeface="Aptos" pitchFamily="34" charset="0"/>
+                          <a:ea typeface="Aptos" pitchFamily="34" charset="-122"/>
+                          <a:cs typeface="Aptos" pitchFamily="34" charset="-120"/>
+                        </a:rPr>
+                        <a:t>5</a:t>
+                      </a:r>
+                      <a:endParaRPr lang="en-US" sz="1000" dirty="0">
+                        <a:latin typeface="Aptos" charset="0"/>
+                        <a:ea typeface="Aptos" charset="0"/>
+                        <a:cs typeface="Aptos" charset="0"/>
+                      </a:endParaRPr>
+                    </a:p>
+                  </a:txBody>
+                  <a:tcPr marL="63500" marR="63500" marT="25400" marB="25400" anchor="ctr">
+                    <a:lnL w="9525" cap="flat" cmpd="sng" algn="ctr">
+                      <a:solidFill>
+                        <a:srgbClr val="BDD7EE"/>
+                      </a:solidFill>
+                      <a:prstDash val="solid"/>
+                      <a:round/>
+                      <a:headEnd type="none" w="med" len="med"/>
+                      <a:tailEnd type="none" w="med" len="med"/>
+                    </a:lnL>
+                    <a:lnR w="9525" cap="flat" cmpd="sng" algn="ctr">
+                      <a:solidFill>
+                        <a:srgbClr val="BDD7EE"/>
+                      </a:solidFill>
+                      <a:prstDash val="solid"/>
+                      <a:round/>
+                      <a:headEnd type="none" w="med" len="med"/>
+                      <a:tailEnd type="none" w="med" len="med"/>
+                    </a:lnR>
+                    <a:lnT w="9525" cap="flat" cmpd="sng" algn="ctr">
+                      <a:solidFill>
+                        <a:srgbClr val="BDD7EE"/>
+                      </a:solidFill>
+                      <a:prstDash val="solid"/>
+                      <a:round/>
+                      <a:headEnd type="none" w="med" len="med"/>
+                      <a:tailEnd type="none" w="med" len="med"/>
+                    </a:lnT>
+                    <a:lnB w="9525" cap="flat" cmpd="sng" algn="ctr">
+                      <a:solidFill>
+                        <a:srgbClr val="BDD7EE"/>
+                      </a:solidFill>
+                      <a:prstDash val="solid"/>
+                      <a:round/>
+                      <a:headEnd type="none" w="med" len="med"/>
+                      <a:tailEnd type="none" w="med" len="med"/>
+                    </a:lnB>
+                    <a:solidFill>
+                      <a:srgbClr val="EEF4FB"/>
+                    </a:solidFill>
+                  </a:tcPr>
+                </a:tc>
+                <a:tc>
+                  <a:txBody>
+                    <a:bodyPr/>
+                    <a:lstStyle/>
+                    <a:p>
+                      <a:pPr algn="l" indent="0" marL="0">
+                        <a:buNone/>
+                      </a:pPr>
+                      <a:r>
+                        <a:rPr lang="en-US" sz="1000" dirty="0">
+                          <a:solidFill>
+                            <a:srgbClr val="262626"/>
+                          </a:solidFill>
+                          <a:latin typeface="Aptos" pitchFamily="34" charset="0"/>
+                          <a:ea typeface="Aptos" pitchFamily="34" charset="-122"/>
+                          <a:cs typeface="Aptos" pitchFamily="34" charset="-120"/>
+                        </a:rPr>
+                        <a:t>Jamshedpur – Kalinga Nagar</a:t>
+                      </a:r>
+                      <a:endParaRPr lang="en-US" sz="1000" dirty="0">
+                        <a:latin typeface="Aptos" charset="0"/>
+                        <a:ea typeface="Aptos" charset="0"/>
+                        <a:cs typeface="Aptos" charset="0"/>
+                      </a:endParaRPr>
+                    </a:p>
+                  </a:txBody>
+                  <a:tcPr marL="63500" marR="63500" marT="25400" marB="25400" anchor="ctr">
+                    <a:lnL w="9525" cap="flat" cmpd="sng" algn="ctr">
+                      <a:solidFill>
+                        <a:srgbClr val="BDD7EE"/>
+                      </a:solidFill>
+                      <a:prstDash val="solid"/>
+                      <a:round/>
+                      <a:headEnd type="none" w="med" len="med"/>
+                      <a:tailEnd type="none" w="med" len="med"/>
+                    </a:lnL>
+                    <a:lnR w="9525" cap="flat" cmpd="sng" algn="ctr">
+                      <a:solidFill>
+                        <a:srgbClr val="BDD7EE"/>
+                      </a:solidFill>
+                      <a:prstDash val="solid"/>
+                      <a:round/>
+                      <a:headEnd type="none" w="med" len="med"/>
+                      <a:tailEnd type="none" w="med" len="med"/>
+                    </a:lnR>
+                    <a:lnT w="9525" cap="flat" cmpd="sng" algn="ctr">
+                      <a:solidFill>
+                        <a:srgbClr val="BDD7EE"/>
+                      </a:solidFill>
+                      <a:prstDash val="solid"/>
+                      <a:round/>
+                      <a:headEnd type="none" w="med" len="med"/>
+                      <a:tailEnd type="none" w="med" len="med"/>
+                    </a:lnT>
+                    <a:lnB w="9525" cap="flat" cmpd="sng" algn="ctr">
+                      <a:solidFill>
+                        <a:srgbClr val="BDD7EE"/>
+                      </a:solidFill>
+                      <a:prstDash val="solid"/>
+                      <a:round/>
+                      <a:headEnd type="none" w="med" len="med"/>
+                      <a:tailEnd type="none" w="med" len="med"/>
+                    </a:lnB>
+                    <a:solidFill>
+                      <a:srgbClr val="EEF4FB"/>
+                    </a:solidFill>
+                  </a:tcPr>
+                </a:tc>
+                <a:tc>
+                  <a:txBody>
+                    <a:bodyPr/>
+                    <a:lstStyle/>
+                    <a:p>
+                      <a:pPr algn="l" indent="0" marL="0">
+                        <a:buNone/>
+                      </a:pPr>
+                      <a:r>
+                        <a:rPr lang="en-US" sz="1000" dirty="0">
+                          <a:solidFill>
+                            <a:srgbClr val="262626"/>
+                          </a:solidFill>
+                          <a:latin typeface="Aptos" pitchFamily="34" charset="0"/>
+                          <a:ea typeface="Aptos" pitchFamily="34" charset="-122"/>
+                          <a:cs typeface="Aptos" pitchFamily="34" charset="-120"/>
+                        </a:rPr>
+                        <a:t>Jharkhand, Odisha</a:t>
+                      </a:r>
+                      <a:endParaRPr lang="en-US" sz="1000" dirty="0">
+                        <a:latin typeface="Aptos" charset="0"/>
+                        <a:ea typeface="Aptos" charset="0"/>
+                        <a:cs typeface="Aptos" charset="0"/>
+                      </a:endParaRPr>
+                    </a:p>
+                  </a:txBody>
+                  <a:tcPr marL="63500" marR="63500" marT="25400" marB="25400" anchor="ctr">
+                    <a:lnL w="9525" cap="flat" cmpd="sng" algn="ctr">
+                      <a:solidFill>
+                        <a:srgbClr val="BDD7EE"/>
+                      </a:solidFill>
+                      <a:prstDash val="solid"/>
+                      <a:round/>
+                      <a:headEnd type="none" w="med" len="med"/>
+                      <a:tailEnd type="none" w="med" len="med"/>
+                    </a:lnL>
+                    <a:lnR w="9525" cap="flat" cmpd="sng" algn="ctr">
+                      <a:solidFill>
+                        <a:srgbClr val="BDD7EE"/>
+                      </a:solidFill>
+                      <a:prstDash val="solid"/>
+                      <a:round/>
+                      <a:headEnd type="none" w="med" len="med"/>
+                      <a:tailEnd type="none" w="med" len="med"/>
+                    </a:lnR>
+                    <a:lnT w="9525" cap="flat" cmpd="sng" algn="ctr">
+                      <a:solidFill>
+                        <a:srgbClr val="BDD7EE"/>
+                      </a:solidFill>
+                      <a:prstDash val="solid"/>
+                      <a:round/>
+                      <a:headEnd type="none" w="med" len="med"/>
+                      <a:tailEnd type="none" w="med" len="med"/>
+                    </a:lnT>
+                    <a:lnB w="9525" cap="flat" cmpd="sng" algn="ctr">
+                      <a:solidFill>
+                        <a:srgbClr val="BDD7EE"/>
+                      </a:solidFill>
+                      <a:prstDash val="solid"/>
+                      <a:round/>
+                      <a:headEnd type="none" w="med" len="med"/>
+                      <a:tailEnd type="none" w="med" len="med"/>
+                    </a:lnB>
+                    <a:solidFill>
+                      <a:srgbClr val="EEF4FB"/>
+                    </a:solidFill>
+                  </a:tcPr>
+                </a:tc>
+                <a:tc>
+                  <a:txBody>
+                    <a:bodyPr/>
+                    <a:lstStyle/>
+                    <a:p>
+                      <a:pPr algn="l" indent="0" marL="0">
+                        <a:buNone/>
+                      </a:pPr>
+                      <a:r>
+                        <a:rPr lang="en-US" sz="1000" dirty="0">
+                          <a:solidFill>
+                            <a:srgbClr val="262626"/>
+                          </a:solidFill>
+                          <a:latin typeface="Aptos" pitchFamily="34" charset="0"/>
+                          <a:ea typeface="Aptos" pitchFamily="34" charset="-122"/>
+                          <a:cs typeface="Aptos" pitchFamily="34" charset="-120"/>
+                        </a:rPr>
+                        <a:t>Tata Motors</a:t>
+                      </a:r>
+                      <a:endParaRPr lang="en-US" sz="1000" dirty="0">
+                        <a:latin typeface="Aptos" charset="0"/>
+                        <a:ea typeface="Aptos" charset="0"/>
+                        <a:cs typeface="Aptos" charset="0"/>
+                      </a:endParaRPr>
+                    </a:p>
+                  </a:txBody>
+                  <a:tcPr marL="63500" marR="63500" marT="25400" marB="25400" anchor="ctr">
+                    <a:lnL w="9525" cap="flat" cmpd="sng" algn="ctr">
+                      <a:solidFill>
+                        <a:srgbClr val="BDD7EE"/>
+                      </a:solidFill>
+                      <a:prstDash val="solid"/>
+                      <a:round/>
+                      <a:headEnd type="none" w="med" len="med"/>
+                      <a:tailEnd type="none" w="med" len="med"/>
+                    </a:lnL>
+                    <a:lnR w="9525" cap="flat" cmpd="sng" algn="ctr">
+                      <a:solidFill>
+                        <a:srgbClr val="BDD7EE"/>
+                      </a:solidFill>
+                      <a:prstDash val="solid"/>
+                      <a:round/>
+                      <a:headEnd type="none" w="med" len="med"/>
+                      <a:tailEnd type="none" w="med" len="med"/>
+                    </a:lnR>
+                    <a:lnT w="9525" cap="flat" cmpd="sng" algn="ctr">
+                      <a:solidFill>
+                        <a:srgbClr val="BDD7EE"/>
+                      </a:solidFill>
+                      <a:prstDash val="solid"/>
+                      <a:round/>
+                      <a:headEnd type="none" w="med" len="med"/>
+                      <a:tailEnd type="none" w="med" len="med"/>
+                    </a:lnT>
+                    <a:lnB w="9525" cap="flat" cmpd="sng" algn="ctr">
+                      <a:solidFill>
+                        <a:srgbClr val="BDD7EE"/>
+                      </a:solidFill>
+                      <a:prstDash val="solid"/>
+                      <a:round/>
+                      <a:headEnd type="none" w="med" len="med"/>
+                      <a:tailEnd type="none" w="med" len="med"/>
+                    </a:lnB>
+                    <a:solidFill>
+                      <a:srgbClr val="EEF4FB"/>
+                    </a:solidFill>
+                  </a:tcPr>
+                </a:tc>
+                <a:tc>
+                  <a:txBody>
+                    <a:bodyPr/>
+                    <a:lstStyle/>
+                    <a:p>
+                      <a:pPr algn="l" indent="0" marL="0">
+                        <a:buNone/>
+                      </a:pPr>
+                      <a:r>
+                        <a:rPr lang="en-US" sz="1000" dirty="0">
+                          <a:solidFill>
+                            <a:srgbClr val="262626"/>
+                          </a:solidFill>
+                          <a:latin typeface="Aptos" pitchFamily="34" charset="0"/>
+                          <a:ea typeface="Aptos" pitchFamily="34" charset="-122"/>
+                          <a:cs typeface="Aptos" pitchFamily="34" charset="-120"/>
+                        </a:rPr>
+                        <a:t>H₂ trucks</a:t>
+                      </a:r>
+                      <a:endParaRPr lang="en-US" sz="1000" dirty="0">
+                        <a:latin typeface="Aptos" charset="0"/>
+                        <a:ea typeface="Aptos" charset="0"/>
+                        <a:cs typeface="Aptos" charset="0"/>
+                      </a:endParaRPr>
+                    </a:p>
+                  </a:txBody>
+                  <a:tcPr marL="63500" marR="63500" marT="25400" marB="25400" anchor="ctr">
+                    <a:lnL w="9525" cap="flat" cmpd="sng" algn="ctr">
+                      <a:solidFill>
+                        <a:srgbClr val="BDD7EE"/>
+                      </a:solidFill>
+                      <a:prstDash val="solid"/>
+                      <a:round/>
+                      <a:headEnd type="none" w="med" len="med"/>
+                      <a:tailEnd type="none" w="med" len="med"/>
+                    </a:lnL>
+                    <a:lnR w="9525" cap="flat" cmpd="sng" algn="ctr">
+                      <a:solidFill>
+                        <a:srgbClr val="BDD7EE"/>
+                      </a:solidFill>
+                      <a:prstDash val="solid"/>
+                      <a:round/>
+                      <a:headEnd type="none" w="med" len="med"/>
+                      <a:tailEnd type="none" w="med" len="med"/>
+                    </a:lnR>
+                    <a:lnT w="9525" cap="flat" cmpd="sng" algn="ctr">
+                      <a:solidFill>
+                        <a:srgbClr val="BDD7EE"/>
+                      </a:solidFill>
+                      <a:prstDash val="solid"/>
+                      <a:round/>
+                      <a:headEnd type="none" w="med" len="med"/>
+                      <a:tailEnd type="none" w="med" len="med"/>
+                    </a:lnT>
+                    <a:lnB w="9525" cap="flat" cmpd="sng" algn="ctr">
+                      <a:solidFill>
+                        <a:srgbClr val="BDD7EE"/>
+                      </a:solidFill>
+                      <a:prstDash val="solid"/>
+                      <a:round/>
+                      <a:headEnd type="none" w="med" len="med"/>
+                      <a:tailEnd type="none" w="med" len="med"/>
+                    </a:lnB>
+                    <a:solidFill>
+                      <a:srgbClr val="EEF4FB"/>
+                    </a:solidFill>
+                  </a:tcPr>
+                </a:tc>
+                <a:tc>
+                  <a:txBody>
+                    <a:bodyPr/>
+                    <a:lstStyle/>
+                    <a:p>
+                      <a:pPr algn="l" indent="0" marL="0">
+                        <a:buNone/>
+                      </a:pPr>
+                      <a:r>
+                        <a:rPr lang="en-US" sz="1000" dirty="0">
+                          <a:solidFill>
+                            <a:srgbClr val="262626"/>
+                          </a:solidFill>
+                          <a:latin typeface="Aptos" pitchFamily="34" charset="0"/>
+                          <a:ea typeface="Aptos" pitchFamily="34" charset="-122"/>
+                          <a:cs typeface="Aptos" pitchFamily="34" charset="-120"/>
+                        </a:rPr>
+                        <a:t>Links two Tata Steel plants</a:t>
+                      </a:r>
+                      <a:endParaRPr lang="en-US" sz="1000" dirty="0">
+                        <a:latin typeface="Aptos" charset="0"/>
+                        <a:ea typeface="Aptos" charset="0"/>
+                        <a:cs typeface="Aptos" charset="0"/>
+                      </a:endParaRPr>
+                    </a:p>
+                  </a:txBody>
+                  <a:tcPr marL="63500" marR="63500" marT="25400" marB="25400" anchor="ctr">
+                    <a:lnL w="9525" cap="flat" cmpd="sng" algn="ctr">
+                      <a:solidFill>
+                        <a:srgbClr val="BDD7EE"/>
+                      </a:solidFill>
+                      <a:prstDash val="solid"/>
+                      <a:round/>
+                      <a:headEnd type="none" w="med" len="med"/>
+                      <a:tailEnd type="none" w="med" len="med"/>
+                    </a:lnL>
+                    <a:lnR w="9525" cap="flat" cmpd="sng" algn="ctr">
+                      <a:solidFill>
+                        <a:srgbClr val="BDD7EE"/>
+                      </a:solidFill>
+                      <a:prstDash val="solid"/>
+                      <a:round/>
+                      <a:headEnd type="none" w="med" len="med"/>
+                      <a:tailEnd type="none" w="med" len="med"/>
+                    </a:lnR>
+                    <a:lnT w="9525" cap="flat" cmpd="sng" algn="ctr">
+                      <a:solidFill>
+                        <a:srgbClr val="BDD7EE"/>
+                      </a:solidFill>
+                      <a:prstDash val="solid"/>
+                      <a:round/>
+                      <a:headEnd type="none" w="med" len="med"/>
+                      <a:tailEnd type="none" w="med" len="med"/>
+                    </a:lnT>
+                    <a:lnB w="9525" cap="flat" cmpd="sng" algn="ctr">
+                      <a:solidFill>
+                        <a:srgbClr val="BDD7EE"/>
+                      </a:solidFill>
+                      <a:prstDash val="solid"/>
+                      <a:round/>
+                      <a:headEnd type="none" w="med" len="med"/>
+                      <a:tailEnd type="none" w="med" len="med"/>
+                    </a:lnB>
+                    <a:solidFill>
+                      <a:srgbClr val="EEF4FB"/>
+                    </a:solidFill>
+                  </a:tcPr>
+                </a:tc>
+              </a:tr>
+              <a:tr h="292608">
+                <a:tc>
+                  <a:txBody>
+                    <a:bodyPr/>
+                    <a:lstStyle/>
+                    <a:p>
+                      <a:pPr algn="ctr" indent="0" marL="0">
+                        <a:buNone/>
+                      </a:pPr>
+                      <a:r>
+                        <a:rPr lang="en-US" sz="1000" b="1" dirty="0">
+                          <a:solidFill>
+                            <a:srgbClr val="262626"/>
+                          </a:solidFill>
+                          <a:latin typeface="Aptos" pitchFamily="34" charset="0"/>
+                          <a:ea typeface="Aptos" pitchFamily="34" charset="-122"/>
+                          <a:cs typeface="Aptos" pitchFamily="34" charset="-120"/>
+                        </a:rPr>
+                        <a:t>6</a:t>
+                      </a:r>
+                      <a:endParaRPr lang="en-US" sz="1000" dirty="0">
+                        <a:latin typeface="Aptos" charset="0"/>
+                        <a:ea typeface="Aptos" charset="0"/>
+                        <a:cs typeface="Aptos" charset="0"/>
+                      </a:endParaRPr>
+                    </a:p>
+                  </a:txBody>
+                  <a:tcPr marL="63500" marR="63500" marT="25400" marB="25400" anchor="ctr">
+                    <a:lnL w="9525" cap="flat" cmpd="sng" algn="ctr">
+                      <a:solidFill>
+                        <a:srgbClr val="BDD7EE"/>
+                      </a:solidFill>
+                      <a:prstDash val="solid"/>
+                      <a:round/>
+                      <a:headEnd type="none" w="med" len="med"/>
+                      <a:tailEnd type="none" w="med" len="med"/>
+                    </a:lnL>
+                    <a:lnR w="9525" cap="flat" cmpd="sng" algn="ctr">
+                      <a:solidFill>
+                        <a:srgbClr val="BDD7EE"/>
+                      </a:solidFill>
+                      <a:prstDash val="solid"/>
+                      <a:round/>
+                      <a:headEnd type="none" w="med" len="med"/>
+                      <a:tailEnd type="none" w="med" len="med"/>
+                    </a:lnR>
+                    <a:lnT w="9525" cap="flat" cmpd="sng" algn="ctr">
+                      <a:solidFill>
+                        <a:srgbClr val="BDD7EE"/>
+                      </a:solidFill>
+                      <a:prstDash val="solid"/>
+                      <a:round/>
+                      <a:headEnd type="none" w="med" len="med"/>
+                      <a:tailEnd type="none" w="med" len="med"/>
+                    </a:lnT>
+                    <a:lnB w="9525" cap="flat" cmpd="sng" algn="ctr">
+                      <a:solidFill>
+                        <a:srgbClr val="BDD7EE"/>
+                      </a:solidFill>
+                      <a:prstDash val="solid"/>
+                      <a:round/>
+                      <a:headEnd type="none" w="med" len="med"/>
+                      <a:tailEnd type="none" w="med" len="med"/>
+                    </a:lnB>
+                    <a:solidFill>
+                      <a:srgbClr val="FFFFFF"/>
+                    </a:solidFill>
+                  </a:tcPr>
+                </a:tc>
+                <a:tc>
+                  <a:txBody>
+                    <a:bodyPr/>
+                    <a:lstStyle/>
+                    <a:p>
+                      <a:pPr algn="l" indent="0" marL="0">
+                        <a:buNone/>
+                      </a:pPr>
+                      <a:r>
+                        <a:rPr lang="en-US" sz="1000" dirty="0">
+                          <a:solidFill>
+                            <a:srgbClr val="262626"/>
+                          </a:solidFill>
+                          <a:latin typeface="Aptos" pitchFamily="34" charset="0"/>
+                          <a:ea typeface="Aptos" pitchFamily="34" charset="-122"/>
+                          <a:cs typeface="Aptos" pitchFamily="34" charset="-120"/>
+                        </a:rPr>
+                        <a:t>Bhubaneswar – Konark – Puri</a:t>
+                      </a:r>
+                      <a:endParaRPr lang="en-US" sz="1000" dirty="0">
+                        <a:latin typeface="Aptos" charset="0"/>
+                        <a:ea typeface="Aptos" charset="0"/>
+                        <a:cs typeface="Aptos" charset="0"/>
+                      </a:endParaRPr>
+                    </a:p>
+                  </a:txBody>
+                  <a:tcPr marL="63500" marR="63500" marT="25400" marB="25400" anchor="ctr">
+                    <a:lnL w="9525" cap="flat" cmpd="sng" algn="ctr">
+                      <a:solidFill>
+                        <a:srgbClr val="BDD7EE"/>
+                      </a:solidFill>
+                      <a:prstDash val="solid"/>
+                      <a:round/>
+                      <a:headEnd type="none" w="med" len="med"/>
+                      <a:tailEnd type="none" w="med" len="med"/>
+                    </a:lnL>
+                    <a:lnR w="9525" cap="flat" cmpd="sng" algn="ctr">
+                      <a:solidFill>
+                        <a:srgbClr val="BDD7EE"/>
+                      </a:solidFill>
+                      <a:prstDash val="solid"/>
+                      <a:round/>
+                      <a:headEnd type="none" w="med" len="med"/>
+                      <a:tailEnd type="none" w="med" len="med"/>
+                    </a:lnR>
+                    <a:lnT w="9525" cap="flat" cmpd="sng" algn="ctr">
+                      <a:solidFill>
+                        <a:srgbClr val="BDD7EE"/>
+                      </a:solidFill>
+                      <a:prstDash val="solid"/>
+                      <a:round/>
+                      <a:headEnd type="none" w="med" len="med"/>
+                      <a:tailEnd type="none" w="med" len="med"/>
+                    </a:lnT>
+                    <a:lnB w="9525" cap="flat" cmpd="sng" algn="ctr">
+                      <a:solidFill>
+                        <a:srgbClr val="BDD7EE"/>
+                      </a:solidFill>
+                      <a:prstDash val="solid"/>
+                      <a:round/>
+                      <a:headEnd type="none" w="med" len="med"/>
+                      <a:tailEnd type="none" w="med" len="med"/>
+                    </a:lnB>
+                    <a:solidFill>
+                      <a:srgbClr val="FFFFFF"/>
+                    </a:solidFill>
+                  </a:tcPr>
+                </a:tc>
+                <a:tc>
+                  <a:txBody>
+                    <a:bodyPr/>
+                    <a:lstStyle/>
+                    <a:p>
+                      <a:pPr algn="l" indent="0" marL="0">
+                        <a:buNone/>
+                      </a:pPr>
+                      <a:r>
+                        <a:rPr lang="en-US" sz="1000" dirty="0">
+                          <a:solidFill>
+                            <a:srgbClr val="262626"/>
+                          </a:solidFill>
+                          <a:latin typeface="Aptos" pitchFamily="34" charset="0"/>
+                          <a:ea typeface="Aptos" pitchFamily="34" charset="-122"/>
+                          <a:cs typeface="Aptos" pitchFamily="34" charset="-120"/>
+                        </a:rPr>
+                        <a:t>Odisha</a:t>
+                      </a:r>
+                      <a:endParaRPr lang="en-US" sz="1000" dirty="0">
+                        <a:latin typeface="Aptos" charset="0"/>
+                        <a:ea typeface="Aptos" charset="0"/>
+                        <a:cs typeface="Aptos" charset="0"/>
+                      </a:endParaRPr>
+                    </a:p>
+                  </a:txBody>
+                  <a:tcPr marL="63500" marR="63500" marT="25400" marB="25400" anchor="ctr">
+                    <a:lnL w="9525" cap="flat" cmpd="sng" algn="ctr">
+                      <a:solidFill>
+                        <a:srgbClr val="BDD7EE"/>
+                      </a:solidFill>
+                      <a:prstDash val="solid"/>
+                      <a:round/>
+                      <a:headEnd type="none" w="med" len="med"/>
+                      <a:tailEnd type="none" w="med" len="med"/>
+                    </a:lnL>
+                    <a:lnR w="9525" cap="flat" cmpd="sng" algn="ctr">
+                      <a:solidFill>
+                        <a:srgbClr val="BDD7EE"/>
+                      </a:solidFill>
+                      <a:prstDash val="solid"/>
+                      <a:round/>
+                      <a:headEnd type="none" w="med" len="med"/>
+                      <a:tailEnd type="none" w="med" len="med"/>
+                    </a:lnR>
+                    <a:lnT w="9525" cap="flat" cmpd="sng" algn="ctr">
+                      <a:solidFill>
+                        <a:srgbClr val="BDD7EE"/>
+                      </a:solidFill>
+                      <a:prstDash val="solid"/>
+                      <a:round/>
+                      <a:headEnd type="none" w="med" len="med"/>
+                      <a:tailEnd type="none" w="med" len="med"/>
+                    </a:lnT>
+                    <a:lnB w="9525" cap="flat" cmpd="sng" algn="ctr">
+                      <a:solidFill>
+                        <a:srgbClr val="BDD7EE"/>
+                      </a:solidFill>
+                      <a:prstDash val="solid"/>
+                      <a:round/>
+                      <a:headEnd type="none" w="med" len="med"/>
+                      <a:tailEnd type="none" w="med" len="med"/>
+                    </a:lnB>
+                    <a:solidFill>
+                      <a:srgbClr val="FFFFFF"/>
+                    </a:solidFill>
+                  </a:tcPr>
+                </a:tc>
+                <a:tc>
+                  <a:txBody>
+                    <a:bodyPr/>
+                    <a:lstStyle/>
+                    <a:p>
+                      <a:pPr algn="l" indent="0" marL="0">
+                        <a:buNone/>
+                      </a:pPr>
+                      <a:r>
+                        <a:rPr lang="en-US" sz="1000" dirty="0">
+                          <a:solidFill>
+                            <a:srgbClr val="262626"/>
+                          </a:solidFill>
+                          <a:latin typeface="Aptos" pitchFamily="34" charset="0"/>
+                          <a:ea typeface="Aptos" pitchFamily="34" charset="-122"/>
+                          <a:cs typeface="Aptos" pitchFamily="34" charset="-120"/>
+                        </a:rPr>
+                        <a:t>NTPC* with CRUT &amp; GRIDCO</a:t>
+                      </a:r>
+                      <a:endParaRPr lang="en-US" sz="1000" dirty="0">
+                        <a:latin typeface="Aptos" charset="0"/>
+                        <a:ea typeface="Aptos" charset="0"/>
+                        <a:cs typeface="Aptos" charset="0"/>
+                      </a:endParaRPr>
+                    </a:p>
+                  </a:txBody>
+                  <a:tcPr marL="63500" marR="63500" marT="25400" marB="25400" anchor="ctr">
+                    <a:lnL w="9525" cap="flat" cmpd="sng" algn="ctr">
+                      <a:solidFill>
+                        <a:srgbClr val="BDD7EE"/>
+                      </a:solidFill>
+                      <a:prstDash val="solid"/>
+                      <a:round/>
+                      <a:headEnd type="none" w="med" len="med"/>
+                      <a:tailEnd type="none" w="med" len="med"/>
+                    </a:lnL>
+                    <a:lnR w="9525" cap="flat" cmpd="sng" algn="ctr">
+                      <a:solidFill>
+                        <a:srgbClr val="BDD7EE"/>
+                      </a:solidFill>
+                      <a:prstDash val="solid"/>
+                      <a:round/>
+                      <a:headEnd type="none" w="med" len="med"/>
+                      <a:tailEnd type="none" w="med" len="med"/>
+                    </a:lnR>
+                    <a:lnT w="9525" cap="flat" cmpd="sng" algn="ctr">
+                      <a:solidFill>
+                        <a:srgbClr val="BDD7EE"/>
+                      </a:solidFill>
+                      <a:prstDash val="solid"/>
+                      <a:round/>
+                      <a:headEnd type="none" w="med" len="med"/>
+                      <a:tailEnd type="none" w="med" len="med"/>
+                    </a:lnT>
+                    <a:lnB w="9525" cap="flat" cmpd="sng" algn="ctr">
+                      <a:solidFill>
+                        <a:srgbClr val="BDD7EE"/>
+                      </a:solidFill>
+                      <a:prstDash val="solid"/>
+                      <a:round/>
+                      <a:headEnd type="none" w="med" len="med"/>
+                      <a:tailEnd type="none" w="med" len="med"/>
+                    </a:lnB>
+                    <a:solidFill>
+                      <a:srgbClr val="FFFFFF"/>
+                    </a:solidFill>
+                  </a:tcPr>
+                </a:tc>
+                <a:tc>
+                  <a:txBody>
+                    <a:bodyPr/>
+                    <a:lstStyle/>
+                    <a:p>
+                      <a:pPr algn="l" indent="0" marL="0">
+                        <a:buNone/>
+                      </a:pPr>
+                      <a:r>
+                        <a:rPr lang="en-US" sz="1000" dirty="0">
+                          <a:solidFill>
+                            <a:srgbClr val="262626"/>
+                          </a:solidFill>
+                          <a:latin typeface="Aptos" pitchFamily="34" charset="0"/>
+                          <a:ea typeface="Aptos" pitchFamily="34" charset="-122"/>
+                          <a:cs typeface="Aptos" pitchFamily="34" charset="-120"/>
+                        </a:rPr>
+                        <a:t>3 FC buses (42 seats, 600 km)</a:t>
+                      </a:r>
+                      <a:endParaRPr lang="en-US" sz="1000" dirty="0">
+                        <a:latin typeface="Aptos" charset="0"/>
+                        <a:ea typeface="Aptos" charset="0"/>
+                        <a:cs typeface="Aptos" charset="0"/>
+                      </a:endParaRPr>
+                    </a:p>
+                  </a:txBody>
+                  <a:tcPr marL="63500" marR="63500" marT="25400" marB="25400" anchor="ctr">
+                    <a:lnL w="9525" cap="flat" cmpd="sng" algn="ctr">
+                      <a:solidFill>
+                        <a:srgbClr val="BDD7EE"/>
+                      </a:solidFill>
+                      <a:prstDash val="solid"/>
+                      <a:round/>
+                      <a:headEnd type="none" w="med" len="med"/>
+                      <a:tailEnd type="none" w="med" len="med"/>
+                    </a:lnL>
+                    <a:lnR w="9525" cap="flat" cmpd="sng" algn="ctr">
+                      <a:solidFill>
+                        <a:srgbClr val="BDD7EE"/>
+                      </a:solidFill>
+                      <a:prstDash val="solid"/>
+                      <a:round/>
+                      <a:headEnd type="none" w="med" len="med"/>
+                      <a:tailEnd type="none" w="med" len="med"/>
+                    </a:lnR>
+                    <a:lnT w="9525" cap="flat" cmpd="sng" algn="ctr">
+                      <a:solidFill>
+                        <a:srgbClr val="BDD7EE"/>
+                      </a:solidFill>
+                      <a:prstDash val="solid"/>
+                      <a:round/>
+                      <a:headEnd type="none" w="med" len="med"/>
+                      <a:tailEnd type="none" w="med" len="med"/>
+                    </a:lnT>
+                    <a:lnB w="9525" cap="flat" cmpd="sng" algn="ctr">
+                      <a:solidFill>
+                        <a:srgbClr val="BDD7EE"/>
+                      </a:solidFill>
+                      <a:prstDash val="solid"/>
+                      <a:round/>
+                      <a:headEnd type="none" w="med" len="med"/>
+                      <a:tailEnd type="none" w="med" len="med"/>
+                    </a:lnB>
+                    <a:solidFill>
+                      <a:srgbClr val="FFFFFF"/>
+                    </a:solidFill>
+                  </a:tcPr>
+                </a:tc>
+                <a:tc>
+                  <a:txBody>
+                    <a:bodyPr/>
+                    <a:lstStyle/>
+                    <a:p>
+                      <a:pPr algn="l" indent="0" marL="0">
+                        <a:buNone/>
+                      </a:pPr>
+                      <a:r>
+                        <a:rPr lang="en-US" sz="1000" dirty="0">
+                          <a:solidFill>
+                            <a:srgbClr val="262626"/>
+                          </a:solidFill>
+                          <a:latin typeface="Aptos" pitchFamily="34" charset="0"/>
+                          <a:ea typeface="Aptos" pitchFamily="34" charset="-122"/>
+                          <a:cs typeface="Aptos" pitchFamily="34" charset="-120"/>
+                        </a:rPr>
+                        <a:t>H₂ plant at CRUT depot</a:t>
+                      </a:r>
+                      <a:endParaRPr lang="en-US" sz="1000" dirty="0">
+                        <a:latin typeface="Aptos" charset="0"/>
+                        <a:ea typeface="Aptos" charset="0"/>
+                        <a:cs typeface="Aptos" charset="0"/>
+                      </a:endParaRPr>
+                    </a:p>
+                  </a:txBody>
+                  <a:tcPr marL="63500" marR="63500" marT="25400" marB="25400" anchor="ctr">
+                    <a:lnL w="9525" cap="flat" cmpd="sng" algn="ctr">
+                      <a:solidFill>
+                        <a:srgbClr val="BDD7EE"/>
+                      </a:solidFill>
+                      <a:prstDash val="solid"/>
+                      <a:round/>
+                      <a:headEnd type="none" w="med" len="med"/>
+                      <a:tailEnd type="none" w="med" len="med"/>
+                    </a:lnL>
+                    <a:lnR w="9525" cap="flat" cmpd="sng" algn="ctr">
+                      <a:solidFill>
+                        <a:srgbClr val="BDD7EE"/>
+                      </a:solidFill>
+                      <a:prstDash val="solid"/>
+                      <a:round/>
+                      <a:headEnd type="none" w="med" len="med"/>
+                      <a:tailEnd type="none" w="med" len="med"/>
+                    </a:lnR>
+                    <a:lnT w="9525" cap="flat" cmpd="sng" algn="ctr">
+                      <a:solidFill>
+                        <a:srgbClr val="BDD7EE"/>
+                      </a:solidFill>
+                      <a:prstDash val="solid"/>
+                      <a:round/>
+                      <a:headEnd type="none" w="med" len="med"/>
+                      <a:tailEnd type="none" w="med" len="med"/>
+                    </a:lnT>
+                    <a:lnB w="9525" cap="flat" cmpd="sng" algn="ctr">
+                      <a:solidFill>
+                        <a:srgbClr val="BDD7EE"/>
+                      </a:solidFill>
+                      <a:prstDash val="solid"/>
+                      <a:round/>
+                      <a:headEnd type="none" w="med" len="med"/>
+                      <a:tailEnd type="none" w="med" len="med"/>
+                    </a:lnB>
+                    <a:solidFill>
+                      <a:srgbClr val="FFFFFF"/>
+                    </a:solidFill>
+                  </a:tcPr>
+                </a:tc>
+              </a:tr>
+              <a:tr h="292608">
+                <a:tc>
+                  <a:txBody>
+                    <a:bodyPr/>
+                    <a:lstStyle/>
+                    <a:p>
+                      <a:pPr algn="ctr" indent="0" marL="0">
+                        <a:buNone/>
+                      </a:pPr>
+                      <a:r>
+                        <a:rPr lang="en-US" sz="1000" b="1" dirty="0">
+                          <a:solidFill>
+                            <a:srgbClr val="262626"/>
+                          </a:solidFill>
+                          <a:latin typeface="Aptos" pitchFamily="34" charset="0"/>
+                          <a:ea typeface="Aptos" pitchFamily="34" charset="-122"/>
+                          <a:cs typeface="Aptos" pitchFamily="34" charset="-120"/>
+                        </a:rPr>
+                        <a:t>7</a:t>
+                      </a:r>
+                      <a:endParaRPr lang="en-US" sz="1000" dirty="0">
+                        <a:latin typeface="Aptos" charset="0"/>
+                        <a:ea typeface="Aptos" charset="0"/>
+                        <a:cs typeface="Aptos" charset="0"/>
+                      </a:endParaRPr>
+                    </a:p>
+                  </a:txBody>
+                  <a:tcPr marL="63500" marR="63500" marT="25400" marB="25400" anchor="ctr">
+                    <a:lnL w="9525" cap="flat" cmpd="sng" algn="ctr">
+                      <a:solidFill>
+                        <a:srgbClr val="BDD7EE"/>
+                      </a:solidFill>
+                      <a:prstDash val="solid"/>
+                      <a:round/>
+                      <a:headEnd type="none" w="med" len="med"/>
+                      <a:tailEnd type="none" w="med" len="med"/>
+                    </a:lnL>
+                    <a:lnR w="9525" cap="flat" cmpd="sng" algn="ctr">
+                      <a:solidFill>
+                        <a:srgbClr val="BDD7EE"/>
+                      </a:solidFill>
+                      <a:prstDash val="solid"/>
+                      <a:round/>
+                      <a:headEnd type="none" w="med" len="med"/>
+                      <a:tailEnd type="none" w="med" len="med"/>
+                    </a:lnR>
+                    <a:lnT w="9525" cap="flat" cmpd="sng" algn="ctr">
+                      <a:solidFill>
+                        <a:srgbClr val="BDD7EE"/>
+                      </a:solidFill>
+                      <a:prstDash val="solid"/>
+                      <a:round/>
+                      <a:headEnd type="none" w="med" len="med"/>
+                      <a:tailEnd type="none" w="med" len="med"/>
+                    </a:lnT>
+                    <a:lnB w="9525" cap="flat" cmpd="sng" algn="ctr">
+                      <a:solidFill>
+                        <a:srgbClr val="BDD7EE"/>
+                      </a:solidFill>
+                      <a:prstDash val="solid"/>
+                      <a:round/>
+                      <a:headEnd type="none" w="med" len="med"/>
+                      <a:tailEnd type="none" w="med" len="med"/>
+                    </a:lnB>
+                    <a:solidFill>
+                      <a:srgbClr val="EEF4FB"/>
+                    </a:solidFill>
+                  </a:tcPr>
+                </a:tc>
+                <a:tc>
+                  <a:txBody>
+                    <a:bodyPr/>
+                    <a:lstStyle/>
+                    <a:p>
+                      <a:pPr algn="l" indent="0" marL="0">
+                        <a:buNone/>
+                      </a:pPr>
+                      <a:r>
+                        <a:rPr lang="en-US" sz="1000" dirty="0">
+                          <a:solidFill>
+                            <a:srgbClr val="262626"/>
+                          </a:solidFill>
+                          <a:latin typeface="Aptos" pitchFamily="34" charset="0"/>
+                          <a:ea typeface="Aptos" pitchFamily="34" charset="-122"/>
+                          <a:cs typeface="Aptos" pitchFamily="34" charset="-120"/>
+                        </a:rPr>
+                        <a:t>Thiruvananthapuram – Kochi</a:t>
+                      </a:r>
+                      <a:endParaRPr lang="en-US" sz="1000" dirty="0">
+                        <a:latin typeface="Aptos" charset="0"/>
+                        <a:ea typeface="Aptos" charset="0"/>
+                        <a:cs typeface="Aptos" charset="0"/>
+                      </a:endParaRPr>
+                    </a:p>
+                  </a:txBody>
+                  <a:tcPr marL="63500" marR="63500" marT="25400" marB="25400" anchor="ctr">
+                    <a:lnL w="9525" cap="flat" cmpd="sng" algn="ctr">
+                      <a:solidFill>
+                        <a:srgbClr val="BDD7EE"/>
+                      </a:solidFill>
+                      <a:prstDash val="solid"/>
+                      <a:round/>
+                      <a:headEnd type="none" w="med" len="med"/>
+                      <a:tailEnd type="none" w="med" len="med"/>
+                    </a:lnL>
+                    <a:lnR w="9525" cap="flat" cmpd="sng" algn="ctr">
+                      <a:solidFill>
+                        <a:srgbClr val="BDD7EE"/>
+                      </a:solidFill>
+                      <a:prstDash val="solid"/>
+                      <a:round/>
+                      <a:headEnd type="none" w="med" len="med"/>
+                      <a:tailEnd type="none" w="med" len="med"/>
+                    </a:lnR>
+                    <a:lnT w="9525" cap="flat" cmpd="sng" algn="ctr">
+                      <a:solidFill>
+                        <a:srgbClr val="BDD7EE"/>
+                      </a:solidFill>
+                      <a:prstDash val="solid"/>
+                      <a:round/>
+                      <a:headEnd type="none" w="med" len="med"/>
+                      <a:tailEnd type="none" w="med" len="med"/>
+                    </a:lnT>
+                    <a:lnB w="9525" cap="flat" cmpd="sng" algn="ctr">
+                      <a:solidFill>
+                        <a:srgbClr val="BDD7EE"/>
+                      </a:solidFill>
+                      <a:prstDash val="solid"/>
+                      <a:round/>
+                      <a:headEnd type="none" w="med" len="med"/>
+                      <a:tailEnd type="none" w="med" len="med"/>
+                    </a:lnB>
+                    <a:solidFill>
+                      <a:srgbClr val="EEF4FB"/>
+                    </a:solidFill>
+                  </a:tcPr>
+                </a:tc>
+                <a:tc>
+                  <a:txBody>
+                    <a:bodyPr/>
+                    <a:lstStyle/>
+                    <a:p>
+                      <a:pPr algn="l" indent="0" marL="0">
+                        <a:buNone/>
+                      </a:pPr>
+                      <a:r>
+                        <a:rPr lang="en-US" sz="1000" dirty="0">
+                          <a:solidFill>
+                            <a:srgbClr val="262626"/>
+                          </a:solidFill>
+                          <a:latin typeface="Aptos" pitchFamily="34" charset="0"/>
+                          <a:ea typeface="Aptos" pitchFamily="34" charset="-122"/>
+                          <a:cs typeface="Aptos" pitchFamily="34" charset="-120"/>
+                        </a:rPr>
+                        <a:t>Kerala</a:t>
+                      </a:r>
+                      <a:endParaRPr lang="en-US" sz="1000" dirty="0">
+                        <a:latin typeface="Aptos" charset="0"/>
+                        <a:ea typeface="Aptos" charset="0"/>
+                        <a:cs typeface="Aptos" charset="0"/>
+                      </a:endParaRPr>
+                    </a:p>
+                  </a:txBody>
+                  <a:tcPr marL="63500" marR="63500" marT="25400" marB="25400" anchor="ctr">
+                    <a:lnL w="9525" cap="flat" cmpd="sng" algn="ctr">
+                      <a:solidFill>
+                        <a:srgbClr val="BDD7EE"/>
+                      </a:solidFill>
+                      <a:prstDash val="solid"/>
+                      <a:round/>
+                      <a:headEnd type="none" w="med" len="med"/>
+                      <a:tailEnd type="none" w="med" len="med"/>
+                    </a:lnL>
+                    <a:lnR w="9525" cap="flat" cmpd="sng" algn="ctr">
+                      <a:solidFill>
+                        <a:srgbClr val="BDD7EE"/>
+                      </a:solidFill>
+                      <a:prstDash val="solid"/>
+                      <a:round/>
+                      <a:headEnd type="none" w="med" len="med"/>
+                      <a:tailEnd type="none" w="med" len="med"/>
+                    </a:lnR>
+                    <a:lnT w="9525" cap="flat" cmpd="sng" algn="ctr">
+                      <a:solidFill>
+                        <a:srgbClr val="BDD7EE"/>
+                      </a:solidFill>
+                      <a:prstDash val="solid"/>
+                      <a:round/>
+                      <a:headEnd type="none" w="med" len="med"/>
+                      <a:tailEnd type="none" w="med" len="med"/>
+                    </a:lnT>
+                    <a:lnB w="9525" cap="flat" cmpd="sng" algn="ctr">
+                      <a:solidFill>
+                        <a:srgbClr val="BDD7EE"/>
+                      </a:solidFill>
+                      <a:prstDash val="solid"/>
+                      <a:round/>
+                      <a:headEnd type="none" w="med" len="med"/>
+                      <a:tailEnd type="none" w="med" len="med"/>
+                    </a:lnB>
+                    <a:solidFill>
+                      <a:srgbClr val="EEF4FB"/>
+                    </a:solidFill>
+                  </a:tcPr>
+                </a:tc>
+                <a:tc>
+                  <a:txBody>
+                    <a:bodyPr/>
+                    <a:lstStyle/>
+                    <a:p>
+                      <a:pPr algn="l" indent="0" marL="0">
+                        <a:buNone/>
+                      </a:pPr>
+                      <a:r>
+                        <a:rPr lang="en-US" sz="1000" dirty="0">
+                          <a:solidFill>
+                            <a:srgbClr val="262626"/>
+                          </a:solidFill>
+                          <a:latin typeface="Aptos" pitchFamily="34" charset="0"/>
+                          <a:ea typeface="Aptos" pitchFamily="34" charset="-122"/>
+                          <a:cs typeface="Aptos" pitchFamily="34" charset="-120"/>
+                        </a:rPr>
+                        <a:t>ANERT, KSRTC, Ashok Leyland, BPCL</a:t>
+                      </a:r>
+                      <a:endParaRPr lang="en-US" sz="1000" dirty="0">
+                        <a:latin typeface="Aptos" charset="0"/>
+                        <a:ea typeface="Aptos" charset="0"/>
+                        <a:cs typeface="Aptos" charset="0"/>
+                      </a:endParaRPr>
+                    </a:p>
+                  </a:txBody>
+                  <a:tcPr marL="63500" marR="63500" marT="25400" marB="25400" anchor="ctr">
+                    <a:lnL w="9525" cap="flat" cmpd="sng" algn="ctr">
+                      <a:solidFill>
+                        <a:srgbClr val="BDD7EE"/>
+                      </a:solidFill>
+                      <a:prstDash val="solid"/>
+                      <a:round/>
+                      <a:headEnd type="none" w="med" len="med"/>
+                      <a:tailEnd type="none" w="med" len="med"/>
+                    </a:lnL>
+                    <a:lnR w="9525" cap="flat" cmpd="sng" algn="ctr">
+                      <a:solidFill>
+                        <a:srgbClr val="BDD7EE"/>
+                      </a:solidFill>
+                      <a:prstDash val="solid"/>
+                      <a:round/>
+                      <a:headEnd type="none" w="med" len="med"/>
+                      <a:tailEnd type="none" w="med" len="med"/>
+                    </a:lnR>
+                    <a:lnT w="9525" cap="flat" cmpd="sng" algn="ctr">
+                      <a:solidFill>
+                        <a:srgbClr val="BDD7EE"/>
+                      </a:solidFill>
+                      <a:prstDash val="solid"/>
+                      <a:round/>
+                      <a:headEnd type="none" w="med" len="med"/>
+                      <a:tailEnd type="none" w="med" len="med"/>
+                    </a:lnT>
+                    <a:lnB w="9525" cap="flat" cmpd="sng" algn="ctr">
+                      <a:solidFill>
+                        <a:srgbClr val="BDD7EE"/>
+                      </a:solidFill>
+                      <a:prstDash val="solid"/>
+                      <a:round/>
+                      <a:headEnd type="none" w="med" len="med"/>
+                      <a:tailEnd type="none" w="med" len="med"/>
+                    </a:lnB>
+                    <a:solidFill>
+                      <a:srgbClr val="EEF4FB"/>
+                    </a:solidFill>
+                  </a:tcPr>
+                </a:tc>
+                <a:tc>
+                  <a:txBody>
+                    <a:bodyPr/>
+                    <a:lstStyle/>
+                    <a:p>
+                      <a:pPr algn="l" indent="0" marL="0">
+                        <a:buNone/>
+                      </a:pPr>
+                      <a:r>
+                        <a:rPr lang="en-US" sz="1000" dirty="0">
+                          <a:solidFill>
+                            <a:srgbClr val="262626"/>
+                          </a:solidFill>
+                          <a:latin typeface="Aptos" pitchFamily="34" charset="0"/>
+                          <a:ea typeface="Aptos" pitchFamily="34" charset="-122"/>
+                          <a:cs typeface="Aptos" pitchFamily="34" charset="-120"/>
+                        </a:rPr>
+                        <a:t>4 trucks (H₂-ICE + FC) for 7 &amp; 8</a:t>
+                      </a:r>
+                      <a:endParaRPr lang="en-US" sz="1000" dirty="0">
+                        <a:latin typeface="Aptos" charset="0"/>
+                        <a:ea typeface="Aptos" charset="0"/>
+                        <a:cs typeface="Aptos" charset="0"/>
+                      </a:endParaRPr>
+                    </a:p>
+                  </a:txBody>
+                  <a:tcPr marL="63500" marR="63500" marT="25400" marB="25400" anchor="ctr">
+                    <a:lnL w="9525" cap="flat" cmpd="sng" algn="ctr">
+                      <a:solidFill>
+                        <a:srgbClr val="BDD7EE"/>
+                      </a:solidFill>
+                      <a:prstDash val="solid"/>
+                      <a:round/>
+                      <a:headEnd type="none" w="med" len="med"/>
+                      <a:tailEnd type="none" w="med" len="med"/>
+                    </a:lnL>
+                    <a:lnR w="9525" cap="flat" cmpd="sng" algn="ctr">
+                      <a:solidFill>
+                        <a:srgbClr val="BDD7EE"/>
+                      </a:solidFill>
+                      <a:prstDash val="solid"/>
+                      <a:round/>
+                      <a:headEnd type="none" w="med" len="med"/>
+                      <a:tailEnd type="none" w="med" len="med"/>
+                    </a:lnR>
+                    <a:lnT w="9525" cap="flat" cmpd="sng" algn="ctr">
+                      <a:solidFill>
+                        <a:srgbClr val="BDD7EE"/>
+                      </a:solidFill>
+                      <a:prstDash val="solid"/>
+                      <a:round/>
+                      <a:headEnd type="none" w="med" len="med"/>
+                      <a:tailEnd type="none" w="med" len="med"/>
+                    </a:lnT>
+                    <a:lnB w="9525" cap="flat" cmpd="sng" algn="ctr">
+                      <a:solidFill>
+                        <a:srgbClr val="BDD7EE"/>
+                      </a:solidFill>
+                      <a:prstDash val="solid"/>
+                      <a:round/>
+                      <a:headEnd type="none" w="med" len="med"/>
+                      <a:tailEnd type="none" w="med" len="med"/>
+                    </a:lnB>
+                    <a:solidFill>
+                      <a:srgbClr val="EEF4FB"/>
+                    </a:solidFill>
+                  </a:tcPr>
+                </a:tc>
+                <a:tc>
+                  <a:txBody>
+                    <a:bodyPr/>
+                    <a:lstStyle/>
+                    <a:p>
+                      <a:pPr algn="l" indent="0" marL="0">
+                        <a:buNone/>
+                      </a:pPr>
+                      <a:r>
+                        <a:rPr lang="en-US" sz="1000" dirty="0">
+                          <a:solidFill>
+                            <a:srgbClr val="262626"/>
+                          </a:solidFill>
+                          <a:latin typeface="Aptos" pitchFamily="34" charset="0"/>
+                          <a:ea typeface="Aptos" pitchFamily="34" charset="-122"/>
+                          <a:cs typeface="Aptos" pitchFamily="34" charset="-120"/>
+                        </a:rPr>
+                        <a:t>HRS Muttathara, 260 kg/d</a:t>
+                      </a:r>
+                      <a:endParaRPr lang="en-US" sz="1000" dirty="0">
+                        <a:latin typeface="Aptos" charset="0"/>
+                        <a:ea typeface="Aptos" charset="0"/>
+                        <a:cs typeface="Aptos" charset="0"/>
+                      </a:endParaRPr>
+                    </a:p>
+                  </a:txBody>
+                  <a:tcPr marL="63500" marR="63500" marT="25400" marB="25400" anchor="ctr">
+                    <a:lnL w="9525" cap="flat" cmpd="sng" algn="ctr">
+                      <a:solidFill>
+                        <a:srgbClr val="BDD7EE"/>
+                      </a:solidFill>
+                      <a:prstDash val="solid"/>
+                      <a:round/>
+                      <a:headEnd type="none" w="med" len="med"/>
+                      <a:tailEnd type="none" w="med" len="med"/>
+                    </a:lnL>
+                    <a:lnR w="9525" cap="flat" cmpd="sng" algn="ctr">
+                      <a:solidFill>
+                        <a:srgbClr val="BDD7EE"/>
+                      </a:solidFill>
+                      <a:prstDash val="solid"/>
+                      <a:round/>
+                      <a:headEnd type="none" w="med" len="med"/>
+                      <a:tailEnd type="none" w="med" len="med"/>
+                    </a:lnR>
+                    <a:lnT w="9525" cap="flat" cmpd="sng" algn="ctr">
+                      <a:solidFill>
+                        <a:srgbClr val="BDD7EE"/>
+                      </a:solidFill>
+                      <a:prstDash val="solid"/>
+                      <a:round/>
+                      <a:headEnd type="none" w="med" len="med"/>
+                      <a:tailEnd type="none" w="med" len="med"/>
+                    </a:lnT>
+                    <a:lnB w="9525" cap="flat" cmpd="sng" algn="ctr">
+                      <a:solidFill>
+                        <a:srgbClr val="BDD7EE"/>
+                      </a:solidFill>
+                      <a:prstDash val="solid"/>
+                      <a:round/>
+                      <a:headEnd type="none" w="med" len="med"/>
+                      <a:tailEnd type="none" w="med" len="med"/>
+                    </a:lnB>
+                    <a:solidFill>
+                      <a:srgbClr val="EEF4FB"/>
+                    </a:solidFill>
+                  </a:tcPr>
+                </a:tc>
+              </a:tr>
+              <a:tr h="292608">
+                <a:tc>
+                  <a:txBody>
+                    <a:bodyPr/>
+                    <a:lstStyle/>
+                    <a:p>
+                      <a:pPr algn="ctr" indent="0" marL="0">
+                        <a:buNone/>
+                      </a:pPr>
+                      <a:r>
+                        <a:rPr lang="en-US" sz="1000" b="1" dirty="0">
+                          <a:solidFill>
+                            <a:srgbClr val="262626"/>
+                          </a:solidFill>
+                          <a:latin typeface="Aptos" pitchFamily="34" charset="0"/>
+                          <a:ea typeface="Aptos" pitchFamily="34" charset="-122"/>
+                          <a:cs typeface="Aptos" pitchFamily="34" charset="-120"/>
+                        </a:rPr>
+                        <a:t>8</a:t>
+                      </a:r>
+                      <a:endParaRPr lang="en-US" sz="1000" dirty="0">
+                        <a:latin typeface="Aptos" charset="0"/>
+                        <a:ea typeface="Aptos" charset="0"/>
+                        <a:cs typeface="Aptos" charset="0"/>
+                      </a:endParaRPr>
+                    </a:p>
+                  </a:txBody>
+                  <a:tcPr marL="63500" marR="63500" marT="25400" marB="25400" anchor="ctr">
+                    <a:lnL w="9525" cap="flat" cmpd="sng" algn="ctr">
+                      <a:solidFill>
+                        <a:srgbClr val="BDD7EE"/>
+                      </a:solidFill>
+                      <a:prstDash val="solid"/>
+                      <a:round/>
+                      <a:headEnd type="none" w="med" len="med"/>
+                      <a:tailEnd type="none" w="med" len="med"/>
+                    </a:lnL>
+                    <a:lnR w="9525" cap="flat" cmpd="sng" algn="ctr">
+                      <a:solidFill>
+                        <a:srgbClr val="BDD7EE"/>
+                      </a:solidFill>
+                      <a:prstDash val="solid"/>
+                      <a:round/>
+                      <a:headEnd type="none" w="med" len="med"/>
+                      <a:tailEnd type="none" w="med" len="med"/>
+                    </a:lnR>
+                    <a:lnT w="9525" cap="flat" cmpd="sng" algn="ctr">
+                      <a:solidFill>
+                        <a:srgbClr val="BDD7EE"/>
+                      </a:solidFill>
+                      <a:prstDash val="solid"/>
+                      <a:round/>
+                      <a:headEnd type="none" w="med" len="med"/>
+                      <a:tailEnd type="none" w="med" len="med"/>
+                    </a:lnT>
+                    <a:lnB w="9525" cap="flat" cmpd="sng" algn="ctr">
+                      <a:solidFill>
+                        <a:srgbClr val="BDD7EE"/>
+                      </a:solidFill>
+                      <a:prstDash val="solid"/>
+                      <a:round/>
+                      <a:headEnd type="none" w="med" len="med"/>
+                      <a:tailEnd type="none" w="med" len="med"/>
+                    </a:lnB>
+                    <a:solidFill>
+                      <a:srgbClr val="FFFFFF"/>
+                    </a:solidFill>
+                  </a:tcPr>
+                </a:tc>
+                <a:tc>
+                  <a:txBody>
+                    <a:bodyPr/>
+                    <a:lstStyle/>
+                    <a:p>
+                      <a:pPr algn="l" indent="0" marL="0">
+                        <a:buNone/>
+                      </a:pPr>
+                      <a:r>
+                        <a:rPr lang="en-US" sz="1000" dirty="0">
+                          <a:solidFill>
+                            <a:srgbClr val="262626"/>
+                          </a:solidFill>
+                          <a:latin typeface="Aptos" pitchFamily="34" charset="0"/>
+                          <a:ea typeface="Aptos" pitchFamily="34" charset="-122"/>
+                          <a:cs typeface="Aptos" pitchFamily="34" charset="-120"/>
+                        </a:rPr>
+                        <a:t>Kochi – Edappally</a:t>
+                      </a:r>
+                      <a:endParaRPr lang="en-US" sz="1000" dirty="0">
+                        <a:latin typeface="Aptos" charset="0"/>
+                        <a:ea typeface="Aptos" charset="0"/>
+                        <a:cs typeface="Aptos" charset="0"/>
+                      </a:endParaRPr>
+                    </a:p>
+                  </a:txBody>
+                  <a:tcPr marL="63500" marR="63500" marT="25400" marB="25400" anchor="ctr">
+                    <a:lnL w="9525" cap="flat" cmpd="sng" algn="ctr">
+                      <a:solidFill>
+                        <a:srgbClr val="BDD7EE"/>
+                      </a:solidFill>
+                      <a:prstDash val="solid"/>
+                      <a:round/>
+                      <a:headEnd type="none" w="med" len="med"/>
+                      <a:tailEnd type="none" w="med" len="med"/>
+                    </a:lnL>
+                    <a:lnR w="9525" cap="flat" cmpd="sng" algn="ctr">
+                      <a:solidFill>
+                        <a:srgbClr val="BDD7EE"/>
+                      </a:solidFill>
+                      <a:prstDash val="solid"/>
+                      <a:round/>
+                      <a:headEnd type="none" w="med" len="med"/>
+                      <a:tailEnd type="none" w="med" len="med"/>
+                    </a:lnR>
+                    <a:lnT w="9525" cap="flat" cmpd="sng" algn="ctr">
+                      <a:solidFill>
+                        <a:srgbClr val="BDD7EE"/>
+                      </a:solidFill>
+                      <a:prstDash val="solid"/>
+                      <a:round/>
+                      <a:headEnd type="none" w="med" len="med"/>
+                      <a:tailEnd type="none" w="med" len="med"/>
+                    </a:lnT>
+                    <a:lnB w="9525" cap="flat" cmpd="sng" algn="ctr">
+                      <a:solidFill>
+                        <a:srgbClr val="BDD7EE"/>
+                      </a:solidFill>
+                      <a:prstDash val="solid"/>
+                      <a:round/>
+                      <a:headEnd type="none" w="med" len="med"/>
+                      <a:tailEnd type="none" w="med" len="med"/>
+                    </a:lnB>
+                    <a:solidFill>
+                      <a:srgbClr val="FFFFFF"/>
+                    </a:solidFill>
+                  </a:tcPr>
+                </a:tc>
+                <a:tc>
+                  <a:txBody>
+                    <a:bodyPr/>
+                    <a:lstStyle/>
+                    <a:p>
+                      <a:pPr algn="l" indent="0" marL="0">
+                        <a:buNone/>
+                      </a:pPr>
+                      <a:r>
+                        <a:rPr lang="en-US" sz="1000" dirty="0">
+                          <a:solidFill>
+                            <a:srgbClr val="262626"/>
+                          </a:solidFill>
+                          <a:latin typeface="Aptos" pitchFamily="34" charset="0"/>
+                          <a:ea typeface="Aptos" pitchFamily="34" charset="-122"/>
+                          <a:cs typeface="Aptos" pitchFamily="34" charset="-120"/>
+                        </a:rPr>
+                        <a:t>Kerala</a:t>
+                      </a:r>
+                      <a:endParaRPr lang="en-US" sz="1000" dirty="0">
+                        <a:latin typeface="Aptos" charset="0"/>
+                        <a:ea typeface="Aptos" charset="0"/>
+                        <a:cs typeface="Aptos" charset="0"/>
+                      </a:endParaRPr>
+                    </a:p>
+                  </a:txBody>
+                  <a:tcPr marL="63500" marR="63500" marT="25400" marB="25400" anchor="ctr">
+                    <a:lnL w="9525" cap="flat" cmpd="sng" algn="ctr">
+                      <a:solidFill>
+                        <a:srgbClr val="BDD7EE"/>
+                      </a:solidFill>
+                      <a:prstDash val="solid"/>
+                      <a:round/>
+                      <a:headEnd type="none" w="med" len="med"/>
+                      <a:tailEnd type="none" w="med" len="med"/>
+                    </a:lnL>
+                    <a:lnR w="9525" cap="flat" cmpd="sng" algn="ctr">
+                      <a:solidFill>
+                        <a:srgbClr val="BDD7EE"/>
+                      </a:solidFill>
+                      <a:prstDash val="solid"/>
+                      <a:round/>
+                      <a:headEnd type="none" w="med" len="med"/>
+                      <a:tailEnd type="none" w="med" len="med"/>
+                    </a:lnR>
+                    <a:lnT w="9525" cap="flat" cmpd="sng" algn="ctr">
+                      <a:solidFill>
+                        <a:srgbClr val="BDD7EE"/>
+                      </a:solidFill>
+                      <a:prstDash val="solid"/>
+                      <a:round/>
+                      <a:headEnd type="none" w="med" len="med"/>
+                      <a:tailEnd type="none" w="med" len="med"/>
+                    </a:lnT>
+                    <a:lnB w="9525" cap="flat" cmpd="sng" algn="ctr">
+                      <a:solidFill>
+                        <a:srgbClr val="BDD7EE"/>
+                      </a:solidFill>
+                      <a:prstDash val="solid"/>
+                      <a:round/>
+                      <a:headEnd type="none" w="med" len="med"/>
+                      <a:tailEnd type="none" w="med" len="med"/>
+                    </a:lnB>
+                    <a:solidFill>
+                      <a:srgbClr val="FFFFFF"/>
+                    </a:solidFill>
+                  </a:tcPr>
+                </a:tc>
+                <a:tc>
+                  <a:txBody>
+                    <a:bodyPr/>
+                    <a:lstStyle/>
+                    <a:p>
+                      <a:pPr algn="l" indent="0" marL="0">
+                        <a:buNone/>
+                      </a:pPr>
+                      <a:r>
+                        <a:rPr lang="en-US" sz="1000" dirty="0">
+                          <a:solidFill>
+                            <a:srgbClr val="262626"/>
+                          </a:solidFill>
+                          <a:latin typeface="Aptos" pitchFamily="34" charset="0"/>
+                          <a:ea typeface="Aptos" pitchFamily="34" charset="-122"/>
+                          <a:cs typeface="Aptos" pitchFamily="34" charset="-120"/>
+                        </a:rPr>
+                        <a:t>ANERT, KSRTC, Ashok Leyland, BPCL</a:t>
+                      </a:r>
+                      <a:endParaRPr lang="en-US" sz="1000" dirty="0">
+                        <a:latin typeface="Aptos" charset="0"/>
+                        <a:ea typeface="Aptos" charset="0"/>
+                        <a:cs typeface="Aptos" charset="0"/>
+                      </a:endParaRPr>
+                    </a:p>
+                  </a:txBody>
+                  <a:tcPr marL="63500" marR="63500" marT="25400" marB="25400" anchor="ctr">
+                    <a:lnL w="9525" cap="flat" cmpd="sng" algn="ctr">
+                      <a:solidFill>
+                        <a:srgbClr val="BDD7EE"/>
+                      </a:solidFill>
+                      <a:prstDash val="solid"/>
+                      <a:round/>
+                      <a:headEnd type="none" w="med" len="med"/>
+                      <a:tailEnd type="none" w="med" len="med"/>
+                    </a:lnL>
+                    <a:lnR w="9525" cap="flat" cmpd="sng" algn="ctr">
+                      <a:solidFill>
+                        <a:srgbClr val="BDD7EE"/>
+                      </a:solidFill>
+                      <a:prstDash val="solid"/>
+                      <a:round/>
+                      <a:headEnd type="none" w="med" len="med"/>
+                      <a:tailEnd type="none" w="med" len="med"/>
+                    </a:lnR>
+                    <a:lnT w="9525" cap="flat" cmpd="sng" algn="ctr">
+                      <a:solidFill>
+                        <a:srgbClr val="BDD7EE"/>
+                      </a:solidFill>
+                      <a:prstDash val="solid"/>
+                      <a:round/>
+                      <a:headEnd type="none" w="med" len="med"/>
+                      <a:tailEnd type="none" w="med" len="med"/>
+                    </a:lnT>
+                    <a:lnB w="9525" cap="flat" cmpd="sng" algn="ctr">
+                      <a:solidFill>
+                        <a:srgbClr val="BDD7EE"/>
+                      </a:solidFill>
+                      <a:prstDash val="solid"/>
+                      <a:round/>
+                      <a:headEnd type="none" w="med" len="med"/>
+                      <a:tailEnd type="none" w="med" len="med"/>
+                    </a:lnB>
+                    <a:solidFill>
+                      <a:srgbClr val="FFFFFF"/>
+                    </a:solidFill>
+                  </a:tcPr>
+                </a:tc>
+                <a:tc>
+                  <a:txBody>
+                    <a:bodyPr/>
+                    <a:lstStyle/>
+                    <a:p>
+                      <a:pPr algn="l" indent="0" marL="0">
+                        <a:buNone/>
+                      </a:pPr>
+                      <a:r>
+                        <a:rPr lang="en-US" sz="1000" dirty="0">
+                          <a:solidFill>
+                            <a:srgbClr val="262626"/>
+                          </a:solidFill>
+                          <a:latin typeface="Aptos" pitchFamily="34" charset="0"/>
+                          <a:ea typeface="Aptos" pitchFamily="34" charset="-122"/>
+                          <a:cs typeface="Aptos" pitchFamily="34" charset="-120"/>
+                        </a:rPr>
+                        <a:t>Shared with route 7</a:t>
+                      </a:r>
+                      <a:endParaRPr lang="en-US" sz="1000" dirty="0">
+                        <a:latin typeface="Aptos" charset="0"/>
+                        <a:ea typeface="Aptos" charset="0"/>
+                        <a:cs typeface="Aptos" charset="0"/>
+                      </a:endParaRPr>
+                    </a:p>
+                  </a:txBody>
+                  <a:tcPr marL="63500" marR="63500" marT="25400" marB="25400" anchor="ctr">
+                    <a:lnL w="9525" cap="flat" cmpd="sng" algn="ctr">
+                      <a:solidFill>
+                        <a:srgbClr val="BDD7EE"/>
+                      </a:solidFill>
+                      <a:prstDash val="solid"/>
+                      <a:round/>
+                      <a:headEnd type="none" w="med" len="med"/>
+                      <a:tailEnd type="none" w="med" len="med"/>
+                    </a:lnL>
+                    <a:lnR w="9525" cap="flat" cmpd="sng" algn="ctr">
+                      <a:solidFill>
+                        <a:srgbClr val="BDD7EE"/>
+                      </a:solidFill>
+                      <a:prstDash val="solid"/>
+                      <a:round/>
+                      <a:headEnd type="none" w="med" len="med"/>
+                      <a:tailEnd type="none" w="med" len="med"/>
+                    </a:lnR>
+                    <a:lnT w="9525" cap="flat" cmpd="sng" algn="ctr">
+                      <a:solidFill>
+                        <a:srgbClr val="BDD7EE"/>
+                      </a:solidFill>
+                      <a:prstDash val="solid"/>
+                      <a:round/>
+                      <a:headEnd type="none" w="med" len="med"/>
+                      <a:tailEnd type="none" w="med" len="med"/>
+                    </a:lnT>
+                    <a:lnB w="9525" cap="flat" cmpd="sng" algn="ctr">
+                      <a:solidFill>
+                        <a:srgbClr val="BDD7EE"/>
+                      </a:solidFill>
+                      <a:prstDash val="solid"/>
+                      <a:round/>
+                      <a:headEnd type="none" w="med" len="med"/>
+                      <a:tailEnd type="none" w="med" len="med"/>
+                    </a:lnB>
+                    <a:solidFill>
+                      <a:srgbClr val="FFFFFF"/>
+                    </a:solidFill>
+                  </a:tcPr>
+                </a:tc>
+                <a:tc>
+                  <a:txBody>
+                    <a:bodyPr/>
+                    <a:lstStyle/>
+                    <a:p>
+                      <a:pPr algn="l" indent="0" marL="0">
+                        <a:buNone/>
+                      </a:pPr>
+                      <a:r>
+                        <a:rPr lang="en-US" sz="1000" dirty="0">
+                          <a:solidFill>
+                            <a:srgbClr val="262626"/>
+                          </a:solidFill>
+                          <a:latin typeface="Aptos" pitchFamily="34" charset="0"/>
+                          <a:ea typeface="Aptos" pitchFamily="34" charset="-122"/>
+                          <a:cs typeface="Aptos" pitchFamily="34" charset="-120"/>
+                        </a:rPr>
+                        <a:t>HRS Udyogamandal, 260 kg/d</a:t>
+                      </a:r>
+                      <a:endParaRPr lang="en-US" sz="1000" dirty="0">
+                        <a:latin typeface="Aptos" charset="0"/>
+                        <a:ea typeface="Aptos" charset="0"/>
+                        <a:cs typeface="Aptos" charset="0"/>
+                      </a:endParaRPr>
+                    </a:p>
+                  </a:txBody>
+                  <a:tcPr marL="63500" marR="63500" marT="25400" marB="25400" anchor="ctr">
+                    <a:lnL w="9525" cap="flat" cmpd="sng" algn="ctr">
+                      <a:solidFill>
+                        <a:srgbClr val="BDD7EE"/>
+                      </a:solidFill>
+                      <a:prstDash val="solid"/>
+                      <a:round/>
+                      <a:headEnd type="none" w="med" len="med"/>
+                      <a:tailEnd type="none" w="med" len="med"/>
+                    </a:lnL>
+                    <a:lnR w="9525" cap="flat" cmpd="sng" algn="ctr">
+                      <a:solidFill>
+                        <a:srgbClr val="BDD7EE"/>
+                      </a:solidFill>
+                      <a:prstDash val="solid"/>
+                      <a:round/>
+                      <a:headEnd type="none" w="med" len="med"/>
+                      <a:tailEnd type="none" w="med" len="med"/>
+                    </a:lnR>
+                    <a:lnT w="9525" cap="flat" cmpd="sng" algn="ctr">
+                      <a:solidFill>
+                        <a:srgbClr val="BDD7EE"/>
+                      </a:solidFill>
+                      <a:prstDash val="solid"/>
+                      <a:round/>
+                      <a:headEnd type="none" w="med" len="med"/>
+                      <a:tailEnd type="none" w="med" len="med"/>
+                    </a:lnT>
+                    <a:lnB w="9525" cap="flat" cmpd="sng" algn="ctr">
+                      <a:solidFill>
+                        <a:srgbClr val="BDD7EE"/>
+                      </a:solidFill>
+                      <a:prstDash val="solid"/>
+                      <a:round/>
+                      <a:headEnd type="none" w="med" len="med"/>
+                      <a:tailEnd type="none" w="med" len="med"/>
+                    </a:lnB>
+                    <a:solidFill>
+                      <a:srgbClr val="FFFFFF"/>
+                    </a:solidFill>
+                  </a:tcPr>
+                </a:tc>
+              </a:tr>
+              <a:tr h="292608">
+                <a:tc>
+                  <a:txBody>
+                    <a:bodyPr/>
+                    <a:lstStyle/>
+                    <a:p>
+                      <a:pPr algn="ctr" indent="0" marL="0">
+                        <a:buNone/>
+                      </a:pPr>
+                      <a:r>
+                        <a:rPr lang="en-US" sz="1000" b="1" dirty="0">
+                          <a:solidFill>
+                            <a:srgbClr val="262626"/>
+                          </a:solidFill>
+                          <a:latin typeface="Aptos" pitchFamily="34" charset="0"/>
+                          <a:ea typeface="Aptos" pitchFamily="34" charset="-122"/>
+                          <a:cs typeface="Aptos" pitchFamily="34" charset="-120"/>
+                        </a:rPr>
+                        <a:t>9</a:t>
+                      </a:r>
+                      <a:endParaRPr lang="en-US" sz="1000" dirty="0">
+                        <a:latin typeface="Aptos" charset="0"/>
+                        <a:ea typeface="Aptos" charset="0"/>
+                        <a:cs typeface="Aptos" charset="0"/>
+                      </a:endParaRPr>
+                    </a:p>
+                  </a:txBody>
+                  <a:tcPr marL="63500" marR="63500" marT="25400" marB="25400" anchor="ctr">
+                    <a:lnL w="9525" cap="flat" cmpd="sng" algn="ctr">
+                      <a:solidFill>
+                        <a:srgbClr val="BDD7EE"/>
+                      </a:solidFill>
+                      <a:prstDash val="solid"/>
+                      <a:round/>
+                      <a:headEnd type="none" w="med" len="med"/>
+                      <a:tailEnd type="none" w="med" len="med"/>
+                    </a:lnL>
+                    <a:lnR w="9525" cap="flat" cmpd="sng" algn="ctr">
+                      <a:solidFill>
+                        <a:srgbClr val="BDD7EE"/>
+                      </a:solidFill>
+                      <a:prstDash val="solid"/>
+                      <a:round/>
+                      <a:headEnd type="none" w="med" len="med"/>
+                      <a:tailEnd type="none" w="med" len="med"/>
+                    </a:lnR>
+                    <a:lnT w="9525" cap="flat" cmpd="sng" algn="ctr">
+                      <a:solidFill>
+                        <a:srgbClr val="BDD7EE"/>
+                      </a:solidFill>
+                      <a:prstDash val="solid"/>
+                      <a:round/>
+                      <a:headEnd type="none" w="med" len="med"/>
+                      <a:tailEnd type="none" w="med" len="med"/>
+                    </a:lnT>
+                    <a:lnB w="9525" cap="flat" cmpd="sng" algn="ctr">
+                      <a:solidFill>
+                        <a:srgbClr val="BDD7EE"/>
+                      </a:solidFill>
+                      <a:prstDash val="solid"/>
+                      <a:round/>
+                      <a:headEnd type="none" w="med" len="med"/>
+                      <a:tailEnd type="none" w="med" len="med"/>
+                    </a:lnB>
+                    <a:solidFill>
+                      <a:srgbClr val="EEF4FB"/>
+                    </a:solidFill>
+                  </a:tcPr>
+                </a:tc>
+                <a:tc>
+                  <a:txBody>
+                    <a:bodyPr/>
+                    <a:lstStyle/>
+                    <a:p>
+                      <a:pPr algn="l" indent="0" marL="0">
+                        <a:buNone/>
+                      </a:pPr>
+                      <a:r>
+                        <a:rPr lang="en-US" sz="1000" dirty="0">
+                          <a:solidFill>
+                            <a:srgbClr val="262626"/>
+                          </a:solidFill>
+                          <a:latin typeface="Aptos" pitchFamily="34" charset="0"/>
+                          <a:ea typeface="Aptos" pitchFamily="34" charset="-122"/>
+                          <a:cs typeface="Aptos" pitchFamily="34" charset="-120"/>
+                        </a:rPr>
+                        <a:t>Jamnagar – Ahmedabad</a:t>
+                      </a:r>
+                      <a:endParaRPr lang="en-US" sz="1000" dirty="0">
+                        <a:latin typeface="Aptos" charset="0"/>
+                        <a:ea typeface="Aptos" charset="0"/>
+                        <a:cs typeface="Aptos" charset="0"/>
+                      </a:endParaRPr>
+                    </a:p>
+                  </a:txBody>
+                  <a:tcPr marL="63500" marR="63500" marT="25400" marB="25400" anchor="ctr">
+                    <a:lnL w="9525" cap="flat" cmpd="sng" algn="ctr">
+                      <a:solidFill>
+                        <a:srgbClr val="BDD7EE"/>
+                      </a:solidFill>
+                      <a:prstDash val="solid"/>
+                      <a:round/>
+                      <a:headEnd type="none" w="med" len="med"/>
+                      <a:tailEnd type="none" w="med" len="med"/>
+                    </a:lnL>
+                    <a:lnR w="9525" cap="flat" cmpd="sng" algn="ctr">
+                      <a:solidFill>
+                        <a:srgbClr val="BDD7EE"/>
+                      </a:solidFill>
+                      <a:prstDash val="solid"/>
+                      <a:round/>
+                      <a:headEnd type="none" w="med" len="med"/>
+                      <a:tailEnd type="none" w="med" len="med"/>
+                    </a:lnR>
+                    <a:lnT w="9525" cap="flat" cmpd="sng" algn="ctr">
+                      <a:solidFill>
+                        <a:srgbClr val="BDD7EE"/>
+                      </a:solidFill>
+                      <a:prstDash val="solid"/>
+                      <a:round/>
+                      <a:headEnd type="none" w="med" len="med"/>
+                      <a:tailEnd type="none" w="med" len="med"/>
+                    </a:lnT>
+                    <a:lnB w="9525" cap="flat" cmpd="sng" algn="ctr">
+                      <a:solidFill>
+                        <a:srgbClr val="BDD7EE"/>
+                      </a:solidFill>
+                      <a:prstDash val="solid"/>
+                      <a:round/>
+                      <a:headEnd type="none" w="med" len="med"/>
+                      <a:tailEnd type="none" w="med" len="med"/>
+                    </a:lnB>
+                    <a:solidFill>
+                      <a:srgbClr val="EEF4FB"/>
+                    </a:solidFill>
+                  </a:tcPr>
+                </a:tc>
+                <a:tc>
+                  <a:txBody>
+                    <a:bodyPr/>
+                    <a:lstStyle/>
+                    <a:p>
+                      <a:pPr algn="l" indent="0" marL="0">
+                        <a:buNone/>
+                      </a:pPr>
+                      <a:r>
+                        <a:rPr lang="en-US" sz="1000" dirty="0">
+                          <a:solidFill>
+                            <a:srgbClr val="262626"/>
+                          </a:solidFill>
+                          <a:latin typeface="Aptos" pitchFamily="34" charset="0"/>
+                          <a:ea typeface="Aptos" pitchFamily="34" charset="-122"/>
+                          <a:cs typeface="Aptos" pitchFamily="34" charset="-120"/>
+                        </a:rPr>
+                        <a:t>Gujarat</a:t>
+                      </a:r>
+                      <a:endParaRPr lang="en-US" sz="1000" dirty="0">
+                        <a:latin typeface="Aptos" charset="0"/>
+                        <a:ea typeface="Aptos" charset="0"/>
+                        <a:cs typeface="Aptos" charset="0"/>
+                      </a:endParaRPr>
+                    </a:p>
+                  </a:txBody>
+                  <a:tcPr marL="63500" marR="63500" marT="25400" marB="25400" anchor="ctr">
+                    <a:lnL w="9525" cap="flat" cmpd="sng" algn="ctr">
+                      <a:solidFill>
+                        <a:srgbClr val="BDD7EE"/>
+                      </a:solidFill>
+                      <a:prstDash val="solid"/>
+                      <a:round/>
+                      <a:headEnd type="none" w="med" len="med"/>
+                      <a:tailEnd type="none" w="med" len="med"/>
+                    </a:lnL>
+                    <a:lnR w="9525" cap="flat" cmpd="sng" algn="ctr">
+                      <a:solidFill>
+                        <a:srgbClr val="BDD7EE"/>
+                      </a:solidFill>
+                      <a:prstDash val="solid"/>
+                      <a:round/>
+                      <a:headEnd type="none" w="med" len="med"/>
+                      <a:tailEnd type="none" w="med" len="med"/>
+                    </a:lnR>
+                    <a:lnT w="9525" cap="flat" cmpd="sng" algn="ctr">
+                      <a:solidFill>
+                        <a:srgbClr val="BDD7EE"/>
+                      </a:solidFill>
+                      <a:prstDash val="solid"/>
+                      <a:round/>
+                      <a:headEnd type="none" w="med" len="med"/>
+                      <a:tailEnd type="none" w="med" len="med"/>
+                    </a:lnT>
+                    <a:lnB w="9525" cap="flat" cmpd="sng" algn="ctr">
+                      <a:solidFill>
+                        <a:srgbClr val="BDD7EE"/>
+                      </a:solidFill>
+                      <a:prstDash val="solid"/>
+                      <a:round/>
+                      <a:headEnd type="none" w="med" len="med"/>
+                      <a:tailEnd type="none" w="med" len="med"/>
+                    </a:lnB>
+                    <a:solidFill>
+                      <a:srgbClr val="EEF4FB"/>
+                    </a:solidFill>
+                  </a:tcPr>
+                </a:tc>
+                <a:tc>
+                  <a:txBody>
+                    <a:bodyPr/>
+                    <a:lstStyle/>
+                    <a:p>
+                      <a:pPr algn="l" indent="0" marL="0">
+                        <a:buNone/>
+                      </a:pPr>
+                      <a:r>
+                        <a:rPr lang="en-US" sz="1000" dirty="0">
+                          <a:solidFill>
+                            <a:srgbClr val="262626"/>
+                          </a:solidFill>
+                          <a:latin typeface="Aptos" pitchFamily="34" charset="0"/>
+                          <a:ea typeface="Aptos" pitchFamily="34" charset="-122"/>
+                          <a:cs typeface="Aptos" pitchFamily="34" charset="-120"/>
+                        </a:rPr>
+                        <a:t>Reliance* (+ Ashok Leyland)</a:t>
+                      </a:r>
+                      <a:endParaRPr lang="en-US" sz="1000" dirty="0">
+                        <a:latin typeface="Aptos" charset="0"/>
+                        <a:ea typeface="Aptos" charset="0"/>
+                        <a:cs typeface="Aptos" charset="0"/>
+                      </a:endParaRPr>
+                    </a:p>
+                  </a:txBody>
+                  <a:tcPr marL="63500" marR="63500" marT="25400" marB="25400" anchor="ctr">
+                    <a:lnL w="9525" cap="flat" cmpd="sng" algn="ctr">
+                      <a:solidFill>
+                        <a:srgbClr val="BDD7EE"/>
+                      </a:solidFill>
+                      <a:prstDash val="solid"/>
+                      <a:round/>
+                      <a:headEnd type="none" w="med" len="med"/>
+                      <a:tailEnd type="none" w="med" len="med"/>
+                    </a:lnL>
+                    <a:lnR w="9525" cap="flat" cmpd="sng" algn="ctr">
+                      <a:solidFill>
+                        <a:srgbClr val="BDD7EE"/>
+                      </a:solidFill>
+                      <a:prstDash val="solid"/>
+                      <a:round/>
+                      <a:headEnd type="none" w="med" len="med"/>
+                      <a:tailEnd type="none" w="med" len="med"/>
+                    </a:lnR>
+                    <a:lnT w="9525" cap="flat" cmpd="sng" algn="ctr">
+                      <a:solidFill>
+                        <a:srgbClr val="BDD7EE"/>
+                      </a:solidFill>
+                      <a:prstDash val="solid"/>
+                      <a:round/>
+                      <a:headEnd type="none" w="med" len="med"/>
+                      <a:tailEnd type="none" w="med" len="med"/>
+                    </a:lnT>
+                    <a:lnB w="9525" cap="flat" cmpd="sng" algn="ctr">
+                      <a:solidFill>
+                        <a:srgbClr val="BDD7EE"/>
+                      </a:solidFill>
+                      <a:prstDash val="solid"/>
+                      <a:round/>
+                      <a:headEnd type="none" w="med" len="med"/>
+                      <a:tailEnd type="none" w="med" len="med"/>
+                    </a:lnB>
+                    <a:solidFill>
+                      <a:srgbClr val="EEF4FB"/>
+                    </a:solidFill>
+                  </a:tcPr>
+                </a:tc>
+                <a:tc>
+                  <a:txBody>
+                    <a:bodyPr/>
+                    <a:lstStyle/>
+                    <a:p>
+                      <a:pPr algn="l" indent="0" marL="0">
+                        <a:buNone/>
+                      </a:pPr>
+                      <a:r>
+                        <a:rPr lang="en-US" sz="1000" dirty="0">
+                          <a:solidFill>
+                            <a:srgbClr val="262626"/>
+                          </a:solidFill>
+                          <a:latin typeface="Aptos" pitchFamily="34" charset="0"/>
+                          <a:ea typeface="Aptos" pitchFamily="34" charset="-122"/>
+                          <a:cs typeface="Aptos" pitchFamily="34" charset="-120"/>
+                        </a:rPr>
+                        <a:t>H₂ trucks</a:t>
+                      </a:r>
+                      <a:endParaRPr lang="en-US" sz="1000" dirty="0">
+                        <a:latin typeface="Aptos" charset="0"/>
+                        <a:ea typeface="Aptos" charset="0"/>
+                        <a:cs typeface="Aptos" charset="0"/>
+                      </a:endParaRPr>
+                    </a:p>
+                  </a:txBody>
+                  <a:tcPr marL="63500" marR="63500" marT="25400" marB="25400" anchor="ctr">
+                    <a:lnL w="9525" cap="flat" cmpd="sng" algn="ctr">
+                      <a:solidFill>
+                        <a:srgbClr val="BDD7EE"/>
+                      </a:solidFill>
+                      <a:prstDash val="solid"/>
+                      <a:round/>
+                      <a:headEnd type="none" w="med" len="med"/>
+                      <a:tailEnd type="none" w="med" len="med"/>
+                    </a:lnL>
+                    <a:lnR w="9525" cap="flat" cmpd="sng" algn="ctr">
+                      <a:solidFill>
+                        <a:srgbClr val="BDD7EE"/>
+                      </a:solidFill>
+                      <a:prstDash val="solid"/>
+                      <a:round/>
+                      <a:headEnd type="none" w="med" len="med"/>
+                      <a:tailEnd type="none" w="med" len="med"/>
+                    </a:lnR>
+                    <a:lnT w="9525" cap="flat" cmpd="sng" algn="ctr">
+                      <a:solidFill>
+                        <a:srgbClr val="BDD7EE"/>
+                      </a:solidFill>
+                      <a:prstDash val="solid"/>
+                      <a:round/>
+                      <a:headEnd type="none" w="med" len="med"/>
+                      <a:tailEnd type="none" w="med" len="med"/>
+                    </a:lnT>
+                    <a:lnB w="9525" cap="flat" cmpd="sng" algn="ctr">
+                      <a:solidFill>
+                        <a:srgbClr val="BDD7EE"/>
+                      </a:solidFill>
+                      <a:prstDash val="solid"/>
+                      <a:round/>
+                      <a:headEnd type="none" w="med" len="med"/>
+                      <a:tailEnd type="none" w="med" len="med"/>
+                    </a:lnB>
+                    <a:solidFill>
+                      <a:srgbClr val="EEF4FB"/>
+                    </a:solidFill>
+                  </a:tcPr>
+                </a:tc>
+                <a:tc>
+                  <a:txBody>
+                    <a:bodyPr/>
+                    <a:lstStyle/>
+                    <a:p>
+                      <a:pPr algn="l" indent="0" marL="0">
+                        <a:buNone/>
+                      </a:pPr>
+                      <a:r>
+                        <a:rPr lang="en-US" sz="1000" dirty="0">
+                          <a:solidFill>
+                            <a:srgbClr val="262626"/>
+                          </a:solidFill>
+                          <a:latin typeface="Aptos" pitchFamily="34" charset="0"/>
+                          <a:ea typeface="Aptos" pitchFamily="34" charset="-122"/>
+                          <a:cs typeface="Aptos" pitchFamily="34" charset="-120"/>
+                        </a:rPr>
+                        <a:t>From Jamnagar complex</a:t>
+                      </a:r>
+                      <a:endParaRPr lang="en-US" sz="1000" dirty="0">
+                        <a:latin typeface="Aptos" charset="0"/>
+                        <a:ea typeface="Aptos" charset="0"/>
+                        <a:cs typeface="Aptos" charset="0"/>
+                      </a:endParaRPr>
+                    </a:p>
+                  </a:txBody>
+                  <a:tcPr marL="63500" marR="63500" marT="25400" marB="25400" anchor="ctr">
+                    <a:lnL w="9525" cap="flat" cmpd="sng" algn="ctr">
+                      <a:solidFill>
+                        <a:srgbClr val="BDD7EE"/>
+                      </a:solidFill>
+                      <a:prstDash val="solid"/>
+                      <a:round/>
+                      <a:headEnd type="none" w="med" len="med"/>
+                      <a:tailEnd type="none" w="med" len="med"/>
+                    </a:lnL>
+                    <a:lnR w="9525" cap="flat" cmpd="sng" algn="ctr">
+                      <a:solidFill>
+                        <a:srgbClr val="BDD7EE"/>
+                      </a:solidFill>
+                      <a:prstDash val="solid"/>
+                      <a:round/>
+                      <a:headEnd type="none" w="med" len="med"/>
+                      <a:tailEnd type="none" w="med" len="med"/>
+                    </a:lnR>
+                    <a:lnT w="9525" cap="flat" cmpd="sng" algn="ctr">
+                      <a:solidFill>
+                        <a:srgbClr val="BDD7EE"/>
+                      </a:solidFill>
+                      <a:prstDash val="solid"/>
+                      <a:round/>
+                      <a:headEnd type="none" w="med" len="med"/>
+                      <a:tailEnd type="none" w="med" len="med"/>
+                    </a:lnT>
+                    <a:lnB w="9525" cap="flat" cmpd="sng" algn="ctr">
+                      <a:solidFill>
+                        <a:srgbClr val="BDD7EE"/>
+                      </a:solidFill>
+                      <a:prstDash val="solid"/>
+                      <a:round/>
+                      <a:headEnd type="none" w="med" len="med"/>
+                      <a:tailEnd type="none" w="med" len="med"/>
+                    </a:lnB>
+                    <a:solidFill>
+                      <a:srgbClr val="EEF4FB"/>
+                    </a:solidFill>
+                  </a:tcPr>
+                </a:tc>
+              </a:tr>
+              <a:tr h="292608">
+                <a:tc>
+                  <a:txBody>
+                    <a:bodyPr/>
+                    <a:lstStyle/>
+                    <a:p>
+                      <a:pPr algn="ctr" indent="0" marL="0">
+                        <a:buNone/>
+                      </a:pPr>
+                      <a:r>
+                        <a:rPr lang="en-US" sz="1000" b="1" dirty="0">
+                          <a:solidFill>
+                            <a:srgbClr val="262626"/>
+                          </a:solidFill>
+                          <a:latin typeface="Aptos" pitchFamily="34" charset="0"/>
+                          <a:ea typeface="Aptos" pitchFamily="34" charset="-122"/>
+                          <a:cs typeface="Aptos" pitchFamily="34" charset="-120"/>
+                        </a:rPr>
+                        <a:t>10</a:t>
+                      </a:r>
+                      <a:endParaRPr lang="en-US" sz="1000" dirty="0">
+                        <a:latin typeface="Aptos" charset="0"/>
+                        <a:ea typeface="Aptos" charset="0"/>
+                        <a:cs typeface="Aptos" charset="0"/>
+                      </a:endParaRPr>
+                    </a:p>
+                  </a:txBody>
+                  <a:tcPr marL="63500" marR="63500" marT="25400" marB="25400" anchor="ctr">
+                    <a:lnL w="9525" cap="flat" cmpd="sng" algn="ctr">
+                      <a:solidFill>
+                        <a:srgbClr val="BDD7EE"/>
+                      </a:solidFill>
+                      <a:prstDash val="solid"/>
+                      <a:round/>
+                      <a:headEnd type="none" w="med" len="med"/>
+                      <a:tailEnd type="none" w="med" len="med"/>
+                    </a:lnL>
+                    <a:lnR w="9525" cap="flat" cmpd="sng" algn="ctr">
+                      <a:solidFill>
+                        <a:srgbClr val="BDD7EE"/>
+                      </a:solidFill>
+                      <a:prstDash val="solid"/>
+                      <a:round/>
+                      <a:headEnd type="none" w="med" len="med"/>
+                      <a:tailEnd type="none" w="med" len="med"/>
+                    </a:lnR>
+                    <a:lnT w="9525" cap="flat" cmpd="sng" algn="ctr">
+                      <a:solidFill>
+                        <a:srgbClr val="BDD7EE"/>
+                      </a:solidFill>
+                      <a:prstDash val="solid"/>
+                      <a:round/>
+                      <a:headEnd type="none" w="med" len="med"/>
+                      <a:tailEnd type="none" w="med" len="med"/>
+                    </a:lnT>
+                    <a:lnB w="9525" cap="flat" cmpd="sng" algn="ctr">
+                      <a:solidFill>
+                        <a:srgbClr val="BDD7EE"/>
+                      </a:solidFill>
+                      <a:prstDash val="solid"/>
+                      <a:round/>
+                      <a:headEnd type="none" w="med" len="med"/>
+                      <a:tailEnd type="none" w="med" len="med"/>
+                    </a:lnB>
+                    <a:solidFill>
+                      <a:srgbClr val="FFFFFF"/>
+                    </a:solidFill>
+                  </a:tcPr>
+                </a:tc>
+                <a:tc>
+                  <a:txBody>
+                    <a:bodyPr/>
+                    <a:lstStyle/>
+                    <a:p>
+                      <a:pPr algn="l" indent="0" marL="0">
+                        <a:buNone/>
+                      </a:pPr>
+                      <a:r>
+                        <a:rPr lang="en-US" sz="1000" dirty="0">
+                          <a:solidFill>
+                            <a:srgbClr val="262626"/>
+                          </a:solidFill>
+                          <a:latin typeface="Aptos" pitchFamily="34" charset="0"/>
+                          <a:ea typeface="Aptos" pitchFamily="34" charset="-122"/>
+                          <a:cs typeface="Aptos" pitchFamily="34" charset="-120"/>
+                        </a:rPr>
+                        <a:t>NH-16 Visakhapatnam – Bayyavaram</a:t>
+                      </a:r>
+                      <a:endParaRPr lang="en-US" sz="1000" dirty="0">
+                        <a:latin typeface="Aptos" charset="0"/>
+                        <a:ea typeface="Aptos" charset="0"/>
+                        <a:cs typeface="Aptos" charset="0"/>
+                      </a:endParaRPr>
+                    </a:p>
+                  </a:txBody>
+                  <a:tcPr marL="63500" marR="63500" marT="25400" marB="25400" anchor="ctr">
+                    <a:lnL w="9525" cap="flat" cmpd="sng" algn="ctr">
+                      <a:solidFill>
+                        <a:srgbClr val="BDD7EE"/>
+                      </a:solidFill>
+                      <a:prstDash val="solid"/>
+                      <a:round/>
+                      <a:headEnd type="none" w="med" len="med"/>
+                      <a:tailEnd type="none" w="med" len="med"/>
+                    </a:lnL>
+                    <a:lnR w="9525" cap="flat" cmpd="sng" algn="ctr">
+                      <a:solidFill>
+                        <a:srgbClr val="BDD7EE"/>
+                      </a:solidFill>
+                      <a:prstDash val="solid"/>
+                      <a:round/>
+                      <a:headEnd type="none" w="med" len="med"/>
+                      <a:tailEnd type="none" w="med" len="med"/>
+                    </a:lnR>
+                    <a:lnT w="9525" cap="flat" cmpd="sng" algn="ctr">
+                      <a:solidFill>
+                        <a:srgbClr val="BDD7EE"/>
+                      </a:solidFill>
+                      <a:prstDash val="solid"/>
+                      <a:round/>
+                      <a:headEnd type="none" w="med" len="med"/>
+                      <a:tailEnd type="none" w="med" len="med"/>
+                    </a:lnT>
+                    <a:lnB w="9525" cap="flat" cmpd="sng" algn="ctr">
+                      <a:solidFill>
+                        <a:srgbClr val="BDD7EE"/>
+                      </a:solidFill>
+                      <a:prstDash val="solid"/>
+                      <a:round/>
+                      <a:headEnd type="none" w="med" len="med"/>
+                      <a:tailEnd type="none" w="med" len="med"/>
+                    </a:lnB>
+                    <a:solidFill>
+                      <a:srgbClr val="FFFFFF"/>
+                    </a:solidFill>
+                  </a:tcPr>
+                </a:tc>
+                <a:tc>
+                  <a:txBody>
+                    <a:bodyPr/>
+                    <a:lstStyle/>
+                    <a:p>
+                      <a:pPr algn="l" indent="0" marL="0">
+                        <a:buNone/>
+                      </a:pPr>
+                      <a:r>
+                        <a:rPr lang="en-US" sz="1000" dirty="0">
+                          <a:solidFill>
+                            <a:srgbClr val="262626"/>
+                          </a:solidFill>
+                          <a:latin typeface="Aptos" pitchFamily="34" charset="0"/>
+                          <a:ea typeface="Aptos" pitchFamily="34" charset="-122"/>
+                          <a:cs typeface="Aptos" pitchFamily="34" charset="-120"/>
+                        </a:rPr>
+                        <a:t>Andhra Pradesh</a:t>
+                      </a:r>
+                      <a:endParaRPr lang="en-US" sz="1000" dirty="0">
+                        <a:latin typeface="Aptos" charset="0"/>
+                        <a:ea typeface="Aptos" charset="0"/>
+                        <a:cs typeface="Aptos" charset="0"/>
+                      </a:endParaRPr>
+                    </a:p>
+                  </a:txBody>
+                  <a:tcPr marL="63500" marR="63500" marT="25400" marB="25400" anchor="ctr">
+                    <a:lnL w="9525" cap="flat" cmpd="sng" algn="ctr">
+                      <a:solidFill>
+                        <a:srgbClr val="BDD7EE"/>
+                      </a:solidFill>
+                      <a:prstDash val="solid"/>
+                      <a:round/>
+                      <a:headEnd type="none" w="med" len="med"/>
+                      <a:tailEnd type="none" w="med" len="med"/>
+                    </a:lnL>
+                    <a:lnR w="9525" cap="flat" cmpd="sng" algn="ctr">
+                      <a:solidFill>
+                        <a:srgbClr val="BDD7EE"/>
+                      </a:solidFill>
+                      <a:prstDash val="solid"/>
+                      <a:round/>
+                      <a:headEnd type="none" w="med" len="med"/>
+                      <a:tailEnd type="none" w="med" len="med"/>
+                    </a:lnR>
+                    <a:lnT w="9525" cap="flat" cmpd="sng" algn="ctr">
+                      <a:solidFill>
+                        <a:srgbClr val="BDD7EE"/>
+                      </a:solidFill>
+                      <a:prstDash val="solid"/>
+                      <a:round/>
+                      <a:headEnd type="none" w="med" len="med"/>
+                      <a:tailEnd type="none" w="med" len="med"/>
+                    </a:lnT>
+                    <a:lnB w="9525" cap="flat" cmpd="sng" algn="ctr">
+                      <a:solidFill>
+                        <a:srgbClr val="BDD7EE"/>
+                      </a:solidFill>
+                      <a:prstDash val="solid"/>
+                      <a:round/>
+                      <a:headEnd type="none" w="med" len="med"/>
+                      <a:tailEnd type="none" w="med" len="med"/>
+                    </a:lnB>
+                    <a:solidFill>
+                      <a:srgbClr val="FFFFFF"/>
+                    </a:solidFill>
+                  </a:tcPr>
+                </a:tc>
+                <a:tc>
+                  <a:txBody>
+                    <a:bodyPr/>
+                    <a:lstStyle/>
+                    <a:p>
+                      <a:pPr algn="l" indent="0" marL="0">
+                        <a:buNone/>
+                      </a:pPr>
+                      <a:r>
+                        <a:rPr lang="en-US" sz="1000" dirty="0">
+                          <a:solidFill>
+                            <a:srgbClr val="262626"/>
+                          </a:solidFill>
+                          <a:latin typeface="Aptos" pitchFamily="34" charset="0"/>
+                          <a:ea typeface="Aptos" pitchFamily="34" charset="-122"/>
+                          <a:cs typeface="Aptos" pitchFamily="34" charset="-120"/>
+                        </a:rPr>
+                        <a:t>Not disclosed (HPCL*)</a:t>
+                      </a:r>
+                      <a:endParaRPr lang="en-US" sz="1000" dirty="0">
+                        <a:latin typeface="Aptos" charset="0"/>
+                        <a:ea typeface="Aptos" charset="0"/>
+                        <a:cs typeface="Aptos" charset="0"/>
+                      </a:endParaRPr>
+                    </a:p>
+                  </a:txBody>
+                  <a:tcPr marL="63500" marR="63500" marT="25400" marB="25400" anchor="ctr">
+                    <a:lnL w="9525" cap="flat" cmpd="sng" algn="ctr">
+                      <a:solidFill>
+                        <a:srgbClr val="BDD7EE"/>
+                      </a:solidFill>
+                      <a:prstDash val="solid"/>
+                      <a:round/>
+                      <a:headEnd type="none" w="med" len="med"/>
+                      <a:tailEnd type="none" w="med" len="med"/>
+                    </a:lnL>
+                    <a:lnR w="9525" cap="flat" cmpd="sng" algn="ctr">
+                      <a:solidFill>
+                        <a:srgbClr val="BDD7EE"/>
+                      </a:solidFill>
+                      <a:prstDash val="solid"/>
+                      <a:round/>
+                      <a:headEnd type="none" w="med" len="med"/>
+                      <a:tailEnd type="none" w="med" len="med"/>
+                    </a:lnR>
+                    <a:lnT w="9525" cap="flat" cmpd="sng" algn="ctr">
+                      <a:solidFill>
+                        <a:srgbClr val="BDD7EE"/>
+                      </a:solidFill>
+                      <a:prstDash val="solid"/>
+                      <a:round/>
+                      <a:headEnd type="none" w="med" len="med"/>
+                      <a:tailEnd type="none" w="med" len="med"/>
+                    </a:lnT>
+                    <a:lnB w="9525" cap="flat" cmpd="sng" algn="ctr">
+                      <a:solidFill>
+                        <a:srgbClr val="BDD7EE"/>
+                      </a:solidFill>
+                      <a:prstDash val="solid"/>
+                      <a:round/>
+                      <a:headEnd type="none" w="med" len="med"/>
+                      <a:tailEnd type="none" w="med" len="med"/>
+                    </a:lnB>
+                    <a:solidFill>
+                      <a:srgbClr val="FFFFFF"/>
+                    </a:solidFill>
+                  </a:tcPr>
+                </a:tc>
+                <a:tc>
+                  <a:txBody>
+                    <a:bodyPr/>
+                    <a:lstStyle/>
+                    <a:p>
+                      <a:pPr algn="l" indent="0" marL="0">
+                        <a:buNone/>
+                      </a:pPr>
+                      <a:r>
+                        <a:rPr lang="en-US" sz="1000" dirty="0">
+                          <a:solidFill>
+                            <a:srgbClr val="262626"/>
+                          </a:solidFill>
+                          <a:latin typeface="Aptos" pitchFamily="34" charset="0"/>
+                          <a:ea typeface="Aptos" pitchFamily="34" charset="-122"/>
+                          <a:cs typeface="Aptos" pitchFamily="34" charset="-120"/>
+                        </a:rPr>
+                        <a:t>Not disclosed</a:t>
+                      </a:r>
+                      <a:endParaRPr lang="en-US" sz="1000" dirty="0">
+                        <a:latin typeface="Aptos" charset="0"/>
+                        <a:ea typeface="Aptos" charset="0"/>
+                        <a:cs typeface="Aptos" charset="0"/>
+                      </a:endParaRPr>
+                    </a:p>
+                  </a:txBody>
+                  <a:tcPr marL="63500" marR="63500" marT="25400" marB="25400" anchor="ctr">
+                    <a:lnL w="9525" cap="flat" cmpd="sng" algn="ctr">
+                      <a:solidFill>
+                        <a:srgbClr val="BDD7EE"/>
+                      </a:solidFill>
+                      <a:prstDash val="solid"/>
+                      <a:round/>
+                      <a:headEnd type="none" w="med" len="med"/>
+                      <a:tailEnd type="none" w="med" len="med"/>
+                    </a:lnL>
+                    <a:lnR w="9525" cap="flat" cmpd="sng" algn="ctr">
+                      <a:solidFill>
+                        <a:srgbClr val="BDD7EE"/>
+                      </a:solidFill>
+                      <a:prstDash val="solid"/>
+                      <a:round/>
+                      <a:headEnd type="none" w="med" len="med"/>
+                      <a:tailEnd type="none" w="med" len="med"/>
+                    </a:lnR>
+                    <a:lnT w="9525" cap="flat" cmpd="sng" algn="ctr">
+                      <a:solidFill>
+                        <a:srgbClr val="BDD7EE"/>
+                      </a:solidFill>
+                      <a:prstDash val="solid"/>
+                      <a:round/>
+                      <a:headEnd type="none" w="med" len="med"/>
+                      <a:tailEnd type="none" w="med" len="med"/>
+                    </a:lnT>
+                    <a:lnB w="9525" cap="flat" cmpd="sng" algn="ctr">
+                      <a:solidFill>
+                        <a:srgbClr val="BDD7EE"/>
+                      </a:solidFill>
+                      <a:prstDash val="solid"/>
+                      <a:round/>
+                      <a:headEnd type="none" w="med" len="med"/>
+                      <a:tailEnd type="none" w="med" len="med"/>
+                    </a:lnB>
+                    <a:solidFill>
+                      <a:srgbClr val="FFFFFF"/>
+                    </a:solidFill>
+                  </a:tcPr>
+                </a:tc>
+                <a:tc>
+                  <a:txBody>
+                    <a:bodyPr/>
+                    <a:lstStyle/>
+                    <a:p>
+                      <a:pPr algn="l" indent="0" marL="0">
+                        <a:buNone/>
+                      </a:pPr>
+                      <a:r>
+                        <a:rPr lang="en-US" sz="1000" dirty="0">
+                          <a:solidFill>
+                            <a:srgbClr val="262626"/>
+                          </a:solidFill>
+                          <a:latin typeface="Aptos" pitchFamily="34" charset="0"/>
+                          <a:ea typeface="Aptos" pitchFamily="34" charset="-122"/>
+                          <a:cs typeface="Aptos" pitchFamily="34" charset="-120"/>
+                        </a:rPr>
+                        <a:t>Near Visakh refinery</a:t>
+                      </a:r>
+                      <a:endParaRPr lang="en-US" sz="1000" dirty="0">
+                        <a:latin typeface="Aptos" charset="0"/>
+                        <a:ea typeface="Aptos" charset="0"/>
+                        <a:cs typeface="Aptos" charset="0"/>
+                      </a:endParaRPr>
+                    </a:p>
+                  </a:txBody>
+                  <a:tcPr marL="63500" marR="63500" marT="25400" marB="25400" anchor="ctr">
+                    <a:lnL w="9525" cap="flat" cmpd="sng" algn="ctr">
+                      <a:solidFill>
+                        <a:srgbClr val="BDD7EE"/>
+                      </a:solidFill>
+                      <a:prstDash val="solid"/>
+                      <a:round/>
+                      <a:headEnd type="none" w="med" len="med"/>
+                      <a:tailEnd type="none" w="med" len="med"/>
+                    </a:lnL>
+                    <a:lnR w="9525" cap="flat" cmpd="sng" algn="ctr">
+                      <a:solidFill>
+                        <a:srgbClr val="BDD7EE"/>
+                      </a:solidFill>
+                      <a:prstDash val="solid"/>
+                      <a:round/>
+                      <a:headEnd type="none" w="med" len="med"/>
+                      <a:tailEnd type="none" w="med" len="med"/>
+                    </a:lnR>
+                    <a:lnT w="9525" cap="flat" cmpd="sng" algn="ctr">
+                      <a:solidFill>
+                        <a:srgbClr val="BDD7EE"/>
+                      </a:solidFill>
+                      <a:prstDash val="solid"/>
+                      <a:round/>
+                      <a:headEnd type="none" w="med" len="med"/>
+                      <a:tailEnd type="none" w="med" len="med"/>
+                    </a:lnT>
+                    <a:lnB w="9525" cap="flat" cmpd="sng" algn="ctr">
+                      <a:solidFill>
+                        <a:srgbClr val="BDD7EE"/>
+                      </a:solidFill>
+                      <a:prstDash val="solid"/>
+                      <a:round/>
+                      <a:headEnd type="none" w="med" len="med"/>
+                      <a:tailEnd type="none" w="med" len="med"/>
+                    </a:lnB>
+                    <a:solidFill>
+                      <a:srgbClr val="FFFFFF"/>
+                    </a:solidFill>
+                  </a:tcPr>
+                </a:tc>
+              </a:tr>
+            </a:tbl>
+          </a:graphicData>
+        </a:graphic>
+      </p:graphicFrame>
+      <p:sp>
+        <p:nvSpPr>
+          <p:cNvPr id="26" name="Text 21"/>
+          <p:cNvSpPr txBox="1"/>
+          <p:nvPr/>
+        </p:nvSpPr>
+        <p:spPr>
+          <a:xfrm>
+            <a:off x="228600" y="6108192"/>
+            <a:ext cx="11731752" cy="310896"/>
+          </a:xfrm>
+          <a:prstGeom prst="rect">
+            <a:avLst/>
+          </a:prstGeom>
+          <a:noFill/>
+          <a:ln w="9525">
+            <a:solidFill>
+              <a:srgbClr val="404040"/>
+            </a:solidFill>
+            <a:prstDash val="dash"/>
+          </a:ln>
+        </p:spPr>
+        <p:txBody>
+          <a:bodyPr wrap="square" lIns="0" tIns="76200" rIns="76200" bIns="0" rtlCol="0" anchor="ctr"/>
+          <a:lstStyle/>
+          <a:p>
+            <a:pPr indent="0" marL="0">
+              <a:buNone/>
+            </a:pPr>
+            <a:r>
+              <a:rPr lang="en-US" sz="1300" b="1" i="1" dirty="0">
+                <a:solidFill>
+                  <a:srgbClr val="262626"/>
+                </a:solidFill>
+                <a:latin typeface="Aptos" pitchFamily="34" charset="0"/>
+                <a:ea typeface="Aptos" pitchFamily="34" charset="-122"/>
+                <a:cs typeface="Aptos" pitchFamily="34" charset="-120"/>
+              </a:rPr>
+              <a:t>➤  </a:t>
+            </a:r>
+            <a:pPr indent="0" marL="0">
+              <a:buNone/>
+            </a:pPr>
+            <a:r>
+              <a:rPr lang="en-US" sz="1300" i="1" dirty="0">
+                <a:solidFill>
+                  <a:srgbClr val="262626"/>
+                </a:solidFill>
+                <a:latin typeface="Aptos" pitchFamily="34" charset="0"/>
+                <a:ea typeface="Aptos" pitchFamily="34" charset="-122"/>
+                <a:cs typeface="Aptos" pitchFamily="34" charset="-120"/>
+              </a:rPr>
+              <a:t>Tata Motors runs 5 of 10 routes with 16 H₂ trucks; Kerala (ANERT) has 2 dedicated HRS; Odisha gets 3 NTPC fuel-cell buses.</a:t>
+            </a:r>
+            <a:endParaRPr lang="en-US" sz="1300" dirty="0"/>
+          </a:p>
+        </p:txBody>
+      </p:sp>
+      <p:sp>
+        <p:nvSpPr>
+          <p:cNvPr id="27" name="Text 22"/>
+          <p:cNvSpPr txBox="1"/>
+          <p:nvPr/>
+        </p:nvSpPr>
+        <p:spPr>
+          <a:xfrm>
+            <a:off x="228600" y="6446520"/>
+            <a:ext cx="11155680" cy="329184"/>
+          </a:xfrm>
+          <a:prstGeom prst="rect">
+            <a:avLst/>
+          </a:prstGeom>
+          <a:noFill/>
+          <a:ln/>
+        </p:spPr>
+        <p:txBody>
+          <a:bodyPr wrap="square" lIns="0" tIns="0" rIns="0" bIns="0" rtlCol="0" anchor="t"/>
+          <a:lstStyle/>
+          <a:p>
+            <a:pPr indent="0" marL="0">
+              <a:buNone/>
+            </a:pPr>
+            <a:r>
+              <a:rPr lang="en-US" sz="900" i="1" dirty="0">
+                <a:solidFill>
+                  <a:srgbClr val="595959"/>
+                </a:solidFill>
+                <a:latin typeface="Aptos" pitchFamily="34" charset="0"/>
+                <a:ea typeface="Aptos" pitchFamily="34" charset="-122"/>
+                <a:cs typeface="Aptos" pitchFamily="34" charset="-120"/>
+              </a:rPr>
+              <a:t>Sources: PIB/MNRE (3 Mar 2025); Autocar Pro – Tata hydrogen truck trials; Business Standard (16 Jun 2025); Construction World – Kerala Rs 34.84 cr pilot; The Week/PTI (24 Dec 2024) – Odisha buses; Rajya Sabha reply AU5278. *MNRE has not published route-wise allocation – operators marked * are inferred from company announcements/locations.</a:t>
+            </a:r>
+            <a:endParaRPr lang="en-US" sz="900" dirty="0"/>
+          </a:p>
+        </p:txBody>
+      </p:sp>
+      <p:sp>
+        <p:nvSpPr>
+          <p:cNvPr id="28" name="Text 23"/>
+          <p:cNvSpPr txBox="1"/>
+          <p:nvPr/>
+        </p:nvSpPr>
+        <p:spPr>
+          <a:xfrm>
+            <a:off x="11430000" y="6492240"/>
+            <a:ext cx="548640" cy="274320"/>
+          </a:xfrm>
+          <a:prstGeom prst="rect">
+            <a:avLst/>
+          </a:prstGeom>
+          <a:noFill/>
+          <a:ln/>
+        </p:spPr>
+        <p:txBody>
+          <a:bodyPr wrap="square" lIns="0" tIns="0" rIns="0" bIns="0" rtlCol="0" anchor="ctr"/>
+          <a:lstStyle/>
+          <a:p>
+            <a:pPr algn="r" indent="0" marL="0">
+              <a:buNone/>
+            </a:pPr>
+            <a:r>
+              <a:rPr lang="en-US" sz="1100" dirty="0">
+                <a:solidFill>
+                  <a:srgbClr val="262626"/>
+                </a:solidFill>
+                <a:latin typeface="Aptos" pitchFamily="34" charset="0"/>
+                <a:ea typeface="Aptos" pitchFamily="34" charset="-122"/>
+                <a:cs typeface="Aptos" pitchFamily="34" charset="-120"/>
+              </a:rPr>
+              <a:t>3/4</a:t>
+            </a:r>
+            <a:endParaRPr lang="en-US" sz="1100" dirty="0"/>
+          </a:p>
+        </p:txBody>
+      </p:sp>
+    </p:spTree>
+  </p:cSld>
+  <p:clrMapOvr>
+    <a:masterClrMapping/>
+  </p:clrMapOvr>
+</p:sld>
+</file>
+
+<file path=ppt/slides/slide5.xml><?xml version="1.0" encoding="utf-8"?>
+<p:sld xmlns:a="http://schemas.openxmlformats.org/drawingml/2006/main" xmlns:r="http://schemas.openxmlformats.org/officeDocument/2006/relationships" xmlns:p="http://schemas.openxmlformats.org/presentationml/2006/main">
+  <p:cSld name="Slide 5">
+    <p:spTree>
+      <p:nvGrpSpPr>
+        <p:cNvPr id="1" name=""/>
+        <p:cNvGrpSpPr/>
+        <p:nvPr/>
+      </p:nvGrpSpPr>
+      <p:grpSpPr>
+        <a:xfrm>
+          <a:off x="0" y="0"/>
+          <a:ext cx="0" cy="0"/>
+          <a:chOff x="0" y="0"/>
+          <a:chExt cx="0" cy="0"/>
+        </a:xfrm>
+      </p:grpSpPr>
+      <p:sp>
+        <p:nvSpPr>
+          <p:cNvPr id="2" name="Text 0"/>
+          <p:cNvSpPr txBox="1"/>
+          <p:nvPr/>
+        </p:nvSpPr>
+        <p:spPr>
+          <a:xfrm>
+            <a:off x="228600" y="109728"/>
+            <a:ext cx="9326880" cy="530352"/>
+          </a:xfrm>
+          <a:prstGeom prst="rect">
+            <a:avLst/>
+          </a:prstGeom>
+          <a:noFill/>
+          <a:ln/>
+        </p:spPr>
+        <p:txBody>
+          <a:bodyPr wrap="square" lIns="0" tIns="0" rIns="0" bIns="0" rtlCol="0" anchor="ctr">
+            <a:normAutofit/>
+          </a:bodyPr>
+          <a:lstStyle/>
+          <a:p>
+            <a:pPr indent="0" marL="0">
+              <a:buNone/>
+            </a:pPr>
+            <a:r>
+              <a:rPr lang="en-US" sz="2600" b="1" dirty="0">
+                <a:solidFill>
+                  <a:srgbClr val="1F4E79"/>
+                </a:solidFill>
+                <a:latin typeface="Aptos" pitchFamily="34" charset="0"/>
+                <a:ea typeface="Aptos" pitchFamily="34" charset="-122"/>
+                <a:cs typeface="Aptos" pitchFamily="34" charset="-120"/>
+              </a:rPr>
+              <a:t>1.d Vehicles: India H₂ Pilots – Phase-2 Projects (Jul 2026)</a:t>
             </a:r>
             <a:endParaRPr lang="en-US" sz="2600" dirty="0"/>
           </a:p>
@@ -10048,7 +16163,7 @@
       </p:sp>
       <p:graphicFrame>
         <p:nvGraphicFramePr>
-          <p:cNvPr id="5" name="Table 0"/>
+          <p:cNvPr id="6" name="Table 0"/>
           <p:cNvGraphicFramePr>
             <a:graphicFrameLocks noGrp="1"/>
           </p:cNvGraphicFramePr>
@@ -12945,7 +19060,7 @@
                 <a:ea typeface="Aptos" pitchFamily="34" charset="-122"/>
                 <a:cs typeface="Aptos" pitchFamily="34" charset="-120"/>
               </a:rPr>
-              <a:t>3/3</a:t>
+              <a:t>4/4</a:t>
             </a:r>
             <a:endParaRPr lang="en-US" sz="1100" dirty="0"/>
           </a:p>
